--- a/docs/장표/발표.pptx
+++ b/docs/장표/발표.pptx
@@ -1717,8 +1717,10 @@
           <a:lstStyle/>
           <a:p>
             <a:r>
+              <a:rPr dirty="0" err="1"/>
               <a:t>제작도</a:t>
             </a:r>
+            <a:endParaRPr dirty="0"/>
           </a:p>
         </p:txBody>
       </p:sp>
@@ -1787,8 +1789,10 @@
           <a:lstStyle/>
           <a:p>
             <a:r>
+              <a:rPr dirty="0" err="1"/>
               <a:t>조립도</a:t>
             </a:r>
+            <a:endParaRPr dirty="0"/>
           </a:p>
         </p:txBody>
       </p:sp>
@@ -4977,49 +4981,6 @@
       </p:grpSpPr>
       <p:sp>
         <p:nvSpPr>
-          <p:cNvPr id="2" name="Rectangle 1"/>
-          <p:cNvSpPr/>
-          <p:nvPr/>
-        </p:nvSpPr>
-        <p:spPr>
-          <a:xfrm>
-            <a:off x="0" y="0"/>
-            <a:ext cx="12191952" cy="896683"/>
-          </a:xfrm>
-          <a:prstGeom prst="rect">
-            <a:avLst/>
-          </a:prstGeom>
-          <a:noFill/>
-          <a:ln>
-            <a:noFill/>
-          </a:ln>
-          <a:effectLst/>
-        </p:spPr>
-        <p:style>
-          <a:lnRef idx="1">
-            <a:schemeClr val="accent1"/>
-          </a:lnRef>
-          <a:fillRef idx="3">
-            <a:schemeClr val="accent1"/>
-          </a:fillRef>
-          <a:effectRef idx="2">
-            <a:schemeClr val="accent1"/>
-          </a:effectRef>
-          <a:fontRef idx="minor">
-            <a:schemeClr val="lt1"/>
-          </a:fontRef>
-        </p:style>
-        <p:txBody>
-          <a:bodyPr rtlCol="0" anchor="ctr"/>
-          <a:lstStyle/>
-          <a:p>
-            <a:pPr algn="ctr"/>
-            <a:endParaRPr/>
-          </a:p>
-        </p:txBody>
-      </p:sp>
-      <p:sp>
-        <p:nvSpPr>
           <p:cNvPr id="3" name="Rectangle 2"/>
           <p:cNvSpPr/>
           <p:nvPr/>
@@ -5201,7 +5162,7 @@
           </a:bodyPr>
           <a:lstStyle/>
           <a:p>
-            <a:pPr algn="r">
+            <a:pPr algn="ctr">
               <a:lnSpc>
                 <a:spcPts val="939"/>
               </a:lnSpc>
@@ -5339,7 +5300,7 @@
           </a:bodyPr>
           <a:lstStyle/>
           <a:p>
-            <a:pPr algn="l">
+            <a:pPr algn="ctr">
               <a:lnSpc>
                 <a:spcPts val="1004"/>
               </a:lnSpc>
@@ -5406,7 +5367,7 @@
           </a:bodyPr>
           <a:lstStyle/>
           <a:p>
-            <a:pPr algn="l">
+            <a:pPr algn="ctr">
               <a:lnSpc>
                 <a:spcPts val="1004"/>
               </a:lnSpc>
@@ -5473,7 +5434,7 @@
           </a:bodyPr>
           <a:lstStyle/>
           <a:p>
-            <a:pPr algn="l">
+            <a:pPr algn="ctr">
               <a:lnSpc>
                 <a:spcPts val="1004"/>
               </a:lnSpc>
@@ -5540,7 +5501,7 @@
           </a:bodyPr>
           <a:lstStyle/>
           <a:p>
-            <a:pPr algn="l">
+            <a:pPr algn="ctr">
               <a:lnSpc>
                 <a:spcPts val="1004"/>
               </a:lnSpc>
@@ -5607,7 +5568,7 @@
           </a:bodyPr>
           <a:lstStyle/>
           <a:p>
-            <a:pPr algn="l">
+            <a:pPr algn="ctr">
               <a:lnSpc>
                 <a:spcPts val="1004"/>
               </a:lnSpc>
@@ -5674,7 +5635,7 @@
           </a:bodyPr>
           <a:lstStyle/>
           <a:p>
-            <a:pPr algn="l">
+            <a:pPr algn="ctr">
               <a:lnSpc>
                 <a:spcPts val="1004"/>
               </a:lnSpc>
@@ -5741,7 +5702,7 @@
           </a:bodyPr>
           <a:lstStyle/>
           <a:p>
-            <a:pPr algn="l">
+            <a:pPr algn="ctr">
               <a:lnSpc>
                 <a:spcPts val="1374"/>
               </a:lnSpc>
@@ -5902,7 +5863,7 @@
           </a:bodyPr>
           <a:lstStyle/>
           <a:p>
-            <a:pPr algn="l">
+            <a:pPr algn="ctr">
               <a:lnSpc>
                 <a:spcPts val="1374"/>
               </a:lnSpc>
@@ -6063,7 +6024,7 @@
           </a:bodyPr>
           <a:lstStyle/>
           <a:p>
-            <a:pPr algn="l">
+            <a:pPr algn="ctr">
               <a:lnSpc>
                 <a:spcPts val="1374"/>
               </a:lnSpc>
@@ -6224,7 +6185,7 @@
           </a:bodyPr>
           <a:lstStyle/>
           <a:p>
-            <a:pPr algn="l">
+            <a:pPr algn="ctr">
               <a:lnSpc>
                 <a:spcPts val="1374"/>
               </a:lnSpc>
@@ -6385,7 +6346,7 @@
           </a:bodyPr>
           <a:lstStyle/>
           <a:p>
-            <a:pPr algn="l">
+            <a:pPr algn="ctr">
               <a:lnSpc>
                 <a:spcPts val="1374"/>
               </a:lnSpc>
@@ -6546,7 +6507,7 @@
           </a:bodyPr>
           <a:lstStyle/>
           <a:p>
-            <a:pPr algn="l">
+            <a:pPr algn="ctr">
               <a:lnSpc>
                 <a:spcPts val="1374"/>
               </a:lnSpc>
@@ -6692,49 +6653,6 @@
       </p:grpSpPr>
       <p:sp>
         <p:nvSpPr>
-          <p:cNvPr id="2" name="Rectangle 1"/>
-          <p:cNvSpPr/>
-          <p:nvPr/>
-        </p:nvSpPr>
-        <p:spPr>
-          <a:xfrm>
-            <a:off x="0" y="0"/>
-            <a:ext cx="12191952" cy="896683"/>
-          </a:xfrm>
-          <a:prstGeom prst="rect">
-            <a:avLst/>
-          </a:prstGeom>
-          <a:noFill/>
-          <a:ln>
-            <a:noFill/>
-          </a:ln>
-          <a:effectLst/>
-        </p:spPr>
-        <p:style>
-          <a:lnRef idx="1">
-            <a:schemeClr val="accent1"/>
-          </a:lnRef>
-          <a:fillRef idx="3">
-            <a:schemeClr val="accent1"/>
-          </a:fillRef>
-          <a:effectRef idx="2">
-            <a:schemeClr val="accent1"/>
-          </a:effectRef>
-          <a:fontRef idx="minor">
-            <a:schemeClr val="lt1"/>
-          </a:fontRef>
-        </p:style>
-        <p:txBody>
-          <a:bodyPr rtlCol="0" anchor="ctr"/>
-          <a:lstStyle/>
-          <a:p>
-            <a:pPr algn="ctr"/>
-            <a:endParaRPr/>
-          </a:p>
-        </p:txBody>
-      </p:sp>
-      <p:sp>
-        <p:nvSpPr>
           <p:cNvPr id="3" name="Rectangle 2"/>
           <p:cNvSpPr/>
           <p:nvPr/>
@@ -6916,7 +6834,7 @@
           </a:bodyPr>
           <a:lstStyle/>
           <a:p>
-            <a:pPr algn="r">
+            <a:pPr algn="ctr">
               <a:lnSpc>
                 <a:spcPts val="939"/>
               </a:lnSpc>
@@ -7054,7 +6972,7 @@
           </a:bodyPr>
           <a:lstStyle/>
           <a:p>
-            <a:pPr algn="l">
+            <a:pPr algn="ctr">
               <a:lnSpc>
                 <a:spcPts val="1004"/>
               </a:lnSpc>
@@ -7121,7 +7039,7 @@
           </a:bodyPr>
           <a:lstStyle/>
           <a:p>
-            <a:pPr algn="l">
+            <a:pPr algn="ctr">
               <a:lnSpc>
                 <a:spcPts val="1004"/>
               </a:lnSpc>
@@ -7188,7 +7106,7 @@
           </a:bodyPr>
           <a:lstStyle/>
           <a:p>
-            <a:pPr algn="l">
+            <a:pPr algn="ctr">
               <a:lnSpc>
                 <a:spcPts val="1004"/>
               </a:lnSpc>
@@ -7255,7 +7173,7 @@
           </a:bodyPr>
           <a:lstStyle/>
           <a:p>
-            <a:pPr algn="l">
+            <a:pPr algn="ctr">
               <a:lnSpc>
                 <a:spcPts val="1004"/>
               </a:lnSpc>
@@ -7322,7 +7240,7 @@
           </a:bodyPr>
           <a:lstStyle/>
           <a:p>
-            <a:pPr algn="l">
+            <a:pPr algn="ctr">
               <a:lnSpc>
                 <a:spcPts val="1004"/>
               </a:lnSpc>
@@ -7389,7 +7307,7 @@
           </a:bodyPr>
           <a:lstStyle/>
           <a:p>
-            <a:pPr algn="l">
+            <a:pPr algn="ctr">
               <a:lnSpc>
                 <a:spcPts val="1004"/>
               </a:lnSpc>
@@ -7456,7 +7374,7 @@
           </a:bodyPr>
           <a:lstStyle/>
           <a:p>
-            <a:pPr algn="l">
+            <a:pPr algn="ctr">
               <a:lnSpc>
                 <a:spcPts val="1374"/>
               </a:lnSpc>
@@ -7617,7 +7535,7 @@
           </a:bodyPr>
           <a:lstStyle/>
           <a:p>
-            <a:pPr algn="l">
+            <a:pPr algn="ctr">
               <a:lnSpc>
                 <a:spcPts val="1374"/>
               </a:lnSpc>
@@ -7778,7 +7696,7 @@
           </a:bodyPr>
           <a:lstStyle/>
           <a:p>
-            <a:pPr algn="l">
+            <a:pPr algn="ctr">
               <a:lnSpc>
                 <a:spcPts val="1374"/>
               </a:lnSpc>
@@ -7939,7 +7857,7 @@
           </a:bodyPr>
           <a:lstStyle/>
           <a:p>
-            <a:pPr algn="l">
+            <a:pPr algn="ctr">
               <a:lnSpc>
                 <a:spcPts val="1374"/>
               </a:lnSpc>
@@ -8100,7 +8018,7 @@
           </a:bodyPr>
           <a:lstStyle/>
           <a:p>
-            <a:pPr algn="l">
+            <a:pPr algn="ctr">
               <a:lnSpc>
                 <a:spcPts val="1374"/>
               </a:lnSpc>
@@ -8261,7 +8179,7 @@
           </a:bodyPr>
           <a:lstStyle/>
           <a:p>
-            <a:pPr algn="l">
+            <a:pPr algn="ctr">
               <a:lnSpc>
                 <a:spcPts val="1374"/>
               </a:lnSpc>
@@ -8407,49 +8325,6 @@
       </p:grpSpPr>
       <p:sp>
         <p:nvSpPr>
-          <p:cNvPr id="2" name="Rectangle 1"/>
-          <p:cNvSpPr/>
-          <p:nvPr/>
-        </p:nvSpPr>
-        <p:spPr>
-          <a:xfrm>
-            <a:off x="0" y="0"/>
-            <a:ext cx="12191952" cy="896683"/>
-          </a:xfrm>
-          <a:prstGeom prst="rect">
-            <a:avLst/>
-          </a:prstGeom>
-          <a:noFill/>
-          <a:ln>
-            <a:noFill/>
-          </a:ln>
-          <a:effectLst/>
-        </p:spPr>
-        <p:style>
-          <a:lnRef idx="1">
-            <a:schemeClr val="accent1"/>
-          </a:lnRef>
-          <a:fillRef idx="3">
-            <a:schemeClr val="accent1"/>
-          </a:fillRef>
-          <a:effectRef idx="2">
-            <a:schemeClr val="accent1"/>
-          </a:effectRef>
-          <a:fontRef idx="minor">
-            <a:schemeClr val="lt1"/>
-          </a:fontRef>
-        </p:style>
-        <p:txBody>
-          <a:bodyPr rtlCol="0" anchor="ctr"/>
-          <a:lstStyle/>
-          <a:p>
-            <a:pPr algn="ctr"/>
-            <a:endParaRPr/>
-          </a:p>
-        </p:txBody>
-      </p:sp>
-      <p:sp>
-        <p:nvSpPr>
           <p:cNvPr id="3" name="Rectangle 2"/>
           <p:cNvSpPr/>
           <p:nvPr/>
@@ -8631,7 +8506,7 @@
           </a:bodyPr>
           <a:lstStyle/>
           <a:p>
-            <a:pPr algn="r">
+            <a:pPr algn="ctr">
               <a:lnSpc>
                 <a:spcPts val="939"/>
               </a:lnSpc>
@@ -8678,7 +8553,7 @@
           </a:bodyPr>
           <a:lstStyle/>
           <a:p>
-            <a:pPr algn="r">
+            <a:pPr algn="ctr">
               <a:lnSpc>
                 <a:spcPts val="1134"/>
               </a:lnSpc>
@@ -8753,7 +8628,13 @@
           <p:cNvGraphicFramePr>
             <a:graphicFrameLocks noGrp="1"/>
           </p:cNvGraphicFramePr>
-          <p:nvPr/>
+          <p:nvPr>
+            <p:extLst>
+              <p:ext uri="{D42A27DB-BD31-4B8C-83A1-F6EECF244321}">
+                <p14:modId xmlns:p14="http://schemas.microsoft.com/office/powerpoint/2010/main" val="2133282780"/>
+              </p:ext>
+            </p:extLst>
+          </p:nvPr>
         </p:nvGraphicFramePr>
         <p:xfrm>
           <a:off x="487632" y="1033843"/>
@@ -8826,6 +8707,50 @@
                     </a:p>
                   </a:txBody>
                   <a:tcPr marL="36576" marR="36576" marT="9144" marB="9144" anchor="ctr">
+                    <a:lnL w="3175" cap="flat" cmpd="sng" algn="ctr">
+                      <a:solidFill>
+                        <a:schemeClr val="bg1">
+                          <a:lumMod val="50000"/>
+                        </a:schemeClr>
+                      </a:solidFill>
+                      <a:prstDash val="solid"/>
+                      <a:round/>
+                      <a:headEnd type="none" w="med" len="med"/>
+                      <a:tailEnd type="none" w="med" len="med"/>
+                    </a:lnL>
+                    <a:lnR w="3175" cap="flat" cmpd="sng" algn="ctr">
+                      <a:solidFill>
+                        <a:schemeClr val="bg1">
+                          <a:lumMod val="50000"/>
+                        </a:schemeClr>
+                      </a:solidFill>
+                      <a:prstDash val="solid"/>
+                      <a:round/>
+                      <a:headEnd type="none" w="med" len="med"/>
+                      <a:tailEnd type="none" w="med" len="med"/>
+                    </a:lnR>
+                    <a:lnT w="3175" cap="flat" cmpd="sng" algn="ctr">
+                      <a:solidFill>
+                        <a:schemeClr val="bg1">
+                          <a:lumMod val="50000"/>
+                        </a:schemeClr>
+                      </a:solidFill>
+                      <a:prstDash val="solid"/>
+                      <a:round/>
+                      <a:headEnd type="none" w="med" len="med"/>
+                      <a:tailEnd type="none" w="med" len="med"/>
+                    </a:lnT>
+                    <a:lnB w="3175" cap="flat" cmpd="sng" algn="ctr">
+                      <a:solidFill>
+                        <a:schemeClr val="bg1">
+                          <a:lumMod val="50000"/>
+                        </a:schemeClr>
+                      </a:solidFill>
+                      <a:prstDash val="solid"/>
+                      <a:round/>
+                      <a:headEnd type="none" w="med" len="med"/>
+                      <a:tailEnd type="none" w="med" len="med"/>
+                    </a:lnB>
                     <a:noFill/>
                   </a:tcPr>
                 </a:tc>
@@ -8859,6 +8784,50 @@
                     </a:p>
                   </a:txBody>
                   <a:tcPr marL="36576" marR="36576" marT="9144" marB="9144" anchor="ctr">
+                    <a:lnL w="3175" cap="flat" cmpd="sng" algn="ctr">
+                      <a:solidFill>
+                        <a:schemeClr val="bg1">
+                          <a:lumMod val="50000"/>
+                        </a:schemeClr>
+                      </a:solidFill>
+                      <a:prstDash val="solid"/>
+                      <a:round/>
+                      <a:headEnd type="none" w="med" len="med"/>
+                      <a:tailEnd type="none" w="med" len="med"/>
+                    </a:lnL>
+                    <a:lnR w="3175" cap="flat" cmpd="sng" algn="ctr">
+                      <a:solidFill>
+                        <a:schemeClr val="bg1">
+                          <a:lumMod val="50000"/>
+                        </a:schemeClr>
+                      </a:solidFill>
+                      <a:prstDash val="solid"/>
+                      <a:round/>
+                      <a:headEnd type="none" w="med" len="med"/>
+                      <a:tailEnd type="none" w="med" len="med"/>
+                    </a:lnR>
+                    <a:lnT w="3175" cap="flat" cmpd="sng" algn="ctr">
+                      <a:solidFill>
+                        <a:schemeClr val="bg1">
+                          <a:lumMod val="50000"/>
+                        </a:schemeClr>
+                      </a:solidFill>
+                      <a:prstDash val="solid"/>
+                      <a:round/>
+                      <a:headEnd type="none" w="med" len="med"/>
+                      <a:tailEnd type="none" w="med" len="med"/>
+                    </a:lnT>
+                    <a:lnB w="3175" cap="flat" cmpd="sng" algn="ctr">
+                      <a:solidFill>
+                        <a:schemeClr val="bg1">
+                          <a:lumMod val="50000"/>
+                        </a:schemeClr>
+                      </a:solidFill>
+                      <a:prstDash val="solid"/>
+                      <a:round/>
+                      <a:headEnd type="none" w="med" len="med"/>
+                      <a:tailEnd type="none" w="med" len="med"/>
+                    </a:lnB>
                     <a:noFill/>
                   </a:tcPr>
                 </a:tc>
@@ -8892,6 +8861,50 @@
                     </a:p>
                   </a:txBody>
                   <a:tcPr marL="36576" marR="36576" marT="9144" marB="9144" anchor="ctr">
+                    <a:lnL w="3175" cap="flat" cmpd="sng" algn="ctr">
+                      <a:solidFill>
+                        <a:schemeClr val="bg1">
+                          <a:lumMod val="50000"/>
+                        </a:schemeClr>
+                      </a:solidFill>
+                      <a:prstDash val="solid"/>
+                      <a:round/>
+                      <a:headEnd type="none" w="med" len="med"/>
+                      <a:tailEnd type="none" w="med" len="med"/>
+                    </a:lnL>
+                    <a:lnR w="3175" cap="flat" cmpd="sng" algn="ctr">
+                      <a:solidFill>
+                        <a:schemeClr val="bg1">
+                          <a:lumMod val="50000"/>
+                        </a:schemeClr>
+                      </a:solidFill>
+                      <a:prstDash val="solid"/>
+                      <a:round/>
+                      <a:headEnd type="none" w="med" len="med"/>
+                      <a:tailEnd type="none" w="med" len="med"/>
+                    </a:lnR>
+                    <a:lnT w="3175" cap="flat" cmpd="sng" algn="ctr">
+                      <a:solidFill>
+                        <a:schemeClr val="bg1">
+                          <a:lumMod val="50000"/>
+                        </a:schemeClr>
+                      </a:solidFill>
+                      <a:prstDash val="solid"/>
+                      <a:round/>
+                      <a:headEnd type="none" w="med" len="med"/>
+                      <a:tailEnd type="none" w="med" len="med"/>
+                    </a:lnT>
+                    <a:lnB w="3175" cap="flat" cmpd="sng" algn="ctr">
+                      <a:solidFill>
+                        <a:schemeClr val="bg1">
+                          <a:lumMod val="50000"/>
+                        </a:schemeClr>
+                      </a:solidFill>
+                      <a:prstDash val="solid"/>
+                      <a:round/>
+                      <a:headEnd type="none" w="med" len="med"/>
+                      <a:tailEnd type="none" w="med" len="med"/>
+                    </a:lnB>
                     <a:noFill/>
                   </a:tcPr>
                 </a:tc>
@@ -8925,6 +8938,50 @@
                     </a:p>
                   </a:txBody>
                   <a:tcPr marL="36576" marR="36576" marT="9144" marB="9144" anchor="ctr">
+                    <a:lnL w="3175" cap="flat" cmpd="sng" algn="ctr">
+                      <a:solidFill>
+                        <a:schemeClr val="bg1">
+                          <a:lumMod val="50000"/>
+                        </a:schemeClr>
+                      </a:solidFill>
+                      <a:prstDash val="solid"/>
+                      <a:round/>
+                      <a:headEnd type="none" w="med" len="med"/>
+                      <a:tailEnd type="none" w="med" len="med"/>
+                    </a:lnL>
+                    <a:lnR w="3175" cap="flat" cmpd="sng" algn="ctr">
+                      <a:solidFill>
+                        <a:schemeClr val="bg1">
+                          <a:lumMod val="50000"/>
+                        </a:schemeClr>
+                      </a:solidFill>
+                      <a:prstDash val="solid"/>
+                      <a:round/>
+                      <a:headEnd type="none" w="med" len="med"/>
+                      <a:tailEnd type="none" w="med" len="med"/>
+                    </a:lnR>
+                    <a:lnT w="3175" cap="flat" cmpd="sng" algn="ctr">
+                      <a:solidFill>
+                        <a:schemeClr val="bg1">
+                          <a:lumMod val="50000"/>
+                        </a:schemeClr>
+                      </a:solidFill>
+                      <a:prstDash val="solid"/>
+                      <a:round/>
+                      <a:headEnd type="none" w="med" len="med"/>
+                      <a:tailEnd type="none" w="med" len="med"/>
+                    </a:lnT>
+                    <a:lnB w="3175" cap="flat" cmpd="sng" algn="ctr">
+                      <a:solidFill>
+                        <a:schemeClr val="bg1">
+                          <a:lumMod val="50000"/>
+                        </a:schemeClr>
+                      </a:solidFill>
+                      <a:prstDash val="solid"/>
+                      <a:round/>
+                      <a:headEnd type="none" w="med" len="med"/>
+                      <a:tailEnd type="none" w="med" len="med"/>
+                    </a:lnB>
                     <a:noFill/>
                   </a:tcPr>
                 </a:tc>
@@ -8965,6 +9022,50 @@
                     </a:p>
                   </a:txBody>
                   <a:tcPr marL="36576" marR="36576" marT="9144" marB="9144" anchor="ctr">
+                    <a:lnL w="3175" cap="flat" cmpd="sng" algn="ctr">
+                      <a:solidFill>
+                        <a:schemeClr val="bg1">
+                          <a:lumMod val="50000"/>
+                        </a:schemeClr>
+                      </a:solidFill>
+                      <a:prstDash val="solid"/>
+                      <a:round/>
+                      <a:headEnd type="none" w="med" len="med"/>
+                      <a:tailEnd type="none" w="med" len="med"/>
+                    </a:lnL>
+                    <a:lnR w="3175" cap="flat" cmpd="sng" algn="ctr">
+                      <a:solidFill>
+                        <a:schemeClr val="bg1">
+                          <a:lumMod val="50000"/>
+                        </a:schemeClr>
+                      </a:solidFill>
+                      <a:prstDash val="solid"/>
+                      <a:round/>
+                      <a:headEnd type="none" w="med" len="med"/>
+                      <a:tailEnd type="none" w="med" len="med"/>
+                    </a:lnR>
+                    <a:lnT w="3175" cap="flat" cmpd="sng" algn="ctr">
+                      <a:solidFill>
+                        <a:schemeClr val="bg1">
+                          <a:lumMod val="50000"/>
+                        </a:schemeClr>
+                      </a:solidFill>
+                      <a:prstDash val="solid"/>
+                      <a:round/>
+                      <a:headEnd type="none" w="med" len="med"/>
+                      <a:tailEnd type="none" w="med" len="med"/>
+                    </a:lnT>
+                    <a:lnB w="3175" cap="flat" cmpd="sng" algn="ctr">
+                      <a:solidFill>
+                        <a:schemeClr val="bg1">
+                          <a:lumMod val="50000"/>
+                        </a:schemeClr>
+                      </a:solidFill>
+                      <a:prstDash val="solid"/>
+                      <a:round/>
+                      <a:headEnd type="none" w="med" len="med"/>
+                      <a:tailEnd type="none" w="med" len="med"/>
+                    </a:lnB>
                     <a:solidFill>
                       <a:srgbClr val="EEF4FB"/>
                     </a:solidFill>
@@ -9037,6 +9138,50 @@
                     </a:p>
                   </a:txBody>
                   <a:tcPr marL="36576" marR="36576" marT="9144" marB="9144" anchor="ctr">
+                    <a:lnL w="3175" cap="flat" cmpd="sng" algn="ctr">
+                      <a:solidFill>
+                        <a:schemeClr val="bg1">
+                          <a:lumMod val="50000"/>
+                        </a:schemeClr>
+                      </a:solidFill>
+                      <a:prstDash val="solid"/>
+                      <a:round/>
+                      <a:headEnd type="none" w="med" len="med"/>
+                      <a:tailEnd type="none" w="med" len="med"/>
+                    </a:lnL>
+                    <a:lnR w="3175" cap="flat" cmpd="sng" algn="ctr">
+                      <a:solidFill>
+                        <a:schemeClr val="bg1">
+                          <a:lumMod val="50000"/>
+                        </a:schemeClr>
+                      </a:solidFill>
+                      <a:prstDash val="solid"/>
+                      <a:round/>
+                      <a:headEnd type="none" w="med" len="med"/>
+                      <a:tailEnd type="none" w="med" len="med"/>
+                    </a:lnR>
+                    <a:lnT w="3175" cap="flat" cmpd="sng" algn="ctr">
+                      <a:solidFill>
+                        <a:schemeClr val="bg1">
+                          <a:lumMod val="50000"/>
+                        </a:schemeClr>
+                      </a:solidFill>
+                      <a:prstDash val="solid"/>
+                      <a:round/>
+                      <a:headEnd type="none" w="med" len="med"/>
+                      <a:tailEnd type="none" w="med" len="med"/>
+                    </a:lnT>
+                    <a:lnB w="3175" cap="flat" cmpd="sng" algn="ctr">
+                      <a:solidFill>
+                        <a:schemeClr val="bg1">
+                          <a:lumMod val="50000"/>
+                        </a:schemeClr>
+                      </a:solidFill>
+                      <a:prstDash val="solid"/>
+                      <a:round/>
+                      <a:headEnd type="none" w="med" len="med"/>
+                      <a:tailEnd type="none" w="med" len="med"/>
+                    </a:lnB>
                     <a:noFill/>
                   </a:tcPr>
                 </a:tc>
@@ -9070,6 +9215,50 @@
                     </a:p>
                   </a:txBody>
                   <a:tcPr marL="36576" marR="36576" marT="9144" marB="9144" anchor="ctr">
+                    <a:lnL w="3175" cap="flat" cmpd="sng" algn="ctr">
+                      <a:solidFill>
+                        <a:schemeClr val="bg1">
+                          <a:lumMod val="50000"/>
+                        </a:schemeClr>
+                      </a:solidFill>
+                      <a:prstDash val="solid"/>
+                      <a:round/>
+                      <a:headEnd type="none" w="med" len="med"/>
+                      <a:tailEnd type="none" w="med" len="med"/>
+                    </a:lnL>
+                    <a:lnR w="3175" cap="flat" cmpd="sng" algn="ctr">
+                      <a:solidFill>
+                        <a:schemeClr val="bg1">
+                          <a:lumMod val="50000"/>
+                        </a:schemeClr>
+                      </a:solidFill>
+                      <a:prstDash val="solid"/>
+                      <a:round/>
+                      <a:headEnd type="none" w="med" len="med"/>
+                      <a:tailEnd type="none" w="med" len="med"/>
+                    </a:lnR>
+                    <a:lnT w="3175" cap="flat" cmpd="sng" algn="ctr">
+                      <a:solidFill>
+                        <a:schemeClr val="bg1">
+                          <a:lumMod val="50000"/>
+                        </a:schemeClr>
+                      </a:solidFill>
+                      <a:prstDash val="solid"/>
+                      <a:round/>
+                      <a:headEnd type="none" w="med" len="med"/>
+                      <a:tailEnd type="none" w="med" len="med"/>
+                    </a:lnT>
+                    <a:lnB w="3175" cap="flat" cmpd="sng" algn="ctr">
+                      <a:solidFill>
+                        <a:schemeClr val="bg1">
+                          <a:lumMod val="50000"/>
+                        </a:schemeClr>
+                      </a:solidFill>
+                      <a:prstDash val="solid"/>
+                      <a:round/>
+                      <a:headEnd type="none" w="med" len="med"/>
+                      <a:tailEnd type="none" w="med" len="med"/>
+                    </a:lnB>
                     <a:noFill/>
                   </a:tcPr>
                 </a:tc>
@@ -9103,6 +9292,50 @@
                     </a:p>
                   </a:txBody>
                   <a:tcPr marL="36576" marR="36576" marT="9144" marB="9144" anchor="ctr">
+                    <a:lnL w="3175" cap="flat" cmpd="sng" algn="ctr">
+                      <a:solidFill>
+                        <a:schemeClr val="bg1">
+                          <a:lumMod val="50000"/>
+                        </a:schemeClr>
+                      </a:solidFill>
+                      <a:prstDash val="solid"/>
+                      <a:round/>
+                      <a:headEnd type="none" w="med" len="med"/>
+                      <a:tailEnd type="none" w="med" len="med"/>
+                    </a:lnL>
+                    <a:lnR w="3175" cap="flat" cmpd="sng" algn="ctr">
+                      <a:solidFill>
+                        <a:schemeClr val="bg1">
+                          <a:lumMod val="50000"/>
+                        </a:schemeClr>
+                      </a:solidFill>
+                      <a:prstDash val="solid"/>
+                      <a:round/>
+                      <a:headEnd type="none" w="med" len="med"/>
+                      <a:tailEnd type="none" w="med" len="med"/>
+                    </a:lnR>
+                    <a:lnT w="3175" cap="flat" cmpd="sng" algn="ctr">
+                      <a:solidFill>
+                        <a:schemeClr val="bg1">
+                          <a:lumMod val="50000"/>
+                        </a:schemeClr>
+                      </a:solidFill>
+                      <a:prstDash val="solid"/>
+                      <a:round/>
+                      <a:headEnd type="none" w="med" len="med"/>
+                      <a:tailEnd type="none" w="med" len="med"/>
+                    </a:lnT>
+                    <a:lnB w="3175" cap="flat" cmpd="sng" algn="ctr">
+                      <a:solidFill>
+                        <a:schemeClr val="bg1">
+                          <a:lumMod val="50000"/>
+                        </a:schemeClr>
+                      </a:solidFill>
+                      <a:prstDash val="solid"/>
+                      <a:round/>
+                      <a:headEnd type="none" w="med" len="med"/>
+                      <a:tailEnd type="none" w="med" len="med"/>
+                    </a:lnB>
                     <a:noFill/>
                   </a:tcPr>
                 </a:tc>
@@ -9136,6 +9369,50 @@
                     </a:p>
                   </a:txBody>
                   <a:tcPr marL="36576" marR="36576" marT="9144" marB="9144" anchor="ctr">
+                    <a:lnL w="3175" cap="flat" cmpd="sng" algn="ctr">
+                      <a:solidFill>
+                        <a:schemeClr val="bg1">
+                          <a:lumMod val="50000"/>
+                        </a:schemeClr>
+                      </a:solidFill>
+                      <a:prstDash val="solid"/>
+                      <a:round/>
+                      <a:headEnd type="none" w="med" len="med"/>
+                      <a:tailEnd type="none" w="med" len="med"/>
+                    </a:lnL>
+                    <a:lnR w="3175" cap="flat" cmpd="sng" algn="ctr">
+                      <a:solidFill>
+                        <a:schemeClr val="bg1">
+                          <a:lumMod val="50000"/>
+                        </a:schemeClr>
+                      </a:solidFill>
+                      <a:prstDash val="solid"/>
+                      <a:round/>
+                      <a:headEnd type="none" w="med" len="med"/>
+                      <a:tailEnd type="none" w="med" len="med"/>
+                    </a:lnR>
+                    <a:lnT w="3175" cap="flat" cmpd="sng" algn="ctr">
+                      <a:solidFill>
+                        <a:schemeClr val="bg1">
+                          <a:lumMod val="50000"/>
+                        </a:schemeClr>
+                      </a:solidFill>
+                      <a:prstDash val="solid"/>
+                      <a:round/>
+                      <a:headEnd type="none" w="med" len="med"/>
+                      <a:tailEnd type="none" w="med" len="med"/>
+                    </a:lnT>
+                    <a:lnB w="3175" cap="flat" cmpd="sng" algn="ctr">
+                      <a:solidFill>
+                        <a:schemeClr val="bg1">
+                          <a:lumMod val="50000"/>
+                        </a:schemeClr>
+                      </a:solidFill>
+                      <a:prstDash val="solid"/>
+                      <a:round/>
+                      <a:headEnd type="none" w="med" len="med"/>
+                      <a:tailEnd type="none" w="med" len="med"/>
+                    </a:lnB>
                     <a:noFill/>
                   </a:tcPr>
                 </a:tc>
@@ -9176,6 +9453,50 @@
                     </a:p>
                   </a:txBody>
                   <a:tcPr marL="36576" marR="36576" marT="9144" marB="9144" anchor="ctr">
+                    <a:lnL w="3175" cap="flat" cmpd="sng" algn="ctr">
+                      <a:solidFill>
+                        <a:schemeClr val="bg1">
+                          <a:lumMod val="50000"/>
+                        </a:schemeClr>
+                      </a:solidFill>
+                      <a:prstDash val="solid"/>
+                      <a:round/>
+                      <a:headEnd type="none" w="med" len="med"/>
+                      <a:tailEnd type="none" w="med" len="med"/>
+                    </a:lnL>
+                    <a:lnR w="3175" cap="flat" cmpd="sng" algn="ctr">
+                      <a:solidFill>
+                        <a:schemeClr val="bg1">
+                          <a:lumMod val="50000"/>
+                        </a:schemeClr>
+                      </a:solidFill>
+                      <a:prstDash val="solid"/>
+                      <a:round/>
+                      <a:headEnd type="none" w="med" len="med"/>
+                      <a:tailEnd type="none" w="med" len="med"/>
+                    </a:lnR>
+                    <a:lnT w="3175" cap="flat" cmpd="sng" algn="ctr">
+                      <a:solidFill>
+                        <a:schemeClr val="bg1">
+                          <a:lumMod val="50000"/>
+                        </a:schemeClr>
+                      </a:solidFill>
+                      <a:prstDash val="solid"/>
+                      <a:round/>
+                      <a:headEnd type="none" w="med" len="med"/>
+                      <a:tailEnd type="none" w="med" len="med"/>
+                    </a:lnT>
+                    <a:lnB w="3175" cap="flat" cmpd="sng" algn="ctr">
+                      <a:solidFill>
+                        <a:schemeClr val="bg1">
+                          <a:lumMod val="50000"/>
+                        </a:schemeClr>
+                      </a:solidFill>
+                      <a:prstDash val="solid"/>
+                      <a:round/>
+                      <a:headEnd type="none" w="med" len="med"/>
+                      <a:tailEnd type="none" w="med" len="med"/>
+                    </a:lnB>
                     <a:noFill/>
                   </a:tcPr>
                 </a:tc>
@@ -9209,6 +9530,50 @@
                     </a:p>
                   </a:txBody>
                   <a:tcPr marL="36576" marR="36576" marT="9144" marB="9144" anchor="ctr">
+                    <a:lnL w="3175" cap="flat" cmpd="sng" algn="ctr">
+                      <a:solidFill>
+                        <a:schemeClr val="bg1">
+                          <a:lumMod val="50000"/>
+                        </a:schemeClr>
+                      </a:solidFill>
+                      <a:prstDash val="solid"/>
+                      <a:round/>
+                      <a:headEnd type="none" w="med" len="med"/>
+                      <a:tailEnd type="none" w="med" len="med"/>
+                    </a:lnL>
+                    <a:lnR w="3175" cap="flat" cmpd="sng" algn="ctr">
+                      <a:solidFill>
+                        <a:schemeClr val="bg1">
+                          <a:lumMod val="50000"/>
+                        </a:schemeClr>
+                      </a:solidFill>
+                      <a:prstDash val="solid"/>
+                      <a:round/>
+                      <a:headEnd type="none" w="med" len="med"/>
+                      <a:tailEnd type="none" w="med" len="med"/>
+                    </a:lnR>
+                    <a:lnT w="3175" cap="flat" cmpd="sng" algn="ctr">
+                      <a:solidFill>
+                        <a:schemeClr val="bg1">
+                          <a:lumMod val="50000"/>
+                        </a:schemeClr>
+                      </a:solidFill>
+                      <a:prstDash val="solid"/>
+                      <a:round/>
+                      <a:headEnd type="none" w="med" len="med"/>
+                      <a:tailEnd type="none" w="med" len="med"/>
+                    </a:lnT>
+                    <a:lnB w="3175" cap="flat" cmpd="sng" algn="ctr">
+                      <a:solidFill>
+                        <a:schemeClr val="bg1">
+                          <a:lumMod val="50000"/>
+                        </a:schemeClr>
+                      </a:solidFill>
+                      <a:prstDash val="solid"/>
+                      <a:round/>
+                      <a:headEnd type="none" w="med" len="med"/>
+                      <a:tailEnd type="none" w="med" len="med"/>
+                    </a:lnB>
                     <a:noFill/>
                   </a:tcPr>
                 </a:tc>
@@ -9264,6 +9629,50 @@
                     </a:p>
                   </a:txBody>
                   <a:tcPr marL="36576" marR="36576" marT="9144" marB="9144" anchor="ctr">
+                    <a:lnL w="3175" cap="flat" cmpd="sng" algn="ctr">
+                      <a:solidFill>
+                        <a:schemeClr val="bg1">
+                          <a:lumMod val="50000"/>
+                        </a:schemeClr>
+                      </a:solidFill>
+                      <a:prstDash val="solid"/>
+                      <a:round/>
+                      <a:headEnd type="none" w="med" len="med"/>
+                      <a:tailEnd type="none" w="med" len="med"/>
+                    </a:lnL>
+                    <a:lnR w="3175" cap="flat" cmpd="sng" algn="ctr">
+                      <a:solidFill>
+                        <a:schemeClr val="bg1">
+                          <a:lumMod val="50000"/>
+                        </a:schemeClr>
+                      </a:solidFill>
+                      <a:prstDash val="solid"/>
+                      <a:round/>
+                      <a:headEnd type="none" w="med" len="med"/>
+                      <a:tailEnd type="none" w="med" len="med"/>
+                    </a:lnR>
+                    <a:lnT w="3175" cap="flat" cmpd="sng" algn="ctr">
+                      <a:solidFill>
+                        <a:schemeClr val="bg1">
+                          <a:lumMod val="50000"/>
+                        </a:schemeClr>
+                      </a:solidFill>
+                      <a:prstDash val="solid"/>
+                      <a:round/>
+                      <a:headEnd type="none" w="med" len="med"/>
+                      <a:tailEnd type="none" w="med" len="med"/>
+                    </a:lnT>
+                    <a:lnB w="3175" cap="flat" cmpd="sng" algn="ctr">
+                      <a:solidFill>
+                        <a:schemeClr val="bg1">
+                          <a:lumMod val="50000"/>
+                        </a:schemeClr>
+                      </a:solidFill>
+                      <a:prstDash val="solid"/>
+                      <a:round/>
+                      <a:headEnd type="none" w="med" len="med"/>
+                      <a:tailEnd type="none" w="med" len="med"/>
+                    </a:lnB>
                     <a:noFill/>
                   </a:tcPr>
                 </a:tc>
@@ -9297,6 +9706,50 @@
                     </a:p>
                   </a:txBody>
                   <a:tcPr marL="36576" marR="36576" marT="9144" marB="9144" anchor="ctr">
+                    <a:lnL w="3175" cap="flat" cmpd="sng" algn="ctr">
+                      <a:solidFill>
+                        <a:schemeClr val="bg1">
+                          <a:lumMod val="50000"/>
+                        </a:schemeClr>
+                      </a:solidFill>
+                      <a:prstDash val="solid"/>
+                      <a:round/>
+                      <a:headEnd type="none" w="med" len="med"/>
+                      <a:tailEnd type="none" w="med" len="med"/>
+                    </a:lnL>
+                    <a:lnR w="3175" cap="flat" cmpd="sng" algn="ctr">
+                      <a:solidFill>
+                        <a:schemeClr val="bg1">
+                          <a:lumMod val="50000"/>
+                        </a:schemeClr>
+                      </a:solidFill>
+                      <a:prstDash val="solid"/>
+                      <a:round/>
+                      <a:headEnd type="none" w="med" len="med"/>
+                      <a:tailEnd type="none" w="med" len="med"/>
+                    </a:lnR>
+                    <a:lnT w="3175" cap="flat" cmpd="sng" algn="ctr">
+                      <a:solidFill>
+                        <a:schemeClr val="bg1">
+                          <a:lumMod val="50000"/>
+                        </a:schemeClr>
+                      </a:solidFill>
+                      <a:prstDash val="solid"/>
+                      <a:round/>
+                      <a:headEnd type="none" w="med" len="med"/>
+                      <a:tailEnd type="none" w="med" len="med"/>
+                    </a:lnT>
+                    <a:lnB w="3175" cap="flat" cmpd="sng" algn="ctr">
+                      <a:solidFill>
+                        <a:schemeClr val="bg1">
+                          <a:lumMod val="50000"/>
+                        </a:schemeClr>
+                      </a:solidFill>
+                      <a:prstDash val="solid"/>
+                      <a:round/>
+                      <a:headEnd type="none" w="med" len="med"/>
+                      <a:tailEnd type="none" w="med" len="med"/>
+                    </a:lnB>
                     <a:noFill/>
                   </a:tcPr>
                 </a:tc>
@@ -9337,6 +9790,50 @@
                     </a:p>
                   </a:txBody>
                   <a:tcPr marL="36576" marR="36576" marT="9144" marB="9144" anchor="ctr">
+                    <a:lnL w="3175" cap="flat" cmpd="sng" algn="ctr">
+                      <a:solidFill>
+                        <a:schemeClr val="bg1">
+                          <a:lumMod val="50000"/>
+                        </a:schemeClr>
+                      </a:solidFill>
+                      <a:prstDash val="solid"/>
+                      <a:round/>
+                      <a:headEnd type="none" w="med" len="med"/>
+                      <a:tailEnd type="none" w="med" len="med"/>
+                    </a:lnL>
+                    <a:lnR w="3175" cap="flat" cmpd="sng" algn="ctr">
+                      <a:solidFill>
+                        <a:schemeClr val="bg1">
+                          <a:lumMod val="50000"/>
+                        </a:schemeClr>
+                      </a:solidFill>
+                      <a:prstDash val="solid"/>
+                      <a:round/>
+                      <a:headEnd type="none" w="med" len="med"/>
+                      <a:tailEnd type="none" w="med" len="med"/>
+                    </a:lnR>
+                    <a:lnT w="3175" cap="flat" cmpd="sng" algn="ctr">
+                      <a:solidFill>
+                        <a:schemeClr val="bg1">
+                          <a:lumMod val="50000"/>
+                        </a:schemeClr>
+                      </a:solidFill>
+                      <a:prstDash val="solid"/>
+                      <a:round/>
+                      <a:headEnd type="none" w="med" len="med"/>
+                      <a:tailEnd type="none" w="med" len="med"/>
+                    </a:lnT>
+                    <a:lnB w="3175" cap="flat" cmpd="sng" algn="ctr">
+                      <a:solidFill>
+                        <a:schemeClr val="bg1">
+                          <a:lumMod val="50000"/>
+                        </a:schemeClr>
+                      </a:solidFill>
+                      <a:prstDash val="solid"/>
+                      <a:round/>
+                      <a:headEnd type="none" w="med" len="med"/>
+                      <a:tailEnd type="none" w="med" len="med"/>
+                    </a:lnB>
                     <a:noFill/>
                   </a:tcPr>
                 </a:tc>
@@ -9370,6 +9867,50 @@
                     </a:p>
                   </a:txBody>
                   <a:tcPr marL="36576" marR="36576" marT="9144" marB="9144" anchor="ctr">
+                    <a:lnL w="3175" cap="flat" cmpd="sng" algn="ctr">
+                      <a:solidFill>
+                        <a:schemeClr val="bg1">
+                          <a:lumMod val="50000"/>
+                        </a:schemeClr>
+                      </a:solidFill>
+                      <a:prstDash val="solid"/>
+                      <a:round/>
+                      <a:headEnd type="none" w="med" len="med"/>
+                      <a:tailEnd type="none" w="med" len="med"/>
+                    </a:lnL>
+                    <a:lnR w="3175" cap="flat" cmpd="sng" algn="ctr">
+                      <a:solidFill>
+                        <a:schemeClr val="bg1">
+                          <a:lumMod val="50000"/>
+                        </a:schemeClr>
+                      </a:solidFill>
+                      <a:prstDash val="solid"/>
+                      <a:round/>
+                      <a:headEnd type="none" w="med" len="med"/>
+                      <a:tailEnd type="none" w="med" len="med"/>
+                    </a:lnR>
+                    <a:lnT w="3175" cap="flat" cmpd="sng" algn="ctr">
+                      <a:solidFill>
+                        <a:schemeClr val="bg1">
+                          <a:lumMod val="50000"/>
+                        </a:schemeClr>
+                      </a:solidFill>
+                      <a:prstDash val="solid"/>
+                      <a:round/>
+                      <a:headEnd type="none" w="med" len="med"/>
+                      <a:tailEnd type="none" w="med" len="med"/>
+                    </a:lnT>
+                    <a:lnB w="3175" cap="flat" cmpd="sng" algn="ctr">
+                      <a:solidFill>
+                        <a:schemeClr val="bg1">
+                          <a:lumMod val="50000"/>
+                        </a:schemeClr>
+                      </a:solidFill>
+                      <a:prstDash val="solid"/>
+                      <a:round/>
+                      <a:headEnd type="none" w="med" len="med"/>
+                      <a:tailEnd type="none" w="med" len="med"/>
+                    </a:lnB>
                     <a:noFill/>
                   </a:tcPr>
                 </a:tc>
@@ -9414,6 +9955,50 @@
                     </a:p>
                   </a:txBody>
                   <a:tcPr marL="36576" marR="36576" marT="9144" marB="9144" anchor="ctr">
+                    <a:lnL w="3175" cap="flat" cmpd="sng" algn="ctr">
+                      <a:solidFill>
+                        <a:schemeClr val="bg1">
+                          <a:lumMod val="50000"/>
+                        </a:schemeClr>
+                      </a:solidFill>
+                      <a:prstDash val="solid"/>
+                      <a:round/>
+                      <a:headEnd type="none" w="med" len="med"/>
+                      <a:tailEnd type="none" w="med" len="med"/>
+                    </a:lnL>
+                    <a:lnR w="3175" cap="flat" cmpd="sng" algn="ctr">
+                      <a:solidFill>
+                        <a:schemeClr val="bg1">
+                          <a:lumMod val="50000"/>
+                        </a:schemeClr>
+                      </a:solidFill>
+                      <a:prstDash val="solid"/>
+                      <a:round/>
+                      <a:headEnd type="none" w="med" len="med"/>
+                      <a:tailEnd type="none" w="med" len="med"/>
+                    </a:lnR>
+                    <a:lnT w="3175" cap="flat" cmpd="sng" algn="ctr">
+                      <a:solidFill>
+                        <a:schemeClr val="bg1">
+                          <a:lumMod val="50000"/>
+                        </a:schemeClr>
+                      </a:solidFill>
+                      <a:prstDash val="solid"/>
+                      <a:round/>
+                      <a:headEnd type="none" w="med" len="med"/>
+                      <a:tailEnd type="none" w="med" len="med"/>
+                    </a:lnT>
+                    <a:lnB w="3175" cap="flat" cmpd="sng" algn="ctr">
+                      <a:solidFill>
+                        <a:schemeClr val="bg1">
+                          <a:lumMod val="50000"/>
+                        </a:schemeClr>
+                      </a:solidFill>
+                      <a:prstDash val="solid"/>
+                      <a:round/>
+                      <a:headEnd type="none" w="med" len="med"/>
+                      <a:tailEnd type="none" w="med" len="med"/>
+                    </a:lnB>
                     <a:noFill/>
                   </a:tcPr>
                 </a:tc>
@@ -9447,6 +10032,50 @@
                     </a:p>
                   </a:txBody>
                   <a:tcPr marL="36576" marR="36576" marT="9144" marB="9144" anchor="ctr">
+                    <a:lnL w="3175" cap="flat" cmpd="sng" algn="ctr">
+                      <a:solidFill>
+                        <a:schemeClr val="bg1">
+                          <a:lumMod val="50000"/>
+                        </a:schemeClr>
+                      </a:solidFill>
+                      <a:prstDash val="solid"/>
+                      <a:round/>
+                      <a:headEnd type="none" w="med" len="med"/>
+                      <a:tailEnd type="none" w="med" len="med"/>
+                    </a:lnL>
+                    <a:lnR w="3175" cap="flat" cmpd="sng" algn="ctr">
+                      <a:solidFill>
+                        <a:schemeClr val="bg1">
+                          <a:lumMod val="50000"/>
+                        </a:schemeClr>
+                      </a:solidFill>
+                      <a:prstDash val="solid"/>
+                      <a:round/>
+                      <a:headEnd type="none" w="med" len="med"/>
+                      <a:tailEnd type="none" w="med" len="med"/>
+                    </a:lnR>
+                    <a:lnT w="3175" cap="flat" cmpd="sng" algn="ctr">
+                      <a:solidFill>
+                        <a:schemeClr val="bg1">
+                          <a:lumMod val="50000"/>
+                        </a:schemeClr>
+                      </a:solidFill>
+                      <a:prstDash val="solid"/>
+                      <a:round/>
+                      <a:headEnd type="none" w="med" len="med"/>
+                      <a:tailEnd type="none" w="med" len="med"/>
+                    </a:lnT>
+                    <a:lnB w="3175" cap="flat" cmpd="sng" algn="ctr">
+                      <a:solidFill>
+                        <a:schemeClr val="bg1">
+                          <a:lumMod val="50000"/>
+                        </a:schemeClr>
+                      </a:solidFill>
+                      <a:prstDash val="solid"/>
+                      <a:round/>
+                      <a:headEnd type="none" w="med" len="med"/>
+                      <a:tailEnd type="none" w="med" len="med"/>
+                    </a:lnB>
                     <a:noFill/>
                   </a:tcPr>
                 </a:tc>
@@ -9487,6 +10116,50 @@
                     </a:p>
                   </a:txBody>
                   <a:tcPr marL="36576" marR="36576" marT="9144" marB="9144" anchor="ctr">
+                    <a:lnL w="3175" cap="flat" cmpd="sng" algn="ctr">
+                      <a:solidFill>
+                        <a:schemeClr val="bg1">
+                          <a:lumMod val="50000"/>
+                        </a:schemeClr>
+                      </a:solidFill>
+                      <a:prstDash val="solid"/>
+                      <a:round/>
+                      <a:headEnd type="none" w="med" len="med"/>
+                      <a:tailEnd type="none" w="med" len="med"/>
+                    </a:lnL>
+                    <a:lnR w="3175" cap="flat" cmpd="sng" algn="ctr">
+                      <a:solidFill>
+                        <a:schemeClr val="bg1">
+                          <a:lumMod val="50000"/>
+                        </a:schemeClr>
+                      </a:solidFill>
+                      <a:prstDash val="solid"/>
+                      <a:round/>
+                      <a:headEnd type="none" w="med" len="med"/>
+                      <a:tailEnd type="none" w="med" len="med"/>
+                    </a:lnR>
+                    <a:lnT w="3175" cap="flat" cmpd="sng" algn="ctr">
+                      <a:solidFill>
+                        <a:schemeClr val="bg1">
+                          <a:lumMod val="50000"/>
+                        </a:schemeClr>
+                      </a:solidFill>
+                      <a:prstDash val="solid"/>
+                      <a:round/>
+                      <a:headEnd type="none" w="med" len="med"/>
+                      <a:tailEnd type="none" w="med" len="med"/>
+                    </a:lnT>
+                    <a:lnB w="3175" cap="flat" cmpd="sng" algn="ctr">
+                      <a:solidFill>
+                        <a:schemeClr val="bg1">
+                          <a:lumMod val="50000"/>
+                        </a:schemeClr>
+                      </a:solidFill>
+                      <a:prstDash val="solid"/>
+                      <a:round/>
+                      <a:headEnd type="none" w="med" len="med"/>
+                      <a:tailEnd type="none" w="med" len="med"/>
+                    </a:lnB>
                     <a:noFill/>
                   </a:tcPr>
                 </a:tc>
@@ -9520,6 +10193,50 @@
                     </a:p>
                   </a:txBody>
                   <a:tcPr marL="36576" marR="36576" marT="9144" marB="9144" anchor="ctr">
+                    <a:lnL w="3175" cap="flat" cmpd="sng" algn="ctr">
+                      <a:solidFill>
+                        <a:schemeClr val="bg1">
+                          <a:lumMod val="50000"/>
+                        </a:schemeClr>
+                      </a:solidFill>
+                      <a:prstDash val="solid"/>
+                      <a:round/>
+                      <a:headEnd type="none" w="med" len="med"/>
+                      <a:tailEnd type="none" w="med" len="med"/>
+                    </a:lnL>
+                    <a:lnR w="3175" cap="flat" cmpd="sng" algn="ctr">
+                      <a:solidFill>
+                        <a:schemeClr val="bg1">
+                          <a:lumMod val="50000"/>
+                        </a:schemeClr>
+                      </a:solidFill>
+                      <a:prstDash val="solid"/>
+                      <a:round/>
+                      <a:headEnd type="none" w="med" len="med"/>
+                      <a:tailEnd type="none" w="med" len="med"/>
+                    </a:lnR>
+                    <a:lnT w="3175" cap="flat" cmpd="sng" algn="ctr">
+                      <a:solidFill>
+                        <a:schemeClr val="bg1">
+                          <a:lumMod val="50000"/>
+                        </a:schemeClr>
+                      </a:solidFill>
+                      <a:prstDash val="solid"/>
+                      <a:round/>
+                      <a:headEnd type="none" w="med" len="med"/>
+                      <a:tailEnd type="none" w="med" len="med"/>
+                    </a:lnT>
+                    <a:lnB w="3175" cap="flat" cmpd="sng" algn="ctr">
+                      <a:solidFill>
+                        <a:schemeClr val="bg1">
+                          <a:lumMod val="50000"/>
+                        </a:schemeClr>
+                      </a:solidFill>
+                      <a:prstDash val="solid"/>
+                      <a:round/>
+                      <a:headEnd type="none" w="med" len="med"/>
+                      <a:tailEnd type="none" w="med" len="med"/>
+                    </a:lnB>
                     <a:noFill/>
                   </a:tcPr>
                 </a:tc>
@@ -9564,6 +10281,50 @@
                     </a:p>
                   </a:txBody>
                   <a:tcPr marL="36576" marR="36576" marT="9144" marB="9144" anchor="ctr">
+                    <a:lnL w="3175" cap="flat" cmpd="sng" algn="ctr">
+                      <a:solidFill>
+                        <a:schemeClr val="bg1">
+                          <a:lumMod val="50000"/>
+                        </a:schemeClr>
+                      </a:solidFill>
+                      <a:prstDash val="solid"/>
+                      <a:round/>
+                      <a:headEnd type="none" w="med" len="med"/>
+                      <a:tailEnd type="none" w="med" len="med"/>
+                    </a:lnL>
+                    <a:lnR w="3175" cap="flat" cmpd="sng" algn="ctr">
+                      <a:solidFill>
+                        <a:schemeClr val="bg1">
+                          <a:lumMod val="50000"/>
+                        </a:schemeClr>
+                      </a:solidFill>
+                      <a:prstDash val="solid"/>
+                      <a:round/>
+                      <a:headEnd type="none" w="med" len="med"/>
+                      <a:tailEnd type="none" w="med" len="med"/>
+                    </a:lnR>
+                    <a:lnT w="3175" cap="flat" cmpd="sng" algn="ctr">
+                      <a:solidFill>
+                        <a:schemeClr val="bg1">
+                          <a:lumMod val="50000"/>
+                        </a:schemeClr>
+                      </a:solidFill>
+                      <a:prstDash val="solid"/>
+                      <a:round/>
+                      <a:headEnd type="none" w="med" len="med"/>
+                      <a:tailEnd type="none" w="med" len="med"/>
+                    </a:lnT>
+                    <a:lnB w="3175" cap="flat" cmpd="sng" algn="ctr">
+                      <a:solidFill>
+                        <a:schemeClr val="bg1">
+                          <a:lumMod val="50000"/>
+                        </a:schemeClr>
+                      </a:solidFill>
+                      <a:prstDash val="solid"/>
+                      <a:round/>
+                      <a:headEnd type="none" w="med" len="med"/>
+                      <a:tailEnd type="none" w="med" len="med"/>
+                    </a:lnB>
                     <a:noFill/>
                   </a:tcPr>
                 </a:tc>
@@ -9597,6 +10358,50 @@
                     </a:p>
                   </a:txBody>
                   <a:tcPr marL="36576" marR="36576" marT="9144" marB="9144" anchor="ctr">
+                    <a:lnL w="3175" cap="flat" cmpd="sng" algn="ctr">
+                      <a:solidFill>
+                        <a:schemeClr val="bg1">
+                          <a:lumMod val="50000"/>
+                        </a:schemeClr>
+                      </a:solidFill>
+                      <a:prstDash val="solid"/>
+                      <a:round/>
+                      <a:headEnd type="none" w="med" len="med"/>
+                      <a:tailEnd type="none" w="med" len="med"/>
+                    </a:lnL>
+                    <a:lnR w="3175" cap="flat" cmpd="sng" algn="ctr">
+                      <a:solidFill>
+                        <a:schemeClr val="bg1">
+                          <a:lumMod val="50000"/>
+                        </a:schemeClr>
+                      </a:solidFill>
+                      <a:prstDash val="solid"/>
+                      <a:round/>
+                      <a:headEnd type="none" w="med" len="med"/>
+                      <a:tailEnd type="none" w="med" len="med"/>
+                    </a:lnR>
+                    <a:lnT w="3175" cap="flat" cmpd="sng" algn="ctr">
+                      <a:solidFill>
+                        <a:schemeClr val="bg1">
+                          <a:lumMod val="50000"/>
+                        </a:schemeClr>
+                      </a:solidFill>
+                      <a:prstDash val="solid"/>
+                      <a:round/>
+                      <a:headEnd type="none" w="med" len="med"/>
+                      <a:tailEnd type="none" w="med" len="med"/>
+                    </a:lnT>
+                    <a:lnB w="3175" cap="flat" cmpd="sng" algn="ctr">
+                      <a:solidFill>
+                        <a:schemeClr val="bg1">
+                          <a:lumMod val="50000"/>
+                        </a:schemeClr>
+                      </a:solidFill>
+                      <a:prstDash val="solid"/>
+                      <a:round/>
+                      <a:headEnd type="none" w="med" len="med"/>
+                      <a:tailEnd type="none" w="med" len="med"/>
+                    </a:lnB>
                     <a:noFill/>
                   </a:tcPr>
                 </a:tc>
@@ -9637,6 +10442,50 @@
                     </a:p>
                   </a:txBody>
                   <a:tcPr marL="36576" marR="36576" marT="9144" marB="9144" anchor="ctr">
+                    <a:lnL w="3175" cap="flat" cmpd="sng" algn="ctr">
+                      <a:solidFill>
+                        <a:schemeClr val="bg1">
+                          <a:lumMod val="50000"/>
+                        </a:schemeClr>
+                      </a:solidFill>
+                      <a:prstDash val="solid"/>
+                      <a:round/>
+                      <a:headEnd type="none" w="med" len="med"/>
+                      <a:tailEnd type="none" w="med" len="med"/>
+                    </a:lnL>
+                    <a:lnR w="3175" cap="flat" cmpd="sng" algn="ctr">
+                      <a:solidFill>
+                        <a:schemeClr val="bg1">
+                          <a:lumMod val="50000"/>
+                        </a:schemeClr>
+                      </a:solidFill>
+                      <a:prstDash val="solid"/>
+                      <a:round/>
+                      <a:headEnd type="none" w="med" len="med"/>
+                      <a:tailEnd type="none" w="med" len="med"/>
+                    </a:lnR>
+                    <a:lnT w="3175" cap="flat" cmpd="sng" algn="ctr">
+                      <a:solidFill>
+                        <a:schemeClr val="bg1">
+                          <a:lumMod val="50000"/>
+                        </a:schemeClr>
+                      </a:solidFill>
+                      <a:prstDash val="solid"/>
+                      <a:round/>
+                      <a:headEnd type="none" w="med" len="med"/>
+                      <a:tailEnd type="none" w="med" len="med"/>
+                    </a:lnT>
+                    <a:lnB w="3175" cap="flat" cmpd="sng" algn="ctr">
+                      <a:solidFill>
+                        <a:schemeClr val="bg1">
+                          <a:lumMod val="50000"/>
+                        </a:schemeClr>
+                      </a:solidFill>
+                      <a:prstDash val="solid"/>
+                      <a:round/>
+                      <a:headEnd type="none" w="med" len="med"/>
+                      <a:tailEnd type="none" w="med" len="med"/>
+                    </a:lnB>
                     <a:noFill/>
                   </a:tcPr>
                 </a:tc>
@@ -9670,6 +10519,50 @@
                     </a:p>
                   </a:txBody>
                   <a:tcPr marL="36576" marR="36576" marT="9144" marB="9144" anchor="ctr">
+                    <a:lnL w="3175" cap="flat" cmpd="sng" algn="ctr">
+                      <a:solidFill>
+                        <a:schemeClr val="bg1">
+                          <a:lumMod val="50000"/>
+                        </a:schemeClr>
+                      </a:solidFill>
+                      <a:prstDash val="solid"/>
+                      <a:round/>
+                      <a:headEnd type="none" w="med" len="med"/>
+                      <a:tailEnd type="none" w="med" len="med"/>
+                    </a:lnL>
+                    <a:lnR w="3175" cap="flat" cmpd="sng" algn="ctr">
+                      <a:solidFill>
+                        <a:schemeClr val="bg1">
+                          <a:lumMod val="50000"/>
+                        </a:schemeClr>
+                      </a:solidFill>
+                      <a:prstDash val="solid"/>
+                      <a:round/>
+                      <a:headEnd type="none" w="med" len="med"/>
+                      <a:tailEnd type="none" w="med" len="med"/>
+                    </a:lnR>
+                    <a:lnT w="3175" cap="flat" cmpd="sng" algn="ctr">
+                      <a:solidFill>
+                        <a:schemeClr val="bg1">
+                          <a:lumMod val="50000"/>
+                        </a:schemeClr>
+                      </a:solidFill>
+                      <a:prstDash val="solid"/>
+                      <a:round/>
+                      <a:headEnd type="none" w="med" len="med"/>
+                      <a:tailEnd type="none" w="med" len="med"/>
+                    </a:lnT>
+                    <a:lnB w="3175" cap="flat" cmpd="sng" algn="ctr">
+                      <a:solidFill>
+                        <a:schemeClr val="bg1">
+                          <a:lumMod val="50000"/>
+                        </a:schemeClr>
+                      </a:solidFill>
+                      <a:prstDash val="solid"/>
+                      <a:round/>
+                      <a:headEnd type="none" w="med" len="med"/>
+                      <a:tailEnd type="none" w="med" len="med"/>
+                    </a:lnB>
                     <a:noFill/>
                   </a:tcPr>
                 </a:tc>
@@ -9703,6 +10596,50 @@
                     </a:p>
                   </a:txBody>
                   <a:tcPr marL="36576" marR="36576" marT="9144" marB="9144" anchor="ctr">
+                    <a:lnL w="3175" cap="flat" cmpd="sng" algn="ctr">
+                      <a:solidFill>
+                        <a:schemeClr val="bg1">
+                          <a:lumMod val="50000"/>
+                        </a:schemeClr>
+                      </a:solidFill>
+                      <a:prstDash val="solid"/>
+                      <a:round/>
+                      <a:headEnd type="none" w="med" len="med"/>
+                      <a:tailEnd type="none" w="med" len="med"/>
+                    </a:lnL>
+                    <a:lnR w="3175" cap="flat" cmpd="sng" algn="ctr">
+                      <a:solidFill>
+                        <a:schemeClr val="bg1">
+                          <a:lumMod val="50000"/>
+                        </a:schemeClr>
+                      </a:solidFill>
+                      <a:prstDash val="solid"/>
+                      <a:round/>
+                      <a:headEnd type="none" w="med" len="med"/>
+                      <a:tailEnd type="none" w="med" len="med"/>
+                    </a:lnR>
+                    <a:lnT w="3175" cap="flat" cmpd="sng" algn="ctr">
+                      <a:solidFill>
+                        <a:schemeClr val="bg1">
+                          <a:lumMod val="50000"/>
+                        </a:schemeClr>
+                      </a:solidFill>
+                      <a:prstDash val="solid"/>
+                      <a:round/>
+                      <a:headEnd type="none" w="med" len="med"/>
+                      <a:tailEnd type="none" w="med" len="med"/>
+                    </a:lnT>
+                    <a:lnB w="3175" cap="flat" cmpd="sng" algn="ctr">
+                      <a:solidFill>
+                        <a:schemeClr val="bg1">
+                          <a:lumMod val="50000"/>
+                        </a:schemeClr>
+                      </a:solidFill>
+                      <a:prstDash val="solid"/>
+                      <a:round/>
+                      <a:headEnd type="none" w="med" len="med"/>
+                      <a:tailEnd type="none" w="med" len="med"/>
+                    </a:lnB>
                     <a:noFill/>
                   </a:tcPr>
                 </a:tc>
@@ -9736,6 +10673,50 @@
                     </a:p>
                   </a:txBody>
                   <a:tcPr marL="36576" marR="36576" marT="9144" marB="9144" anchor="ctr">
+                    <a:lnL w="3175" cap="flat" cmpd="sng" algn="ctr">
+                      <a:solidFill>
+                        <a:schemeClr val="bg1">
+                          <a:lumMod val="50000"/>
+                        </a:schemeClr>
+                      </a:solidFill>
+                      <a:prstDash val="solid"/>
+                      <a:round/>
+                      <a:headEnd type="none" w="med" len="med"/>
+                      <a:tailEnd type="none" w="med" len="med"/>
+                    </a:lnL>
+                    <a:lnR w="3175" cap="flat" cmpd="sng" algn="ctr">
+                      <a:solidFill>
+                        <a:schemeClr val="bg1">
+                          <a:lumMod val="50000"/>
+                        </a:schemeClr>
+                      </a:solidFill>
+                      <a:prstDash val="solid"/>
+                      <a:round/>
+                      <a:headEnd type="none" w="med" len="med"/>
+                      <a:tailEnd type="none" w="med" len="med"/>
+                    </a:lnR>
+                    <a:lnT w="3175" cap="flat" cmpd="sng" algn="ctr">
+                      <a:solidFill>
+                        <a:schemeClr val="bg1">
+                          <a:lumMod val="50000"/>
+                        </a:schemeClr>
+                      </a:solidFill>
+                      <a:prstDash val="solid"/>
+                      <a:round/>
+                      <a:headEnd type="none" w="med" len="med"/>
+                      <a:tailEnd type="none" w="med" len="med"/>
+                    </a:lnT>
+                    <a:lnB w="3175" cap="flat" cmpd="sng" algn="ctr">
+                      <a:solidFill>
+                        <a:schemeClr val="bg1">
+                          <a:lumMod val="50000"/>
+                        </a:schemeClr>
+                      </a:solidFill>
+                      <a:prstDash val="solid"/>
+                      <a:round/>
+                      <a:headEnd type="none" w="med" len="med"/>
+                      <a:tailEnd type="none" w="med" len="med"/>
+                    </a:lnB>
                     <a:noFill/>
                   </a:tcPr>
                 </a:tc>
@@ -9776,6 +10757,50 @@
                     </a:p>
                   </a:txBody>
                   <a:tcPr marL="36576" marR="36576" marT="9144" marB="9144" anchor="ctr">
+                    <a:lnL w="3175" cap="flat" cmpd="sng" algn="ctr">
+                      <a:solidFill>
+                        <a:schemeClr val="bg1">
+                          <a:lumMod val="50000"/>
+                        </a:schemeClr>
+                      </a:solidFill>
+                      <a:prstDash val="solid"/>
+                      <a:round/>
+                      <a:headEnd type="none" w="med" len="med"/>
+                      <a:tailEnd type="none" w="med" len="med"/>
+                    </a:lnL>
+                    <a:lnR w="3175" cap="flat" cmpd="sng" algn="ctr">
+                      <a:solidFill>
+                        <a:schemeClr val="bg1">
+                          <a:lumMod val="50000"/>
+                        </a:schemeClr>
+                      </a:solidFill>
+                      <a:prstDash val="solid"/>
+                      <a:round/>
+                      <a:headEnd type="none" w="med" len="med"/>
+                      <a:tailEnd type="none" w="med" len="med"/>
+                    </a:lnR>
+                    <a:lnT w="3175" cap="flat" cmpd="sng" algn="ctr">
+                      <a:solidFill>
+                        <a:schemeClr val="bg1">
+                          <a:lumMod val="50000"/>
+                        </a:schemeClr>
+                      </a:solidFill>
+                      <a:prstDash val="solid"/>
+                      <a:round/>
+                      <a:headEnd type="none" w="med" len="med"/>
+                      <a:tailEnd type="none" w="med" len="med"/>
+                    </a:lnT>
+                    <a:lnB w="3175" cap="flat" cmpd="sng" algn="ctr">
+                      <a:solidFill>
+                        <a:schemeClr val="bg1">
+                          <a:lumMod val="50000"/>
+                        </a:schemeClr>
+                      </a:solidFill>
+                      <a:prstDash val="solid"/>
+                      <a:round/>
+                      <a:headEnd type="none" w="med" len="med"/>
+                      <a:tailEnd type="none" w="med" len="med"/>
+                    </a:lnB>
                     <a:noFill/>
                   </a:tcPr>
                 </a:tc>
@@ -9809,6 +10834,50 @@
                     </a:p>
                   </a:txBody>
                   <a:tcPr marL="36576" marR="36576" marT="9144" marB="9144" anchor="ctr">
+                    <a:lnL w="3175" cap="flat" cmpd="sng" algn="ctr">
+                      <a:solidFill>
+                        <a:schemeClr val="bg1">
+                          <a:lumMod val="50000"/>
+                        </a:schemeClr>
+                      </a:solidFill>
+                      <a:prstDash val="solid"/>
+                      <a:round/>
+                      <a:headEnd type="none" w="med" len="med"/>
+                      <a:tailEnd type="none" w="med" len="med"/>
+                    </a:lnL>
+                    <a:lnR w="3175" cap="flat" cmpd="sng" algn="ctr">
+                      <a:solidFill>
+                        <a:schemeClr val="bg1">
+                          <a:lumMod val="50000"/>
+                        </a:schemeClr>
+                      </a:solidFill>
+                      <a:prstDash val="solid"/>
+                      <a:round/>
+                      <a:headEnd type="none" w="med" len="med"/>
+                      <a:tailEnd type="none" w="med" len="med"/>
+                    </a:lnR>
+                    <a:lnT w="3175" cap="flat" cmpd="sng" algn="ctr">
+                      <a:solidFill>
+                        <a:schemeClr val="bg1">
+                          <a:lumMod val="50000"/>
+                        </a:schemeClr>
+                      </a:solidFill>
+                      <a:prstDash val="solid"/>
+                      <a:round/>
+                      <a:headEnd type="none" w="med" len="med"/>
+                      <a:tailEnd type="none" w="med" len="med"/>
+                    </a:lnT>
+                    <a:lnB w="3175" cap="flat" cmpd="sng" algn="ctr">
+                      <a:solidFill>
+                        <a:schemeClr val="bg1">
+                          <a:lumMod val="50000"/>
+                        </a:schemeClr>
+                      </a:solidFill>
+                      <a:prstDash val="solid"/>
+                      <a:round/>
+                      <a:headEnd type="none" w="med" len="med"/>
+                      <a:tailEnd type="none" w="med" len="med"/>
+                    </a:lnB>
                     <a:noFill/>
                   </a:tcPr>
                 </a:tc>
@@ -9853,6 +10922,50 @@
                     </a:p>
                   </a:txBody>
                   <a:tcPr marL="36576" marR="36576" marT="9144" marB="9144" anchor="ctr">
+                    <a:lnL w="3175" cap="flat" cmpd="sng" algn="ctr">
+                      <a:solidFill>
+                        <a:schemeClr val="bg1">
+                          <a:lumMod val="50000"/>
+                        </a:schemeClr>
+                      </a:solidFill>
+                      <a:prstDash val="solid"/>
+                      <a:round/>
+                      <a:headEnd type="none" w="med" len="med"/>
+                      <a:tailEnd type="none" w="med" len="med"/>
+                    </a:lnL>
+                    <a:lnR w="3175" cap="flat" cmpd="sng" algn="ctr">
+                      <a:solidFill>
+                        <a:schemeClr val="bg1">
+                          <a:lumMod val="50000"/>
+                        </a:schemeClr>
+                      </a:solidFill>
+                      <a:prstDash val="solid"/>
+                      <a:round/>
+                      <a:headEnd type="none" w="med" len="med"/>
+                      <a:tailEnd type="none" w="med" len="med"/>
+                    </a:lnR>
+                    <a:lnT w="3175" cap="flat" cmpd="sng" algn="ctr">
+                      <a:solidFill>
+                        <a:schemeClr val="bg1">
+                          <a:lumMod val="50000"/>
+                        </a:schemeClr>
+                      </a:solidFill>
+                      <a:prstDash val="solid"/>
+                      <a:round/>
+                      <a:headEnd type="none" w="med" len="med"/>
+                      <a:tailEnd type="none" w="med" len="med"/>
+                    </a:lnT>
+                    <a:lnB w="3175" cap="flat" cmpd="sng" algn="ctr">
+                      <a:solidFill>
+                        <a:schemeClr val="bg1">
+                          <a:lumMod val="50000"/>
+                        </a:schemeClr>
+                      </a:solidFill>
+                      <a:prstDash val="solid"/>
+                      <a:round/>
+                      <a:headEnd type="none" w="med" len="med"/>
+                      <a:tailEnd type="none" w="med" len="med"/>
+                    </a:lnB>
                     <a:noFill/>
                   </a:tcPr>
                 </a:tc>
@@ -9886,6 +10999,50 @@
                     </a:p>
                   </a:txBody>
                   <a:tcPr marL="36576" marR="36576" marT="9144" marB="9144" anchor="ctr">
+                    <a:lnL w="3175" cap="flat" cmpd="sng" algn="ctr">
+                      <a:solidFill>
+                        <a:schemeClr val="bg1">
+                          <a:lumMod val="50000"/>
+                        </a:schemeClr>
+                      </a:solidFill>
+                      <a:prstDash val="solid"/>
+                      <a:round/>
+                      <a:headEnd type="none" w="med" len="med"/>
+                      <a:tailEnd type="none" w="med" len="med"/>
+                    </a:lnL>
+                    <a:lnR w="3175" cap="flat" cmpd="sng" algn="ctr">
+                      <a:solidFill>
+                        <a:schemeClr val="bg1">
+                          <a:lumMod val="50000"/>
+                        </a:schemeClr>
+                      </a:solidFill>
+                      <a:prstDash val="solid"/>
+                      <a:round/>
+                      <a:headEnd type="none" w="med" len="med"/>
+                      <a:tailEnd type="none" w="med" len="med"/>
+                    </a:lnR>
+                    <a:lnT w="3175" cap="flat" cmpd="sng" algn="ctr">
+                      <a:solidFill>
+                        <a:schemeClr val="bg1">
+                          <a:lumMod val="50000"/>
+                        </a:schemeClr>
+                      </a:solidFill>
+                      <a:prstDash val="solid"/>
+                      <a:round/>
+                      <a:headEnd type="none" w="med" len="med"/>
+                      <a:tailEnd type="none" w="med" len="med"/>
+                    </a:lnT>
+                    <a:lnB w="3175" cap="flat" cmpd="sng" algn="ctr">
+                      <a:solidFill>
+                        <a:schemeClr val="bg1">
+                          <a:lumMod val="50000"/>
+                        </a:schemeClr>
+                      </a:solidFill>
+                      <a:prstDash val="solid"/>
+                      <a:round/>
+                      <a:headEnd type="none" w="med" len="med"/>
+                      <a:tailEnd type="none" w="med" len="med"/>
+                    </a:lnB>
                     <a:noFill/>
                   </a:tcPr>
                 </a:tc>
@@ -9926,6 +11083,50 @@
                     </a:p>
                   </a:txBody>
                   <a:tcPr marL="36576" marR="36576" marT="9144" marB="9144" anchor="ctr">
+                    <a:lnL w="3175" cap="flat" cmpd="sng" algn="ctr">
+                      <a:solidFill>
+                        <a:schemeClr val="bg1">
+                          <a:lumMod val="50000"/>
+                        </a:schemeClr>
+                      </a:solidFill>
+                      <a:prstDash val="solid"/>
+                      <a:round/>
+                      <a:headEnd type="none" w="med" len="med"/>
+                      <a:tailEnd type="none" w="med" len="med"/>
+                    </a:lnL>
+                    <a:lnR w="3175" cap="flat" cmpd="sng" algn="ctr">
+                      <a:solidFill>
+                        <a:schemeClr val="bg1">
+                          <a:lumMod val="50000"/>
+                        </a:schemeClr>
+                      </a:solidFill>
+                      <a:prstDash val="solid"/>
+                      <a:round/>
+                      <a:headEnd type="none" w="med" len="med"/>
+                      <a:tailEnd type="none" w="med" len="med"/>
+                    </a:lnR>
+                    <a:lnT w="3175" cap="flat" cmpd="sng" algn="ctr">
+                      <a:solidFill>
+                        <a:schemeClr val="bg1">
+                          <a:lumMod val="50000"/>
+                        </a:schemeClr>
+                      </a:solidFill>
+                      <a:prstDash val="solid"/>
+                      <a:round/>
+                      <a:headEnd type="none" w="med" len="med"/>
+                      <a:tailEnd type="none" w="med" len="med"/>
+                    </a:lnT>
+                    <a:lnB w="3175" cap="flat" cmpd="sng" algn="ctr">
+                      <a:solidFill>
+                        <a:schemeClr val="bg1">
+                          <a:lumMod val="50000"/>
+                        </a:schemeClr>
+                      </a:solidFill>
+                      <a:prstDash val="solid"/>
+                      <a:round/>
+                      <a:headEnd type="none" w="med" len="med"/>
+                      <a:tailEnd type="none" w="med" len="med"/>
+                    </a:lnB>
                     <a:noFill/>
                   </a:tcPr>
                 </a:tc>
@@ -9959,6 +11160,50 @@
                     </a:p>
                   </a:txBody>
                   <a:tcPr marL="36576" marR="36576" marT="9144" marB="9144" anchor="ctr">
+                    <a:lnL w="3175" cap="flat" cmpd="sng" algn="ctr">
+                      <a:solidFill>
+                        <a:schemeClr val="bg1">
+                          <a:lumMod val="50000"/>
+                        </a:schemeClr>
+                      </a:solidFill>
+                      <a:prstDash val="solid"/>
+                      <a:round/>
+                      <a:headEnd type="none" w="med" len="med"/>
+                      <a:tailEnd type="none" w="med" len="med"/>
+                    </a:lnL>
+                    <a:lnR w="3175" cap="flat" cmpd="sng" algn="ctr">
+                      <a:solidFill>
+                        <a:schemeClr val="bg1">
+                          <a:lumMod val="50000"/>
+                        </a:schemeClr>
+                      </a:solidFill>
+                      <a:prstDash val="solid"/>
+                      <a:round/>
+                      <a:headEnd type="none" w="med" len="med"/>
+                      <a:tailEnd type="none" w="med" len="med"/>
+                    </a:lnR>
+                    <a:lnT w="3175" cap="flat" cmpd="sng" algn="ctr">
+                      <a:solidFill>
+                        <a:schemeClr val="bg1">
+                          <a:lumMod val="50000"/>
+                        </a:schemeClr>
+                      </a:solidFill>
+                      <a:prstDash val="solid"/>
+                      <a:round/>
+                      <a:headEnd type="none" w="med" len="med"/>
+                      <a:tailEnd type="none" w="med" len="med"/>
+                    </a:lnT>
+                    <a:lnB w="3175" cap="flat" cmpd="sng" algn="ctr">
+                      <a:solidFill>
+                        <a:schemeClr val="bg1">
+                          <a:lumMod val="50000"/>
+                        </a:schemeClr>
+                      </a:solidFill>
+                      <a:prstDash val="solid"/>
+                      <a:round/>
+                      <a:headEnd type="none" w="med" len="med"/>
+                      <a:tailEnd type="none" w="med" len="med"/>
+                    </a:lnB>
                     <a:noFill/>
                   </a:tcPr>
                 </a:tc>
@@ -9992,6 +11237,50 @@
                     </a:p>
                   </a:txBody>
                   <a:tcPr marL="36576" marR="36576" marT="9144" marB="9144" anchor="ctr">
+                    <a:lnL w="3175" cap="flat" cmpd="sng" algn="ctr">
+                      <a:solidFill>
+                        <a:schemeClr val="bg1">
+                          <a:lumMod val="50000"/>
+                        </a:schemeClr>
+                      </a:solidFill>
+                      <a:prstDash val="solid"/>
+                      <a:round/>
+                      <a:headEnd type="none" w="med" len="med"/>
+                      <a:tailEnd type="none" w="med" len="med"/>
+                    </a:lnL>
+                    <a:lnR w="3175" cap="flat" cmpd="sng" algn="ctr">
+                      <a:solidFill>
+                        <a:schemeClr val="bg1">
+                          <a:lumMod val="50000"/>
+                        </a:schemeClr>
+                      </a:solidFill>
+                      <a:prstDash val="solid"/>
+                      <a:round/>
+                      <a:headEnd type="none" w="med" len="med"/>
+                      <a:tailEnd type="none" w="med" len="med"/>
+                    </a:lnR>
+                    <a:lnT w="3175" cap="flat" cmpd="sng" algn="ctr">
+                      <a:solidFill>
+                        <a:schemeClr val="bg1">
+                          <a:lumMod val="50000"/>
+                        </a:schemeClr>
+                      </a:solidFill>
+                      <a:prstDash val="solid"/>
+                      <a:round/>
+                      <a:headEnd type="none" w="med" len="med"/>
+                      <a:tailEnd type="none" w="med" len="med"/>
+                    </a:lnT>
+                    <a:lnB w="3175" cap="flat" cmpd="sng" algn="ctr">
+                      <a:solidFill>
+                        <a:schemeClr val="bg1">
+                          <a:lumMod val="50000"/>
+                        </a:schemeClr>
+                      </a:solidFill>
+                      <a:prstDash val="solid"/>
+                      <a:round/>
+                      <a:headEnd type="none" w="med" len="med"/>
+                      <a:tailEnd type="none" w="med" len="med"/>
+                    </a:lnB>
                     <a:noFill/>
                   </a:tcPr>
                 </a:tc>
@@ -10025,6 +11314,50 @@
                     </a:p>
                   </a:txBody>
                   <a:tcPr marL="36576" marR="36576" marT="9144" marB="9144" anchor="ctr">
+                    <a:lnL w="3175" cap="flat" cmpd="sng" algn="ctr">
+                      <a:solidFill>
+                        <a:schemeClr val="bg1">
+                          <a:lumMod val="50000"/>
+                        </a:schemeClr>
+                      </a:solidFill>
+                      <a:prstDash val="solid"/>
+                      <a:round/>
+                      <a:headEnd type="none" w="med" len="med"/>
+                      <a:tailEnd type="none" w="med" len="med"/>
+                    </a:lnL>
+                    <a:lnR w="3175" cap="flat" cmpd="sng" algn="ctr">
+                      <a:solidFill>
+                        <a:schemeClr val="bg1">
+                          <a:lumMod val="50000"/>
+                        </a:schemeClr>
+                      </a:solidFill>
+                      <a:prstDash val="solid"/>
+                      <a:round/>
+                      <a:headEnd type="none" w="med" len="med"/>
+                      <a:tailEnd type="none" w="med" len="med"/>
+                    </a:lnR>
+                    <a:lnT w="3175" cap="flat" cmpd="sng" algn="ctr">
+                      <a:solidFill>
+                        <a:schemeClr val="bg1">
+                          <a:lumMod val="50000"/>
+                        </a:schemeClr>
+                      </a:solidFill>
+                      <a:prstDash val="solid"/>
+                      <a:round/>
+                      <a:headEnd type="none" w="med" len="med"/>
+                      <a:tailEnd type="none" w="med" len="med"/>
+                    </a:lnT>
+                    <a:lnB w="3175" cap="flat" cmpd="sng" algn="ctr">
+                      <a:solidFill>
+                        <a:schemeClr val="bg1">
+                          <a:lumMod val="50000"/>
+                        </a:schemeClr>
+                      </a:solidFill>
+                      <a:prstDash val="solid"/>
+                      <a:round/>
+                      <a:headEnd type="none" w="med" len="med"/>
+                      <a:tailEnd type="none" w="med" len="med"/>
+                    </a:lnB>
                     <a:noFill/>
                   </a:tcPr>
                 </a:tc>
@@ -10065,6 +11398,50 @@
                     </a:p>
                   </a:txBody>
                   <a:tcPr marL="36576" marR="36576" marT="9144" marB="9144" anchor="ctr">
+                    <a:lnL w="3175" cap="flat" cmpd="sng" algn="ctr">
+                      <a:solidFill>
+                        <a:schemeClr val="bg1">
+                          <a:lumMod val="50000"/>
+                        </a:schemeClr>
+                      </a:solidFill>
+                      <a:prstDash val="solid"/>
+                      <a:round/>
+                      <a:headEnd type="none" w="med" len="med"/>
+                      <a:tailEnd type="none" w="med" len="med"/>
+                    </a:lnL>
+                    <a:lnR w="3175" cap="flat" cmpd="sng" algn="ctr">
+                      <a:solidFill>
+                        <a:schemeClr val="bg1">
+                          <a:lumMod val="50000"/>
+                        </a:schemeClr>
+                      </a:solidFill>
+                      <a:prstDash val="solid"/>
+                      <a:round/>
+                      <a:headEnd type="none" w="med" len="med"/>
+                      <a:tailEnd type="none" w="med" len="med"/>
+                    </a:lnR>
+                    <a:lnT w="3175" cap="flat" cmpd="sng" algn="ctr">
+                      <a:solidFill>
+                        <a:schemeClr val="bg1">
+                          <a:lumMod val="50000"/>
+                        </a:schemeClr>
+                      </a:solidFill>
+                      <a:prstDash val="solid"/>
+                      <a:round/>
+                      <a:headEnd type="none" w="med" len="med"/>
+                      <a:tailEnd type="none" w="med" len="med"/>
+                    </a:lnT>
+                    <a:lnB w="3175" cap="flat" cmpd="sng" algn="ctr">
+                      <a:solidFill>
+                        <a:schemeClr val="bg1">
+                          <a:lumMod val="50000"/>
+                        </a:schemeClr>
+                      </a:solidFill>
+                      <a:prstDash val="solid"/>
+                      <a:round/>
+                      <a:headEnd type="none" w="med" len="med"/>
+                      <a:tailEnd type="none" w="med" len="med"/>
+                    </a:lnB>
                     <a:solidFill>
                       <a:srgbClr val="EEF4FB"/>
                     </a:solidFill>
@@ -10137,6 +11514,50 @@
                     </a:p>
                   </a:txBody>
                   <a:tcPr marL="36576" marR="36576" marT="9144" marB="9144" anchor="ctr">
+                    <a:lnL w="3175" cap="flat" cmpd="sng" algn="ctr">
+                      <a:solidFill>
+                        <a:schemeClr val="bg1">
+                          <a:lumMod val="50000"/>
+                        </a:schemeClr>
+                      </a:solidFill>
+                      <a:prstDash val="solid"/>
+                      <a:round/>
+                      <a:headEnd type="none" w="med" len="med"/>
+                      <a:tailEnd type="none" w="med" len="med"/>
+                    </a:lnL>
+                    <a:lnR w="3175" cap="flat" cmpd="sng" algn="ctr">
+                      <a:solidFill>
+                        <a:schemeClr val="bg1">
+                          <a:lumMod val="50000"/>
+                        </a:schemeClr>
+                      </a:solidFill>
+                      <a:prstDash val="solid"/>
+                      <a:round/>
+                      <a:headEnd type="none" w="med" len="med"/>
+                      <a:tailEnd type="none" w="med" len="med"/>
+                    </a:lnR>
+                    <a:lnT w="3175" cap="flat" cmpd="sng" algn="ctr">
+                      <a:solidFill>
+                        <a:schemeClr val="bg1">
+                          <a:lumMod val="50000"/>
+                        </a:schemeClr>
+                      </a:solidFill>
+                      <a:prstDash val="solid"/>
+                      <a:round/>
+                      <a:headEnd type="none" w="med" len="med"/>
+                      <a:tailEnd type="none" w="med" len="med"/>
+                    </a:lnT>
+                    <a:lnB w="3175" cap="flat" cmpd="sng" algn="ctr">
+                      <a:solidFill>
+                        <a:schemeClr val="bg1">
+                          <a:lumMod val="50000"/>
+                        </a:schemeClr>
+                      </a:solidFill>
+                      <a:prstDash val="solid"/>
+                      <a:round/>
+                      <a:headEnd type="none" w="med" len="med"/>
+                      <a:tailEnd type="none" w="med" len="med"/>
+                    </a:lnB>
                     <a:noFill/>
                   </a:tcPr>
                 </a:tc>
@@ -10170,6 +11591,50 @@
                     </a:p>
                   </a:txBody>
                   <a:tcPr marL="36576" marR="36576" marT="9144" marB="9144" anchor="ctr">
+                    <a:lnL w="3175" cap="flat" cmpd="sng" algn="ctr">
+                      <a:solidFill>
+                        <a:schemeClr val="bg1">
+                          <a:lumMod val="50000"/>
+                        </a:schemeClr>
+                      </a:solidFill>
+                      <a:prstDash val="solid"/>
+                      <a:round/>
+                      <a:headEnd type="none" w="med" len="med"/>
+                      <a:tailEnd type="none" w="med" len="med"/>
+                    </a:lnL>
+                    <a:lnR w="3175" cap="flat" cmpd="sng" algn="ctr">
+                      <a:solidFill>
+                        <a:schemeClr val="bg1">
+                          <a:lumMod val="50000"/>
+                        </a:schemeClr>
+                      </a:solidFill>
+                      <a:prstDash val="solid"/>
+                      <a:round/>
+                      <a:headEnd type="none" w="med" len="med"/>
+                      <a:tailEnd type="none" w="med" len="med"/>
+                    </a:lnR>
+                    <a:lnT w="3175" cap="flat" cmpd="sng" algn="ctr">
+                      <a:solidFill>
+                        <a:schemeClr val="bg1">
+                          <a:lumMod val="50000"/>
+                        </a:schemeClr>
+                      </a:solidFill>
+                      <a:prstDash val="solid"/>
+                      <a:round/>
+                      <a:headEnd type="none" w="med" len="med"/>
+                      <a:tailEnd type="none" w="med" len="med"/>
+                    </a:lnT>
+                    <a:lnB w="3175" cap="flat" cmpd="sng" algn="ctr">
+                      <a:solidFill>
+                        <a:schemeClr val="bg1">
+                          <a:lumMod val="50000"/>
+                        </a:schemeClr>
+                      </a:solidFill>
+                      <a:prstDash val="solid"/>
+                      <a:round/>
+                      <a:headEnd type="none" w="med" len="med"/>
+                      <a:tailEnd type="none" w="med" len="med"/>
+                    </a:lnB>
                     <a:noFill/>
                   </a:tcPr>
                 </a:tc>
@@ -10203,6 +11668,50 @@
                     </a:p>
                   </a:txBody>
                   <a:tcPr marL="36576" marR="36576" marT="9144" marB="9144" anchor="ctr">
+                    <a:lnL w="3175" cap="flat" cmpd="sng" algn="ctr">
+                      <a:solidFill>
+                        <a:schemeClr val="bg1">
+                          <a:lumMod val="50000"/>
+                        </a:schemeClr>
+                      </a:solidFill>
+                      <a:prstDash val="solid"/>
+                      <a:round/>
+                      <a:headEnd type="none" w="med" len="med"/>
+                      <a:tailEnd type="none" w="med" len="med"/>
+                    </a:lnL>
+                    <a:lnR w="3175" cap="flat" cmpd="sng" algn="ctr">
+                      <a:solidFill>
+                        <a:schemeClr val="bg1">
+                          <a:lumMod val="50000"/>
+                        </a:schemeClr>
+                      </a:solidFill>
+                      <a:prstDash val="solid"/>
+                      <a:round/>
+                      <a:headEnd type="none" w="med" len="med"/>
+                      <a:tailEnd type="none" w="med" len="med"/>
+                    </a:lnR>
+                    <a:lnT w="3175" cap="flat" cmpd="sng" algn="ctr">
+                      <a:solidFill>
+                        <a:schemeClr val="bg1">
+                          <a:lumMod val="50000"/>
+                        </a:schemeClr>
+                      </a:solidFill>
+                      <a:prstDash val="solid"/>
+                      <a:round/>
+                      <a:headEnd type="none" w="med" len="med"/>
+                      <a:tailEnd type="none" w="med" len="med"/>
+                    </a:lnT>
+                    <a:lnB w="3175" cap="flat" cmpd="sng" algn="ctr">
+                      <a:solidFill>
+                        <a:schemeClr val="bg1">
+                          <a:lumMod val="50000"/>
+                        </a:schemeClr>
+                      </a:solidFill>
+                      <a:prstDash val="solid"/>
+                      <a:round/>
+                      <a:headEnd type="none" w="med" len="med"/>
+                      <a:tailEnd type="none" w="med" len="med"/>
+                    </a:lnB>
                     <a:noFill/>
                   </a:tcPr>
                 </a:tc>
@@ -10236,6 +11745,50 @@
                     </a:p>
                   </a:txBody>
                   <a:tcPr marL="36576" marR="36576" marT="9144" marB="9144" anchor="ctr">
+                    <a:lnL w="3175" cap="flat" cmpd="sng" algn="ctr">
+                      <a:solidFill>
+                        <a:schemeClr val="bg1">
+                          <a:lumMod val="50000"/>
+                        </a:schemeClr>
+                      </a:solidFill>
+                      <a:prstDash val="solid"/>
+                      <a:round/>
+                      <a:headEnd type="none" w="med" len="med"/>
+                      <a:tailEnd type="none" w="med" len="med"/>
+                    </a:lnL>
+                    <a:lnR w="3175" cap="flat" cmpd="sng" algn="ctr">
+                      <a:solidFill>
+                        <a:schemeClr val="bg1">
+                          <a:lumMod val="50000"/>
+                        </a:schemeClr>
+                      </a:solidFill>
+                      <a:prstDash val="solid"/>
+                      <a:round/>
+                      <a:headEnd type="none" w="med" len="med"/>
+                      <a:tailEnd type="none" w="med" len="med"/>
+                    </a:lnR>
+                    <a:lnT w="3175" cap="flat" cmpd="sng" algn="ctr">
+                      <a:solidFill>
+                        <a:schemeClr val="bg1">
+                          <a:lumMod val="50000"/>
+                        </a:schemeClr>
+                      </a:solidFill>
+                      <a:prstDash val="solid"/>
+                      <a:round/>
+                      <a:headEnd type="none" w="med" len="med"/>
+                      <a:tailEnd type="none" w="med" len="med"/>
+                    </a:lnT>
+                    <a:lnB w="3175" cap="flat" cmpd="sng" algn="ctr">
+                      <a:solidFill>
+                        <a:schemeClr val="bg1">
+                          <a:lumMod val="50000"/>
+                        </a:schemeClr>
+                      </a:solidFill>
+                      <a:prstDash val="solid"/>
+                      <a:round/>
+                      <a:headEnd type="none" w="med" len="med"/>
+                      <a:tailEnd type="none" w="med" len="med"/>
+                    </a:lnB>
                     <a:noFill/>
                   </a:tcPr>
                 </a:tc>
@@ -10276,6 +11829,50 @@
                     </a:p>
                   </a:txBody>
                   <a:tcPr marL="36576" marR="36576" marT="9144" marB="9144" anchor="ctr">
+                    <a:lnL w="3175" cap="flat" cmpd="sng" algn="ctr">
+                      <a:solidFill>
+                        <a:schemeClr val="bg1">
+                          <a:lumMod val="50000"/>
+                        </a:schemeClr>
+                      </a:solidFill>
+                      <a:prstDash val="solid"/>
+                      <a:round/>
+                      <a:headEnd type="none" w="med" len="med"/>
+                      <a:tailEnd type="none" w="med" len="med"/>
+                    </a:lnL>
+                    <a:lnR w="3175" cap="flat" cmpd="sng" algn="ctr">
+                      <a:solidFill>
+                        <a:schemeClr val="bg1">
+                          <a:lumMod val="50000"/>
+                        </a:schemeClr>
+                      </a:solidFill>
+                      <a:prstDash val="solid"/>
+                      <a:round/>
+                      <a:headEnd type="none" w="med" len="med"/>
+                      <a:tailEnd type="none" w="med" len="med"/>
+                    </a:lnR>
+                    <a:lnT w="3175" cap="flat" cmpd="sng" algn="ctr">
+                      <a:solidFill>
+                        <a:schemeClr val="bg1">
+                          <a:lumMod val="50000"/>
+                        </a:schemeClr>
+                      </a:solidFill>
+                      <a:prstDash val="solid"/>
+                      <a:round/>
+                      <a:headEnd type="none" w="med" len="med"/>
+                      <a:tailEnd type="none" w="med" len="med"/>
+                    </a:lnT>
+                    <a:lnB w="3175" cap="flat" cmpd="sng" algn="ctr">
+                      <a:solidFill>
+                        <a:schemeClr val="bg1">
+                          <a:lumMod val="50000"/>
+                        </a:schemeClr>
+                      </a:solidFill>
+                      <a:prstDash val="solid"/>
+                      <a:round/>
+                      <a:headEnd type="none" w="med" len="med"/>
+                      <a:tailEnd type="none" w="med" len="med"/>
+                    </a:lnB>
                     <a:noFill/>
                   </a:tcPr>
                 </a:tc>
@@ -10309,6 +11906,50 @@
                     </a:p>
                   </a:txBody>
                   <a:tcPr marL="36576" marR="36576" marT="9144" marB="9144" anchor="ctr">
+                    <a:lnL w="3175" cap="flat" cmpd="sng" algn="ctr">
+                      <a:solidFill>
+                        <a:schemeClr val="bg1">
+                          <a:lumMod val="50000"/>
+                        </a:schemeClr>
+                      </a:solidFill>
+                      <a:prstDash val="solid"/>
+                      <a:round/>
+                      <a:headEnd type="none" w="med" len="med"/>
+                      <a:tailEnd type="none" w="med" len="med"/>
+                    </a:lnL>
+                    <a:lnR w="3175" cap="flat" cmpd="sng" algn="ctr">
+                      <a:solidFill>
+                        <a:schemeClr val="bg1">
+                          <a:lumMod val="50000"/>
+                        </a:schemeClr>
+                      </a:solidFill>
+                      <a:prstDash val="solid"/>
+                      <a:round/>
+                      <a:headEnd type="none" w="med" len="med"/>
+                      <a:tailEnd type="none" w="med" len="med"/>
+                    </a:lnR>
+                    <a:lnT w="3175" cap="flat" cmpd="sng" algn="ctr">
+                      <a:solidFill>
+                        <a:schemeClr val="bg1">
+                          <a:lumMod val="50000"/>
+                        </a:schemeClr>
+                      </a:solidFill>
+                      <a:prstDash val="solid"/>
+                      <a:round/>
+                      <a:headEnd type="none" w="med" len="med"/>
+                      <a:tailEnd type="none" w="med" len="med"/>
+                    </a:lnT>
+                    <a:lnB w="3175" cap="flat" cmpd="sng" algn="ctr">
+                      <a:solidFill>
+                        <a:schemeClr val="bg1">
+                          <a:lumMod val="50000"/>
+                        </a:schemeClr>
+                      </a:solidFill>
+                      <a:prstDash val="solid"/>
+                      <a:round/>
+                      <a:headEnd type="none" w="med" len="med"/>
+                      <a:tailEnd type="none" w="med" len="med"/>
+                    </a:lnB>
                     <a:noFill/>
                   </a:tcPr>
                 </a:tc>
@@ -10342,6 +11983,50 @@
                     </a:p>
                   </a:txBody>
                   <a:tcPr marL="36576" marR="36576" marT="9144" marB="9144" anchor="ctr">
+                    <a:lnL w="3175" cap="flat" cmpd="sng" algn="ctr">
+                      <a:solidFill>
+                        <a:schemeClr val="bg1">
+                          <a:lumMod val="50000"/>
+                        </a:schemeClr>
+                      </a:solidFill>
+                      <a:prstDash val="solid"/>
+                      <a:round/>
+                      <a:headEnd type="none" w="med" len="med"/>
+                      <a:tailEnd type="none" w="med" len="med"/>
+                    </a:lnL>
+                    <a:lnR w="3175" cap="flat" cmpd="sng" algn="ctr">
+                      <a:solidFill>
+                        <a:schemeClr val="bg1">
+                          <a:lumMod val="50000"/>
+                        </a:schemeClr>
+                      </a:solidFill>
+                      <a:prstDash val="solid"/>
+                      <a:round/>
+                      <a:headEnd type="none" w="med" len="med"/>
+                      <a:tailEnd type="none" w="med" len="med"/>
+                    </a:lnR>
+                    <a:lnT w="3175" cap="flat" cmpd="sng" algn="ctr">
+                      <a:solidFill>
+                        <a:schemeClr val="bg1">
+                          <a:lumMod val="50000"/>
+                        </a:schemeClr>
+                      </a:solidFill>
+                      <a:prstDash val="solid"/>
+                      <a:round/>
+                      <a:headEnd type="none" w="med" len="med"/>
+                      <a:tailEnd type="none" w="med" len="med"/>
+                    </a:lnT>
+                    <a:lnB w="3175" cap="flat" cmpd="sng" algn="ctr">
+                      <a:solidFill>
+                        <a:schemeClr val="bg1">
+                          <a:lumMod val="50000"/>
+                        </a:schemeClr>
+                      </a:solidFill>
+                      <a:prstDash val="solid"/>
+                      <a:round/>
+                      <a:headEnd type="none" w="med" len="med"/>
+                      <a:tailEnd type="none" w="med" len="med"/>
+                    </a:lnB>
                     <a:noFill/>
                   </a:tcPr>
                 </a:tc>
@@ -10375,6 +12060,50 @@
                     </a:p>
                   </a:txBody>
                   <a:tcPr marL="36576" marR="36576" marT="9144" marB="9144" anchor="ctr">
+                    <a:lnL w="3175" cap="flat" cmpd="sng" algn="ctr">
+                      <a:solidFill>
+                        <a:schemeClr val="bg1">
+                          <a:lumMod val="50000"/>
+                        </a:schemeClr>
+                      </a:solidFill>
+                      <a:prstDash val="solid"/>
+                      <a:round/>
+                      <a:headEnd type="none" w="med" len="med"/>
+                      <a:tailEnd type="none" w="med" len="med"/>
+                    </a:lnL>
+                    <a:lnR w="3175" cap="flat" cmpd="sng" algn="ctr">
+                      <a:solidFill>
+                        <a:schemeClr val="bg1">
+                          <a:lumMod val="50000"/>
+                        </a:schemeClr>
+                      </a:solidFill>
+                      <a:prstDash val="solid"/>
+                      <a:round/>
+                      <a:headEnd type="none" w="med" len="med"/>
+                      <a:tailEnd type="none" w="med" len="med"/>
+                    </a:lnR>
+                    <a:lnT w="3175" cap="flat" cmpd="sng" algn="ctr">
+                      <a:solidFill>
+                        <a:schemeClr val="bg1">
+                          <a:lumMod val="50000"/>
+                        </a:schemeClr>
+                      </a:solidFill>
+                      <a:prstDash val="solid"/>
+                      <a:round/>
+                      <a:headEnd type="none" w="med" len="med"/>
+                      <a:tailEnd type="none" w="med" len="med"/>
+                    </a:lnT>
+                    <a:lnB w="3175" cap="flat" cmpd="sng" algn="ctr">
+                      <a:solidFill>
+                        <a:schemeClr val="bg1">
+                          <a:lumMod val="50000"/>
+                        </a:schemeClr>
+                      </a:solidFill>
+                      <a:prstDash val="solid"/>
+                      <a:round/>
+                      <a:headEnd type="none" w="med" len="med"/>
+                      <a:tailEnd type="none" w="med" len="med"/>
+                    </a:lnB>
                     <a:noFill/>
                   </a:tcPr>
                 </a:tc>
@@ -10415,6 +12144,50 @@
                     </a:p>
                   </a:txBody>
                   <a:tcPr marL="36576" marR="36576" marT="9144" marB="9144" anchor="ctr">
+                    <a:lnL w="3175" cap="flat" cmpd="sng" algn="ctr">
+                      <a:solidFill>
+                        <a:schemeClr val="bg1">
+                          <a:lumMod val="50000"/>
+                        </a:schemeClr>
+                      </a:solidFill>
+                      <a:prstDash val="solid"/>
+                      <a:round/>
+                      <a:headEnd type="none" w="med" len="med"/>
+                      <a:tailEnd type="none" w="med" len="med"/>
+                    </a:lnL>
+                    <a:lnR w="3175" cap="flat" cmpd="sng" algn="ctr">
+                      <a:solidFill>
+                        <a:schemeClr val="bg1">
+                          <a:lumMod val="50000"/>
+                        </a:schemeClr>
+                      </a:solidFill>
+                      <a:prstDash val="solid"/>
+                      <a:round/>
+                      <a:headEnd type="none" w="med" len="med"/>
+                      <a:tailEnd type="none" w="med" len="med"/>
+                    </a:lnR>
+                    <a:lnT w="3175" cap="flat" cmpd="sng" algn="ctr">
+                      <a:solidFill>
+                        <a:schemeClr val="bg1">
+                          <a:lumMod val="50000"/>
+                        </a:schemeClr>
+                      </a:solidFill>
+                      <a:prstDash val="solid"/>
+                      <a:round/>
+                      <a:headEnd type="none" w="med" len="med"/>
+                      <a:tailEnd type="none" w="med" len="med"/>
+                    </a:lnT>
+                    <a:lnB w="3175" cap="flat" cmpd="sng" algn="ctr">
+                      <a:solidFill>
+                        <a:schemeClr val="bg1">
+                          <a:lumMod val="50000"/>
+                        </a:schemeClr>
+                      </a:solidFill>
+                      <a:prstDash val="solid"/>
+                      <a:round/>
+                      <a:headEnd type="none" w="med" len="med"/>
+                      <a:tailEnd type="none" w="med" len="med"/>
+                    </a:lnB>
                     <a:noFill/>
                   </a:tcPr>
                 </a:tc>
@@ -10448,6 +12221,50 @@
                     </a:p>
                   </a:txBody>
                   <a:tcPr marL="36576" marR="36576" marT="9144" marB="9144" anchor="ctr">
+                    <a:lnL w="3175" cap="flat" cmpd="sng" algn="ctr">
+                      <a:solidFill>
+                        <a:schemeClr val="bg1">
+                          <a:lumMod val="50000"/>
+                        </a:schemeClr>
+                      </a:solidFill>
+                      <a:prstDash val="solid"/>
+                      <a:round/>
+                      <a:headEnd type="none" w="med" len="med"/>
+                      <a:tailEnd type="none" w="med" len="med"/>
+                    </a:lnL>
+                    <a:lnR w="3175" cap="flat" cmpd="sng" algn="ctr">
+                      <a:solidFill>
+                        <a:schemeClr val="bg1">
+                          <a:lumMod val="50000"/>
+                        </a:schemeClr>
+                      </a:solidFill>
+                      <a:prstDash val="solid"/>
+                      <a:round/>
+                      <a:headEnd type="none" w="med" len="med"/>
+                      <a:tailEnd type="none" w="med" len="med"/>
+                    </a:lnR>
+                    <a:lnT w="3175" cap="flat" cmpd="sng" algn="ctr">
+                      <a:solidFill>
+                        <a:schemeClr val="bg1">
+                          <a:lumMod val="50000"/>
+                        </a:schemeClr>
+                      </a:solidFill>
+                      <a:prstDash val="solid"/>
+                      <a:round/>
+                      <a:headEnd type="none" w="med" len="med"/>
+                      <a:tailEnd type="none" w="med" len="med"/>
+                    </a:lnT>
+                    <a:lnB w="3175" cap="flat" cmpd="sng" algn="ctr">
+                      <a:solidFill>
+                        <a:schemeClr val="bg1">
+                          <a:lumMod val="50000"/>
+                        </a:schemeClr>
+                      </a:solidFill>
+                      <a:prstDash val="solid"/>
+                      <a:round/>
+                      <a:headEnd type="none" w="med" len="med"/>
+                      <a:tailEnd type="none" w="med" len="med"/>
+                    </a:lnB>
                     <a:noFill/>
                   </a:tcPr>
                 </a:tc>
@@ -10481,6 +12298,50 @@
                     </a:p>
                   </a:txBody>
                   <a:tcPr marL="36576" marR="36576" marT="9144" marB="9144" anchor="ctr">
+                    <a:lnL w="3175" cap="flat" cmpd="sng" algn="ctr">
+                      <a:solidFill>
+                        <a:schemeClr val="bg1">
+                          <a:lumMod val="50000"/>
+                        </a:schemeClr>
+                      </a:solidFill>
+                      <a:prstDash val="solid"/>
+                      <a:round/>
+                      <a:headEnd type="none" w="med" len="med"/>
+                      <a:tailEnd type="none" w="med" len="med"/>
+                    </a:lnL>
+                    <a:lnR w="3175" cap="flat" cmpd="sng" algn="ctr">
+                      <a:solidFill>
+                        <a:schemeClr val="bg1">
+                          <a:lumMod val="50000"/>
+                        </a:schemeClr>
+                      </a:solidFill>
+                      <a:prstDash val="solid"/>
+                      <a:round/>
+                      <a:headEnd type="none" w="med" len="med"/>
+                      <a:tailEnd type="none" w="med" len="med"/>
+                    </a:lnR>
+                    <a:lnT w="3175" cap="flat" cmpd="sng" algn="ctr">
+                      <a:solidFill>
+                        <a:schemeClr val="bg1">
+                          <a:lumMod val="50000"/>
+                        </a:schemeClr>
+                      </a:solidFill>
+                      <a:prstDash val="solid"/>
+                      <a:round/>
+                      <a:headEnd type="none" w="med" len="med"/>
+                      <a:tailEnd type="none" w="med" len="med"/>
+                    </a:lnT>
+                    <a:lnB w="3175" cap="flat" cmpd="sng" algn="ctr">
+                      <a:solidFill>
+                        <a:schemeClr val="bg1">
+                          <a:lumMod val="50000"/>
+                        </a:schemeClr>
+                      </a:solidFill>
+                      <a:prstDash val="solid"/>
+                      <a:round/>
+                      <a:headEnd type="none" w="med" len="med"/>
+                      <a:tailEnd type="none" w="med" len="med"/>
+                    </a:lnB>
                     <a:noFill/>
                   </a:tcPr>
                 </a:tc>
@@ -10514,6 +12375,50 @@
                     </a:p>
                   </a:txBody>
                   <a:tcPr marL="36576" marR="36576" marT="9144" marB="9144" anchor="ctr">
+                    <a:lnL w="3175" cap="flat" cmpd="sng" algn="ctr">
+                      <a:solidFill>
+                        <a:schemeClr val="bg1">
+                          <a:lumMod val="50000"/>
+                        </a:schemeClr>
+                      </a:solidFill>
+                      <a:prstDash val="solid"/>
+                      <a:round/>
+                      <a:headEnd type="none" w="med" len="med"/>
+                      <a:tailEnd type="none" w="med" len="med"/>
+                    </a:lnL>
+                    <a:lnR w="3175" cap="flat" cmpd="sng" algn="ctr">
+                      <a:solidFill>
+                        <a:schemeClr val="bg1">
+                          <a:lumMod val="50000"/>
+                        </a:schemeClr>
+                      </a:solidFill>
+                      <a:prstDash val="solid"/>
+                      <a:round/>
+                      <a:headEnd type="none" w="med" len="med"/>
+                      <a:tailEnd type="none" w="med" len="med"/>
+                    </a:lnR>
+                    <a:lnT w="3175" cap="flat" cmpd="sng" algn="ctr">
+                      <a:solidFill>
+                        <a:schemeClr val="bg1">
+                          <a:lumMod val="50000"/>
+                        </a:schemeClr>
+                      </a:solidFill>
+                      <a:prstDash val="solid"/>
+                      <a:round/>
+                      <a:headEnd type="none" w="med" len="med"/>
+                      <a:tailEnd type="none" w="med" len="med"/>
+                    </a:lnT>
+                    <a:lnB w="3175" cap="flat" cmpd="sng" algn="ctr">
+                      <a:solidFill>
+                        <a:schemeClr val="bg1">
+                          <a:lumMod val="50000"/>
+                        </a:schemeClr>
+                      </a:solidFill>
+                      <a:prstDash val="solid"/>
+                      <a:round/>
+                      <a:headEnd type="none" w="med" len="med"/>
+                      <a:tailEnd type="none" w="med" len="med"/>
+                    </a:lnB>
                     <a:noFill/>
                   </a:tcPr>
                 </a:tc>
@@ -10554,6 +12459,50 @@
                     </a:p>
                   </a:txBody>
                   <a:tcPr marL="36576" marR="36576" marT="9144" marB="9144" anchor="ctr">
+                    <a:lnL w="3175" cap="flat" cmpd="sng" algn="ctr">
+                      <a:solidFill>
+                        <a:schemeClr val="bg1">
+                          <a:lumMod val="50000"/>
+                        </a:schemeClr>
+                      </a:solidFill>
+                      <a:prstDash val="solid"/>
+                      <a:round/>
+                      <a:headEnd type="none" w="med" len="med"/>
+                      <a:tailEnd type="none" w="med" len="med"/>
+                    </a:lnL>
+                    <a:lnR w="3175" cap="flat" cmpd="sng" algn="ctr">
+                      <a:solidFill>
+                        <a:schemeClr val="bg1">
+                          <a:lumMod val="50000"/>
+                        </a:schemeClr>
+                      </a:solidFill>
+                      <a:prstDash val="solid"/>
+                      <a:round/>
+                      <a:headEnd type="none" w="med" len="med"/>
+                      <a:tailEnd type="none" w="med" len="med"/>
+                    </a:lnR>
+                    <a:lnT w="3175" cap="flat" cmpd="sng" algn="ctr">
+                      <a:solidFill>
+                        <a:schemeClr val="bg1">
+                          <a:lumMod val="50000"/>
+                        </a:schemeClr>
+                      </a:solidFill>
+                      <a:prstDash val="solid"/>
+                      <a:round/>
+                      <a:headEnd type="none" w="med" len="med"/>
+                      <a:tailEnd type="none" w="med" len="med"/>
+                    </a:lnT>
+                    <a:lnB w="3175" cap="flat" cmpd="sng" algn="ctr">
+                      <a:solidFill>
+                        <a:schemeClr val="bg1">
+                          <a:lumMod val="50000"/>
+                        </a:schemeClr>
+                      </a:solidFill>
+                      <a:prstDash val="solid"/>
+                      <a:round/>
+                      <a:headEnd type="none" w="med" len="med"/>
+                      <a:tailEnd type="none" w="med" len="med"/>
+                    </a:lnB>
                     <a:solidFill>
                       <a:srgbClr val="EEF4FB"/>
                     </a:solidFill>
@@ -10626,6 +12575,50 @@
                     </a:p>
                   </a:txBody>
                   <a:tcPr marL="36576" marR="36576" marT="9144" marB="9144" anchor="ctr">
+                    <a:lnL w="3175" cap="flat" cmpd="sng" algn="ctr">
+                      <a:solidFill>
+                        <a:schemeClr val="bg1">
+                          <a:lumMod val="50000"/>
+                        </a:schemeClr>
+                      </a:solidFill>
+                      <a:prstDash val="solid"/>
+                      <a:round/>
+                      <a:headEnd type="none" w="med" len="med"/>
+                      <a:tailEnd type="none" w="med" len="med"/>
+                    </a:lnL>
+                    <a:lnR w="3175" cap="flat" cmpd="sng" algn="ctr">
+                      <a:solidFill>
+                        <a:schemeClr val="bg1">
+                          <a:lumMod val="50000"/>
+                        </a:schemeClr>
+                      </a:solidFill>
+                      <a:prstDash val="solid"/>
+                      <a:round/>
+                      <a:headEnd type="none" w="med" len="med"/>
+                      <a:tailEnd type="none" w="med" len="med"/>
+                    </a:lnR>
+                    <a:lnT w="3175" cap="flat" cmpd="sng" algn="ctr">
+                      <a:solidFill>
+                        <a:schemeClr val="bg1">
+                          <a:lumMod val="50000"/>
+                        </a:schemeClr>
+                      </a:solidFill>
+                      <a:prstDash val="solid"/>
+                      <a:round/>
+                      <a:headEnd type="none" w="med" len="med"/>
+                      <a:tailEnd type="none" w="med" len="med"/>
+                    </a:lnT>
+                    <a:lnB w="3175" cap="flat" cmpd="sng" algn="ctr">
+                      <a:solidFill>
+                        <a:schemeClr val="bg1">
+                          <a:lumMod val="50000"/>
+                        </a:schemeClr>
+                      </a:solidFill>
+                      <a:prstDash val="solid"/>
+                      <a:round/>
+                      <a:headEnd type="none" w="med" len="med"/>
+                      <a:tailEnd type="none" w="med" len="med"/>
+                    </a:lnB>
                     <a:noFill/>
                   </a:tcPr>
                 </a:tc>
@@ -10659,6 +12652,50 @@
                     </a:p>
                   </a:txBody>
                   <a:tcPr marL="36576" marR="36576" marT="9144" marB="9144" anchor="ctr">
+                    <a:lnL w="3175" cap="flat" cmpd="sng" algn="ctr">
+                      <a:solidFill>
+                        <a:schemeClr val="bg1">
+                          <a:lumMod val="50000"/>
+                        </a:schemeClr>
+                      </a:solidFill>
+                      <a:prstDash val="solid"/>
+                      <a:round/>
+                      <a:headEnd type="none" w="med" len="med"/>
+                      <a:tailEnd type="none" w="med" len="med"/>
+                    </a:lnL>
+                    <a:lnR w="3175" cap="flat" cmpd="sng" algn="ctr">
+                      <a:solidFill>
+                        <a:schemeClr val="bg1">
+                          <a:lumMod val="50000"/>
+                        </a:schemeClr>
+                      </a:solidFill>
+                      <a:prstDash val="solid"/>
+                      <a:round/>
+                      <a:headEnd type="none" w="med" len="med"/>
+                      <a:tailEnd type="none" w="med" len="med"/>
+                    </a:lnR>
+                    <a:lnT w="3175" cap="flat" cmpd="sng" algn="ctr">
+                      <a:solidFill>
+                        <a:schemeClr val="bg1">
+                          <a:lumMod val="50000"/>
+                        </a:schemeClr>
+                      </a:solidFill>
+                      <a:prstDash val="solid"/>
+                      <a:round/>
+                      <a:headEnd type="none" w="med" len="med"/>
+                      <a:tailEnd type="none" w="med" len="med"/>
+                    </a:lnT>
+                    <a:lnB w="3175" cap="flat" cmpd="sng" algn="ctr">
+                      <a:solidFill>
+                        <a:schemeClr val="bg1">
+                          <a:lumMod val="50000"/>
+                        </a:schemeClr>
+                      </a:solidFill>
+                      <a:prstDash val="solid"/>
+                      <a:round/>
+                      <a:headEnd type="none" w="med" len="med"/>
+                      <a:tailEnd type="none" w="med" len="med"/>
+                    </a:lnB>
                     <a:noFill/>
                   </a:tcPr>
                 </a:tc>
@@ -10692,6 +12729,50 @@
                     </a:p>
                   </a:txBody>
                   <a:tcPr marL="36576" marR="36576" marT="9144" marB="9144" anchor="ctr">
+                    <a:lnL w="3175" cap="flat" cmpd="sng" algn="ctr">
+                      <a:solidFill>
+                        <a:schemeClr val="bg1">
+                          <a:lumMod val="50000"/>
+                        </a:schemeClr>
+                      </a:solidFill>
+                      <a:prstDash val="solid"/>
+                      <a:round/>
+                      <a:headEnd type="none" w="med" len="med"/>
+                      <a:tailEnd type="none" w="med" len="med"/>
+                    </a:lnL>
+                    <a:lnR w="3175" cap="flat" cmpd="sng" algn="ctr">
+                      <a:solidFill>
+                        <a:schemeClr val="bg1">
+                          <a:lumMod val="50000"/>
+                        </a:schemeClr>
+                      </a:solidFill>
+                      <a:prstDash val="solid"/>
+                      <a:round/>
+                      <a:headEnd type="none" w="med" len="med"/>
+                      <a:tailEnd type="none" w="med" len="med"/>
+                    </a:lnR>
+                    <a:lnT w="3175" cap="flat" cmpd="sng" algn="ctr">
+                      <a:solidFill>
+                        <a:schemeClr val="bg1">
+                          <a:lumMod val="50000"/>
+                        </a:schemeClr>
+                      </a:solidFill>
+                      <a:prstDash val="solid"/>
+                      <a:round/>
+                      <a:headEnd type="none" w="med" len="med"/>
+                      <a:tailEnd type="none" w="med" len="med"/>
+                    </a:lnT>
+                    <a:lnB w="3175" cap="flat" cmpd="sng" algn="ctr">
+                      <a:solidFill>
+                        <a:schemeClr val="bg1">
+                          <a:lumMod val="50000"/>
+                        </a:schemeClr>
+                      </a:solidFill>
+                      <a:prstDash val="solid"/>
+                      <a:round/>
+                      <a:headEnd type="none" w="med" len="med"/>
+                      <a:tailEnd type="none" w="med" len="med"/>
+                    </a:lnB>
                     <a:noFill/>
                   </a:tcPr>
                 </a:tc>
@@ -10725,6 +12806,50 @@
                     </a:p>
                   </a:txBody>
                   <a:tcPr marL="36576" marR="36576" marT="9144" marB="9144" anchor="ctr">
+                    <a:lnL w="3175" cap="flat" cmpd="sng" algn="ctr">
+                      <a:solidFill>
+                        <a:schemeClr val="bg1">
+                          <a:lumMod val="50000"/>
+                        </a:schemeClr>
+                      </a:solidFill>
+                      <a:prstDash val="solid"/>
+                      <a:round/>
+                      <a:headEnd type="none" w="med" len="med"/>
+                      <a:tailEnd type="none" w="med" len="med"/>
+                    </a:lnL>
+                    <a:lnR w="3175" cap="flat" cmpd="sng" algn="ctr">
+                      <a:solidFill>
+                        <a:schemeClr val="bg1">
+                          <a:lumMod val="50000"/>
+                        </a:schemeClr>
+                      </a:solidFill>
+                      <a:prstDash val="solid"/>
+                      <a:round/>
+                      <a:headEnd type="none" w="med" len="med"/>
+                      <a:tailEnd type="none" w="med" len="med"/>
+                    </a:lnR>
+                    <a:lnT w="3175" cap="flat" cmpd="sng" algn="ctr">
+                      <a:solidFill>
+                        <a:schemeClr val="bg1">
+                          <a:lumMod val="50000"/>
+                        </a:schemeClr>
+                      </a:solidFill>
+                      <a:prstDash val="solid"/>
+                      <a:round/>
+                      <a:headEnd type="none" w="med" len="med"/>
+                      <a:tailEnd type="none" w="med" len="med"/>
+                    </a:lnT>
+                    <a:lnB w="3175" cap="flat" cmpd="sng" algn="ctr">
+                      <a:solidFill>
+                        <a:schemeClr val="bg1">
+                          <a:lumMod val="50000"/>
+                        </a:schemeClr>
+                      </a:solidFill>
+                      <a:prstDash val="solid"/>
+                      <a:round/>
+                      <a:headEnd type="none" w="med" len="med"/>
+                      <a:tailEnd type="none" w="med" len="med"/>
+                    </a:lnB>
                     <a:noFill/>
                   </a:tcPr>
                 </a:tc>
@@ -10765,6 +12890,50 @@
                     </a:p>
                   </a:txBody>
                   <a:tcPr marL="36576" marR="36576" marT="9144" marB="9144" anchor="ctr">
+                    <a:lnL w="3175" cap="flat" cmpd="sng" algn="ctr">
+                      <a:solidFill>
+                        <a:schemeClr val="bg1">
+                          <a:lumMod val="50000"/>
+                        </a:schemeClr>
+                      </a:solidFill>
+                      <a:prstDash val="solid"/>
+                      <a:round/>
+                      <a:headEnd type="none" w="med" len="med"/>
+                      <a:tailEnd type="none" w="med" len="med"/>
+                    </a:lnL>
+                    <a:lnR w="3175" cap="flat" cmpd="sng" algn="ctr">
+                      <a:solidFill>
+                        <a:schemeClr val="bg1">
+                          <a:lumMod val="50000"/>
+                        </a:schemeClr>
+                      </a:solidFill>
+                      <a:prstDash val="solid"/>
+                      <a:round/>
+                      <a:headEnd type="none" w="med" len="med"/>
+                      <a:tailEnd type="none" w="med" len="med"/>
+                    </a:lnR>
+                    <a:lnT w="3175" cap="flat" cmpd="sng" algn="ctr">
+                      <a:solidFill>
+                        <a:schemeClr val="bg1">
+                          <a:lumMod val="50000"/>
+                        </a:schemeClr>
+                      </a:solidFill>
+                      <a:prstDash val="solid"/>
+                      <a:round/>
+                      <a:headEnd type="none" w="med" len="med"/>
+                      <a:tailEnd type="none" w="med" len="med"/>
+                    </a:lnT>
+                    <a:lnB w="3175" cap="flat" cmpd="sng" algn="ctr">
+                      <a:solidFill>
+                        <a:schemeClr val="bg1">
+                          <a:lumMod val="50000"/>
+                        </a:schemeClr>
+                      </a:solidFill>
+                      <a:prstDash val="solid"/>
+                      <a:round/>
+                      <a:headEnd type="none" w="med" len="med"/>
+                      <a:tailEnd type="none" w="med" len="med"/>
+                    </a:lnB>
                     <a:noFill/>
                   </a:tcPr>
                 </a:tc>
@@ -10798,6 +12967,50 @@
                     </a:p>
                   </a:txBody>
                   <a:tcPr marL="36576" marR="36576" marT="9144" marB="9144" anchor="ctr">
+                    <a:lnL w="3175" cap="flat" cmpd="sng" algn="ctr">
+                      <a:solidFill>
+                        <a:schemeClr val="bg1">
+                          <a:lumMod val="50000"/>
+                        </a:schemeClr>
+                      </a:solidFill>
+                      <a:prstDash val="solid"/>
+                      <a:round/>
+                      <a:headEnd type="none" w="med" len="med"/>
+                      <a:tailEnd type="none" w="med" len="med"/>
+                    </a:lnL>
+                    <a:lnR w="3175" cap="flat" cmpd="sng" algn="ctr">
+                      <a:solidFill>
+                        <a:schemeClr val="bg1">
+                          <a:lumMod val="50000"/>
+                        </a:schemeClr>
+                      </a:solidFill>
+                      <a:prstDash val="solid"/>
+                      <a:round/>
+                      <a:headEnd type="none" w="med" len="med"/>
+                      <a:tailEnd type="none" w="med" len="med"/>
+                    </a:lnR>
+                    <a:lnT w="3175" cap="flat" cmpd="sng" algn="ctr">
+                      <a:solidFill>
+                        <a:schemeClr val="bg1">
+                          <a:lumMod val="50000"/>
+                        </a:schemeClr>
+                      </a:solidFill>
+                      <a:prstDash val="solid"/>
+                      <a:round/>
+                      <a:headEnd type="none" w="med" len="med"/>
+                      <a:tailEnd type="none" w="med" len="med"/>
+                    </a:lnT>
+                    <a:lnB w="3175" cap="flat" cmpd="sng" algn="ctr">
+                      <a:solidFill>
+                        <a:schemeClr val="bg1">
+                          <a:lumMod val="50000"/>
+                        </a:schemeClr>
+                      </a:solidFill>
+                      <a:prstDash val="solid"/>
+                      <a:round/>
+                      <a:headEnd type="none" w="med" len="med"/>
+                      <a:tailEnd type="none" w="med" len="med"/>
+                    </a:lnB>
                     <a:noFill/>
                   </a:tcPr>
                 </a:tc>
@@ -10842,6 +13055,50 @@
                     </a:p>
                   </a:txBody>
                   <a:tcPr marL="36576" marR="36576" marT="9144" marB="9144" anchor="ctr">
+                    <a:lnL w="3175" cap="flat" cmpd="sng" algn="ctr">
+                      <a:solidFill>
+                        <a:schemeClr val="bg1">
+                          <a:lumMod val="50000"/>
+                        </a:schemeClr>
+                      </a:solidFill>
+                      <a:prstDash val="solid"/>
+                      <a:round/>
+                      <a:headEnd type="none" w="med" len="med"/>
+                      <a:tailEnd type="none" w="med" len="med"/>
+                    </a:lnL>
+                    <a:lnR w="3175" cap="flat" cmpd="sng" algn="ctr">
+                      <a:solidFill>
+                        <a:schemeClr val="bg1">
+                          <a:lumMod val="50000"/>
+                        </a:schemeClr>
+                      </a:solidFill>
+                      <a:prstDash val="solid"/>
+                      <a:round/>
+                      <a:headEnd type="none" w="med" len="med"/>
+                      <a:tailEnd type="none" w="med" len="med"/>
+                    </a:lnR>
+                    <a:lnT w="3175" cap="flat" cmpd="sng" algn="ctr">
+                      <a:solidFill>
+                        <a:schemeClr val="bg1">
+                          <a:lumMod val="50000"/>
+                        </a:schemeClr>
+                      </a:solidFill>
+                      <a:prstDash val="solid"/>
+                      <a:round/>
+                      <a:headEnd type="none" w="med" len="med"/>
+                      <a:tailEnd type="none" w="med" len="med"/>
+                    </a:lnT>
+                    <a:lnB w="3175" cap="flat" cmpd="sng" algn="ctr">
+                      <a:solidFill>
+                        <a:schemeClr val="bg1">
+                          <a:lumMod val="50000"/>
+                        </a:schemeClr>
+                      </a:solidFill>
+                      <a:prstDash val="solid"/>
+                      <a:round/>
+                      <a:headEnd type="none" w="med" len="med"/>
+                      <a:tailEnd type="none" w="med" len="med"/>
+                    </a:lnB>
                     <a:noFill/>
                   </a:tcPr>
                 </a:tc>
@@ -10875,6 +13132,50 @@
                     </a:p>
                   </a:txBody>
                   <a:tcPr marL="36576" marR="36576" marT="9144" marB="9144" anchor="ctr">
+                    <a:lnL w="3175" cap="flat" cmpd="sng" algn="ctr">
+                      <a:solidFill>
+                        <a:schemeClr val="bg1">
+                          <a:lumMod val="50000"/>
+                        </a:schemeClr>
+                      </a:solidFill>
+                      <a:prstDash val="solid"/>
+                      <a:round/>
+                      <a:headEnd type="none" w="med" len="med"/>
+                      <a:tailEnd type="none" w="med" len="med"/>
+                    </a:lnL>
+                    <a:lnR w="3175" cap="flat" cmpd="sng" algn="ctr">
+                      <a:solidFill>
+                        <a:schemeClr val="bg1">
+                          <a:lumMod val="50000"/>
+                        </a:schemeClr>
+                      </a:solidFill>
+                      <a:prstDash val="solid"/>
+                      <a:round/>
+                      <a:headEnd type="none" w="med" len="med"/>
+                      <a:tailEnd type="none" w="med" len="med"/>
+                    </a:lnR>
+                    <a:lnT w="3175" cap="flat" cmpd="sng" algn="ctr">
+                      <a:solidFill>
+                        <a:schemeClr val="bg1">
+                          <a:lumMod val="50000"/>
+                        </a:schemeClr>
+                      </a:solidFill>
+                      <a:prstDash val="solid"/>
+                      <a:round/>
+                      <a:headEnd type="none" w="med" len="med"/>
+                      <a:tailEnd type="none" w="med" len="med"/>
+                    </a:lnT>
+                    <a:lnB w="3175" cap="flat" cmpd="sng" algn="ctr">
+                      <a:solidFill>
+                        <a:schemeClr val="bg1">
+                          <a:lumMod val="50000"/>
+                        </a:schemeClr>
+                      </a:solidFill>
+                      <a:prstDash val="solid"/>
+                      <a:round/>
+                      <a:headEnd type="none" w="med" len="med"/>
+                      <a:tailEnd type="none" w="med" len="med"/>
+                    </a:lnB>
                     <a:noFill/>
                   </a:tcPr>
                 </a:tc>
@@ -10915,6 +13216,50 @@
                     </a:p>
                   </a:txBody>
                   <a:tcPr marL="36576" marR="36576" marT="9144" marB="9144" anchor="ctr">
+                    <a:lnL w="3175" cap="flat" cmpd="sng" algn="ctr">
+                      <a:solidFill>
+                        <a:schemeClr val="bg1">
+                          <a:lumMod val="50000"/>
+                        </a:schemeClr>
+                      </a:solidFill>
+                      <a:prstDash val="solid"/>
+                      <a:round/>
+                      <a:headEnd type="none" w="med" len="med"/>
+                      <a:tailEnd type="none" w="med" len="med"/>
+                    </a:lnL>
+                    <a:lnR w="3175" cap="flat" cmpd="sng" algn="ctr">
+                      <a:solidFill>
+                        <a:schemeClr val="bg1">
+                          <a:lumMod val="50000"/>
+                        </a:schemeClr>
+                      </a:solidFill>
+                      <a:prstDash val="solid"/>
+                      <a:round/>
+                      <a:headEnd type="none" w="med" len="med"/>
+                      <a:tailEnd type="none" w="med" len="med"/>
+                    </a:lnR>
+                    <a:lnT w="3175" cap="flat" cmpd="sng" algn="ctr">
+                      <a:solidFill>
+                        <a:schemeClr val="bg1">
+                          <a:lumMod val="50000"/>
+                        </a:schemeClr>
+                      </a:solidFill>
+                      <a:prstDash val="solid"/>
+                      <a:round/>
+                      <a:headEnd type="none" w="med" len="med"/>
+                      <a:tailEnd type="none" w="med" len="med"/>
+                    </a:lnT>
+                    <a:lnB w="3175" cap="flat" cmpd="sng" algn="ctr">
+                      <a:solidFill>
+                        <a:schemeClr val="bg1">
+                          <a:lumMod val="50000"/>
+                        </a:schemeClr>
+                      </a:solidFill>
+                      <a:prstDash val="solid"/>
+                      <a:round/>
+                      <a:headEnd type="none" w="med" len="med"/>
+                      <a:tailEnd type="none" w="med" len="med"/>
+                    </a:lnB>
                     <a:noFill/>
                   </a:tcPr>
                 </a:tc>
@@ -10948,6 +13293,50 @@
                     </a:p>
                   </a:txBody>
                   <a:tcPr marL="36576" marR="36576" marT="9144" marB="9144" anchor="ctr">
+                    <a:lnL w="3175" cap="flat" cmpd="sng" algn="ctr">
+                      <a:solidFill>
+                        <a:schemeClr val="bg1">
+                          <a:lumMod val="50000"/>
+                        </a:schemeClr>
+                      </a:solidFill>
+                      <a:prstDash val="solid"/>
+                      <a:round/>
+                      <a:headEnd type="none" w="med" len="med"/>
+                      <a:tailEnd type="none" w="med" len="med"/>
+                    </a:lnL>
+                    <a:lnR w="3175" cap="flat" cmpd="sng" algn="ctr">
+                      <a:solidFill>
+                        <a:schemeClr val="bg1">
+                          <a:lumMod val="50000"/>
+                        </a:schemeClr>
+                      </a:solidFill>
+                      <a:prstDash val="solid"/>
+                      <a:round/>
+                      <a:headEnd type="none" w="med" len="med"/>
+                      <a:tailEnd type="none" w="med" len="med"/>
+                    </a:lnR>
+                    <a:lnT w="3175" cap="flat" cmpd="sng" algn="ctr">
+                      <a:solidFill>
+                        <a:schemeClr val="bg1">
+                          <a:lumMod val="50000"/>
+                        </a:schemeClr>
+                      </a:solidFill>
+                      <a:prstDash val="solid"/>
+                      <a:round/>
+                      <a:headEnd type="none" w="med" len="med"/>
+                      <a:tailEnd type="none" w="med" len="med"/>
+                    </a:lnT>
+                    <a:lnB w="3175" cap="flat" cmpd="sng" algn="ctr">
+                      <a:solidFill>
+                        <a:schemeClr val="bg1">
+                          <a:lumMod val="50000"/>
+                        </a:schemeClr>
+                      </a:solidFill>
+                      <a:prstDash val="solid"/>
+                      <a:round/>
+                      <a:headEnd type="none" w="med" len="med"/>
+                      <a:tailEnd type="none" w="med" len="med"/>
+                    </a:lnB>
                     <a:noFill/>
                   </a:tcPr>
                 </a:tc>
@@ -10992,6 +13381,50 @@
                     </a:p>
                   </a:txBody>
                   <a:tcPr marL="36576" marR="36576" marT="9144" marB="9144" anchor="ctr">
+                    <a:lnL w="3175" cap="flat" cmpd="sng" algn="ctr">
+                      <a:solidFill>
+                        <a:schemeClr val="bg1">
+                          <a:lumMod val="50000"/>
+                        </a:schemeClr>
+                      </a:solidFill>
+                      <a:prstDash val="solid"/>
+                      <a:round/>
+                      <a:headEnd type="none" w="med" len="med"/>
+                      <a:tailEnd type="none" w="med" len="med"/>
+                    </a:lnL>
+                    <a:lnR w="3175" cap="flat" cmpd="sng" algn="ctr">
+                      <a:solidFill>
+                        <a:schemeClr val="bg1">
+                          <a:lumMod val="50000"/>
+                        </a:schemeClr>
+                      </a:solidFill>
+                      <a:prstDash val="solid"/>
+                      <a:round/>
+                      <a:headEnd type="none" w="med" len="med"/>
+                      <a:tailEnd type="none" w="med" len="med"/>
+                    </a:lnR>
+                    <a:lnT w="3175" cap="flat" cmpd="sng" algn="ctr">
+                      <a:solidFill>
+                        <a:schemeClr val="bg1">
+                          <a:lumMod val="50000"/>
+                        </a:schemeClr>
+                      </a:solidFill>
+                      <a:prstDash val="solid"/>
+                      <a:round/>
+                      <a:headEnd type="none" w="med" len="med"/>
+                      <a:tailEnd type="none" w="med" len="med"/>
+                    </a:lnT>
+                    <a:lnB w="3175" cap="flat" cmpd="sng" algn="ctr">
+                      <a:solidFill>
+                        <a:schemeClr val="bg1">
+                          <a:lumMod val="50000"/>
+                        </a:schemeClr>
+                      </a:solidFill>
+                      <a:prstDash val="solid"/>
+                      <a:round/>
+                      <a:headEnd type="none" w="med" len="med"/>
+                      <a:tailEnd type="none" w="med" len="med"/>
+                    </a:lnB>
                     <a:noFill/>
                   </a:tcPr>
                 </a:tc>
@@ -11025,6 +13458,50 @@
                     </a:p>
                   </a:txBody>
                   <a:tcPr marL="36576" marR="36576" marT="9144" marB="9144" anchor="ctr">
+                    <a:lnL w="3175" cap="flat" cmpd="sng" algn="ctr">
+                      <a:solidFill>
+                        <a:schemeClr val="bg1">
+                          <a:lumMod val="50000"/>
+                        </a:schemeClr>
+                      </a:solidFill>
+                      <a:prstDash val="solid"/>
+                      <a:round/>
+                      <a:headEnd type="none" w="med" len="med"/>
+                      <a:tailEnd type="none" w="med" len="med"/>
+                    </a:lnL>
+                    <a:lnR w="3175" cap="flat" cmpd="sng" algn="ctr">
+                      <a:solidFill>
+                        <a:schemeClr val="bg1">
+                          <a:lumMod val="50000"/>
+                        </a:schemeClr>
+                      </a:solidFill>
+                      <a:prstDash val="solid"/>
+                      <a:round/>
+                      <a:headEnd type="none" w="med" len="med"/>
+                      <a:tailEnd type="none" w="med" len="med"/>
+                    </a:lnR>
+                    <a:lnT w="3175" cap="flat" cmpd="sng" algn="ctr">
+                      <a:solidFill>
+                        <a:schemeClr val="bg1">
+                          <a:lumMod val="50000"/>
+                        </a:schemeClr>
+                      </a:solidFill>
+                      <a:prstDash val="solid"/>
+                      <a:round/>
+                      <a:headEnd type="none" w="med" len="med"/>
+                      <a:tailEnd type="none" w="med" len="med"/>
+                    </a:lnT>
+                    <a:lnB w="3175" cap="flat" cmpd="sng" algn="ctr">
+                      <a:solidFill>
+                        <a:schemeClr val="bg1">
+                          <a:lumMod val="50000"/>
+                        </a:schemeClr>
+                      </a:solidFill>
+                      <a:prstDash val="solid"/>
+                      <a:round/>
+                      <a:headEnd type="none" w="med" len="med"/>
+                      <a:tailEnd type="none" w="med" len="med"/>
+                    </a:lnB>
                     <a:noFill/>
                   </a:tcPr>
                 </a:tc>
@@ -11065,6 +13542,50 @@
                     </a:p>
                   </a:txBody>
                   <a:tcPr marL="36576" marR="36576" marT="9144" marB="9144" anchor="ctr">
+                    <a:lnL w="3175" cap="flat" cmpd="sng" algn="ctr">
+                      <a:solidFill>
+                        <a:schemeClr val="bg1">
+                          <a:lumMod val="50000"/>
+                        </a:schemeClr>
+                      </a:solidFill>
+                      <a:prstDash val="solid"/>
+                      <a:round/>
+                      <a:headEnd type="none" w="med" len="med"/>
+                      <a:tailEnd type="none" w="med" len="med"/>
+                    </a:lnL>
+                    <a:lnR w="3175" cap="flat" cmpd="sng" algn="ctr">
+                      <a:solidFill>
+                        <a:schemeClr val="bg1">
+                          <a:lumMod val="50000"/>
+                        </a:schemeClr>
+                      </a:solidFill>
+                      <a:prstDash val="solid"/>
+                      <a:round/>
+                      <a:headEnd type="none" w="med" len="med"/>
+                      <a:tailEnd type="none" w="med" len="med"/>
+                    </a:lnR>
+                    <a:lnT w="3175" cap="flat" cmpd="sng" algn="ctr">
+                      <a:solidFill>
+                        <a:schemeClr val="bg1">
+                          <a:lumMod val="50000"/>
+                        </a:schemeClr>
+                      </a:solidFill>
+                      <a:prstDash val="solid"/>
+                      <a:round/>
+                      <a:headEnd type="none" w="med" len="med"/>
+                      <a:tailEnd type="none" w="med" len="med"/>
+                    </a:lnT>
+                    <a:lnB w="3175" cap="flat" cmpd="sng" algn="ctr">
+                      <a:solidFill>
+                        <a:schemeClr val="bg1">
+                          <a:lumMod val="50000"/>
+                        </a:schemeClr>
+                      </a:solidFill>
+                      <a:prstDash val="solid"/>
+                      <a:round/>
+                      <a:headEnd type="none" w="med" len="med"/>
+                      <a:tailEnd type="none" w="med" len="med"/>
+                    </a:lnB>
                     <a:noFill/>
                   </a:tcPr>
                 </a:tc>
@@ -11098,6 +13619,50 @@
                     </a:p>
                   </a:txBody>
                   <a:tcPr marL="36576" marR="36576" marT="9144" marB="9144" anchor="ctr">
+                    <a:lnL w="3175" cap="flat" cmpd="sng" algn="ctr">
+                      <a:solidFill>
+                        <a:schemeClr val="bg1">
+                          <a:lumMod val="50000"/>
+                        </a:schemeClr>
+                      </a:solidFill>
+                      <a:prstDash val="solid"/>
+                      <a:round/>
+                      <a:headEnd type="none" w="med" len="med"/>
+                      <a:tailEnd type="none" w="med" len="med"/>
+                    </a:lnL>
+                    <a:lnR w="3175" cap="flat" cmpd="sng" algn="ctr">
+                      <a:solidFill>
+                        <a:schemeClr val="bg1">
+                          <a:lumMod val="50000"/>
+                        </a:schemeClr>
+                      </a:solidFill>
+                      <a:prstDash val="solid"/>
+                      <a:round/>
+                      <a:headEnd type="none" w="med" len="med"/>
+                      <a:tailEnd type="none" w="med" len="med"/>
+                    </a:lnR>
+                    <a:lnT w="3175" cap="flat" cmpd="sng" algn="ctr">
+                      <a:solidFill>
+                        <a:schemeClr val="bg1">
+                          <a:lumMod val="50000"/>
+                        </a:schemeClr>
+                      </a:solidFill>
+                      <a:prstDash val="solid"/>
+                      <a:round/>
+                      <a:headEnd type="none" w="med" len="med"/>
+                      <a:tailEnd type="none" w="med" len="med"/>
+                    </a:lnT>
+                    <a:lnB w="3175" cap="flat" cmpd="sng" algn="ctr">
+                      <a:solidFill>
+                        <a:schemeClr val="bg1">
+                          <a:lumMod val="50000"/>
+                        </a:schemeClr>
+                      </a:solidFill>
+                      <a:prstDash val="solid"/>
+                      <a:round/>
+                      <a:headEnd type="none" w="med" len="med"/>
+                      <a:tailEnd type="none" w="med" len="med"/>
+                    </a:lnB>
                     <a:noFill/>
                   </a:tcPr>
                 </a:tc>
@@ -11131,6 +13696,50 @@
                     </a:p>
                   </a:txBody>
                   <a:tcPr marL="36576" marR="36576" marT="9144" marB="9144" anchor="ctr">
+                    <a:lnL w="3175" cap="flat" cmpd="sng" algn="ctr">
+                      <a:solidFill>
+                        <a:schemeClr val="bg1">
+                          <a:lumMod val="50000"/>
+                        </a:schemeClr>
+                      </a:solidFill>
+                      <a:prstDash val="solid"/>
+                      <a:round/>
+                      <a:headEnd type="none" w="med" len="med"/>
+                      <a:tailEnd type="none" w="med" len="med"/>
+                    </a:lnL>
+                    <a:lnR w="3175" cap="flat" cmpd="sng" algn="ctr">
+                      <a:solidFill>
+                        <a:schemeClr val="bg1">
+                          <a:lumMod val="50000"/>
+                        </a:schemeClr>
+                      </a:solidFill>
+                      <a:prstDash val="solid"/>
+                      <a:round/>
+                      <a:headEnd type="none" w="med" len="med"/>
+                      <a:tailEnd type="none" w="med" len="med"/>
+                    </a:lnR>
+                    <a:lnT w="3175" cap="flat" cmpd="sng" algn="ctr">
+                      <a:solidFill>
+                        <a:schemeClr val="bg1">
+                          <a:lumMod val="50000"/>
+                        </a:schemeClr>
+                      </a:solidFill>
+                      <a:prstDash val="solid"/>
+                      <a:round/>
+                      <a:headEnd type="none" w="med" len="med"/>
+                      <a:tailEnd type="none" w="med" len="med"/>
+                    </a:lnT>
+                    <a:lnB w="3175" cap="flat" cmpd="sng" algn="ctr">
+                      <a:solidFill>
+                        <a:schemeClr val="bg1">
+                          <a:lumMod val="50000"/>
+                        </a:schemeClr>
+                      </a:solidFill>
+                      <a:prstDash val="solid"/>
+                      <a:round/>
+                      <a:headEnd type="none" w="med" len="med"/>
+                      <a:tailEnd type="none" w="med" len="med"/>
+                    </a:lnB>
                     <a:noFill/>
                   </a:tcPr>
                 </a:tc>
@@ -11164,6 +13773,50 @@
                     </a:p>
                   </a:txBody>
                   <a:tcPr marL="36576" marR="36576" marT="9144" marB="9144" anchor="ctr">
+                    <a:lnL w="3175" cap="flat" cmpd="sng" algn="ctr">
+                      <a:solidFill>
+                        <a:schemeClr val="bg1">
+                          <a:lumMod val="50000"/>
+                        </a:schemeClr>
+                      </a:solidFill>
+                      <a:prstDash val="solid"/>
+                      <a:round/>
+                      <a:headEnd type="none" w="med" len="med"/>
+                      <a:tailEnd type="none" w="med" len="med"/>
+                    </a:lnL>
+                    <a:lnR w="3175" cap="flat" cmpd="sng" algn="ctr">
+                      <a:solidFill>
+                        <a:schemeClr val="bg1">
+                          <a:lumMod val="50000"/>
+                        </a:schemeClr>
+                      </a:solidFill>
+                      <a:prstDash val="solid"/>
+                      <a:round/>
+                      <a:headEnd type="none" w="med" len="med"/>
+                      <a:tailEnd type="none" w="med" len="med"/>
+                    </a:lnR>
+                    <a:lnT w="3175" cap="flat" cmpd="sng" algn="ctr">
+                      <a:solidFill>
+                        <a:schemeClr val="bg1">
+                          <a:lumMod val="50000"/>
+                        </a:schemeClr>
+                      </a:solidFill>
+                      <a:prstDash val="solid"/>
+                      <a:round/>
+                      <a:headEnd type="none" w="med" len="med"/>
+                      <a:tailEnd type="none" w="med" len="med"/>
+                    </a:lnT>
+                    <a:lnB w="3175" cap="flat" cmpd="sng" algn="ctr">
+                      <a:solidFill>
+                        <a:schemeClr val="bg1">
+                          <a:lumMod val="50000"/>
+                        </a:schemeClr>
+                      </a:solidFill>
+                      <a:prstDash val="solid"/>
+                      <a:round/>
+                      <a:headEnd type="none" w="med" len="med"/>
+                      <a:tailEnd type="none" w="med" len="med"/>
+                    </a:lnB>
                     <a:noFill/>
                   </a:tcPr>
                 </a:tc>
@@ -11204,6 +13857,50 @@
                     </a:p>
                   </a:txBody>
                   <a:tcPr marL="36576" marR="36576" marT="9144" marB="9144" anchor="ctr">
+                    <a:lnL w="3175" cap="flat" cmpd="sng" algn="ctr">
+                      <a:solidFill>
+                        <a:schemeClr val="bg1">
+                          <a:lumMod val="50000"/>
+                        </a:schemeClr>
+                      </a:solidFill>
+                      <a:prstDash val="solid"/>
+                      <a:round/>
+                      <a:headEnd type="none" w="med" len="med"/>
+                      <a:tailEnd type="none" w="med" len="med"/>
+                    </a:lnL>
+                    <a:lnR w="3175" cap="flat" cmpd="sng" algn="ctr">
+                      <a:solidFill>
+                        <a:schemeClr val="bg1">
+                          <a:lumMod val="50000"/>
+                        </a:schemeClr>
+                      </a:solidFill>
+                      <a:prstDash val="solid"/>
+                      <a:round/>
+                      <a:headEnd type="none" w="med" len="med"/>
+                      <a:tailEnd type="none" w="med" len="med"/>
+                    </a:lnR>
+                    <a:lnT w="3175" cap="flat" cmpd="sng" algn="ctr">
+                      <a:solidFill>
+                        <a:schemeClr val="bg1">
+                          <a:lumMod val="50000"/>
+                        </a:schemeClr>
+                      </a:solidFill>
+                      <a:prstDash val="solid"/>
+                      <a:round/>
+                      <a:headEnd type="none" w="med" len="med"/>
+                      <a:tailEnd type="none" w="med" len="med"/>
+                    </a:lnT>
+                    <a:lnB w="3175" cap="flat" cmpd="sng" algn="ctr">
+                      <a:solidFill>
+                        <a:schemeClr val="bg1">
+                          <a:lumMod val="50000"/>
+                        </a:schemeClr>
+                      </a:solidFill>
+                      <a:prstDash val="solid"/>
+                      <a:round/>
+                      <a:headEnd type="none" w="med" len="med"/>
+                      <a:tailEnd type="none" w="med" len="med"/>
+                    </a:lnB>
                     <a:noFill/>
                   </a:tcPr>
                 </a:tc>
@@ -11237,6 +13934,50 @@
                     </a:p>
                   </a:txBody>
                   <a:tcPr marL="36576" marR="36576" marT="9144" marB="9144" anchor="ctr">
+                    <a:lnL w="3175" cap="flat" cmpd="sng" algn="ctr">
+                      <a:solidFill>
+                        <a:schemeClr val="bg1">
+                          <a:lumMod val="50000"/>
+                        </a:schemeClr>
+                      </a:solidFill>
+                      <a:prstDash val="solid"/>
+                      <a:round/>
+                      <a:headEnd type="none" w="med" len="med"/>
+                      <a:tailEnd type="none" w="med" len="med"/>
+                    </a:lnL>
+                    <a:lnR w="3175" cap="flat" cmpd="sng" algn="ctr">
+                      <a:solidFill>
+                        <a:schemeClr val="bg1">
+                          <a:lumMod val="50000"/>
+                        </a:schemeClr>
+                      </a:solidFill>
+                      <a:prstDash val="solid"/>
+                      <a:round/>
+                      <a:headEnd type="none" w="med" len="med"/>
+                      <a:tailEnd type="none" w="med" len="med"/>
+                    </a:lnR>
+                    <a:lnT w="3175" cap="flat" cmpd="sng" algn="ctr">
+                      <a:solidFill>
+                        <a:schemeClr val="bg1">
+                          <a:lumMod val="50000"/>
+                        </a:schemeClr>
+                      </a:solidFill>
+                      <a:prstDash val="solid"/>
+                      <a:round/>
+                      <a:headEnd type="none" w="med" len="med"/>
+                      <a:tailEnd type="none" w="med" len="med"/>
+                    </a:lnT>
+                    <a:lnB w="3175" cap="flat" cmpd="sng" algn="ctr">
+                      <a:solidFill>
+                        <a:schemeClr val="bg1">
+                          <a:lumMod val="50000"/>
+                        </a:schemeClr>
+                      </a:solidFill>
+                      <a:prstDash val="solid"/>
+                      <a:round/>
+                      <a:headEnd type="none" w="med" len="med"/>
+                      <a:tailEnd type="none" w="med" len="med"/>
+                    </a:lnB>
                     <a:noFill/>
                   </a:tcPr>
                 </a:tc>
@@ -11270,6 +14011,50 @@
                     </a:p>
                   </a:txBody>
                   <a:tcPr marL="36576" marR="36576" marT="9144" marB="9144" anchor="ctr">
+                    <a:lnL w="3175" cap="flat" cmpd="sng" algn="ctr">
+                      <a:solidFill>
+                        <a:schemeClr val="bg1">
+                          <a:lumMod val="50000"/>
+                        </a:schemeClr>
+                      </a:solidFill>
+                      <a:prstDash val="solid"/>
+                      <a:round/>
+                      <a:headEnd type="none" w="med" len="med"/>
+                      <a:tailEnd type="none" w="med" len="med"/>
+                    </a:lnL>
+                    <a:lnR w="3175" cap="flat" cmpd="sng" algn="ctr">
+                      <a:solidFill>
+                        <a:schemeClr val="bg1">
+                          <a:lumMod val="50000"/>
+                        </a:schemeClr>
+                      </a:solidFill>
+                      <a:prstDash val="solid"/>
+                      <a:round/>
+                      <a:headEnd type="none" w="med" len="med"/>
+                      <a:tailEnd type="none" w="med" len="med"/>
+                    </a:lnR>
+                    <a:lnT w="3175" cap="flat" cmpd="sng" algn="ctr">
+                      <a:solidFill>
+                        <a:schemeClr val="bg1">
+                          <a:lumMod val="50000"/>
+                        </a:schemeClr>
+                      </a:solidFill>
+                      <a:prstDash val="solid"/>
+                      <a:round/>
+                      <a:headEnd type="none" w="med" len="med"/>
+                      <a:tailEnd type="none" w="med" len="med"/>
+                    </a:lnT>
+                    <a:lnB w="3175" cap="flat" cmpd="sng" algn="ctr">
+                      <a:solidFill>
+                        <a:schemeClr val="bg1">
+                          <a:lumMod val="50000"/>
+                        </a:schemeClr>
+                      </a:solidFill>
+                      <a:prstDash val="solid"/>
+                      <a:round/>
+                      <a:headEnd type="none" w="med" len="med"/>
+                      <a:tailEnd type="none" w="med" len="med"/>
+                    </a:lnB>
                     <a:noFill/>
                   </a:tcPr>
                 </a:tc>
@@ -11303,6 +14088,50 @@
                     </a:p>
                   </a:txBody>
                   <a:tcPr marL="36576" marR="36576" marT="9144" marB="9144" anchor="ctr">
+                    <a:lnL w="3175" cap="flat" cmpd="sng" algn="ctr">
+                      <a:solidFill>
+                        <a:schemeClr val="bg1">
+                          <a:lumMod val="50000"/>
+                        </a:schemeClr>
+                      </a:solidFill>
+                      <a:prstDash val="solid"/>
+                      <a:round/>
+                      <a:headEnd type="none" w="med" len="med"/>
+                      <a:tailEnd type="none" w="med" len="med"/>
+                    </a:lnL>
+                    <a:lnR w="3175" cap="flat" cmpd="sng" algn="ctr">
+                      <a:solidFill>
+                        <a:schemeClr val="bg1">
+                          <a:lumMod val="50000"/>
+                        </a:schemeClr>
+                      </a:solidFill>
+                      <a:prstDash val="solid"/>
+                      <a:round/>
+                      <a:headEnd type="none" w="med" len="med"/>
+                      <a:tailEnd type="none" w="med" len="med"/>
+                    </a:lnR>
+                    <a:lnT w="3175" cap="flat" cmpd="sng" algn="ctr">
+                      <a:solidFill>
+                        <a:schemeClr val="bg1">
+                          <a:lumMod val="50000"/>
+                        </a:schemeClr>
+                      </a:solidFill>
+                      <a:prstDash val="solid"/>
+                      <a:round/>
+                      <a:headEnd type="none" w="med" len="med"/>
+                      <a:tailEnd type="none" w="med" len="med"/>
+                    </a:lnT>
+                    <a:lnB w="3175" cap="flat" cmpd="sng" algn="ctr">
+                      <a:solidFill>
+                        <a:schemeClr val="bg1">
+                          <a:lumMod val="50000"/>
+                        </a:schemeClr>
+                      </a:solidFill>
+                      <a:prstDash val="solid"/>
+                      <a:round/>
+                      <a:headEnd type="none" w="med" len="med"/>
+                      <a:tailEnd type="none" w="med" len="med"/>
+                    </a:lnB>
                     <a:noFill/>
                   </a:tcPr>
                 </a:tc>
@@ -11343,6 +14172,50 @@
                     </a:p>
                   </a:txBody>
                   <a:tcPr marL="36576" marR="36576" marT="9144" marB="9144" anchor="ctr">
+                    <a:lnL w="3175" cap="flat" cmpd="sng" algn="ctr">
+                      <a:solidFill>
+                        <a:schemeClr val="bg1">
+                          <a:lumMod val="50000"/>
+                        </a:schemeClr>
+                      </a:solidFill>
+                      <a:prstDash val="solid"/>
+                      <a:round/>
+                      <a:headEnd type="none" w="med" len="med"/>
+                      <a:tailEnd type="none" w="med" len="med"/>
+                    </a:lnL>
+                    <a:lnR w="3175" cap="flat" cmpd="sng" algn="ctr">
+                      <a:solidFill>
+                        <a:schemeClr val="bg1">
+                          <a:lumMod val="50000"/>
+                        </a:schemeClr>
+                      </a:solidFill>
+                      <a:prstDash val="solid"/>
+                      <a:round/>
+                      <a:headEnd type="none" w="med" len="med"/>
+                      <a:tailEnd type="none" w="med" len="med"/>
+                    </a:lnR>
+                    <a:lnT w="3175" cap="flat" cmpd="sng" algn="ctr">
+                      <a:solidFill>
+                        <a:schemeClr val="bg1">
+                          <a:lumMod val="50000"/>
+                        </a:schemeClr>
+                      </a:solidFill>
+                      <a:prstDash val="solid"/>
+                      <a:round/>
+                      <a:headEnd type="none" w="med" len="med"/>
+                      <a:tailEnd type="none" w="med" len="med"/>
+                    </a:lnT>
+                    <a:lnB w="3175" cap="flat" cmpd="sng" algn="ctr">
+                      <a:solidFill>
+                        <a:schemeClr val="bg1">
+                          <a:lumMod val="50000"/>
+                        </a:schemeClr>
+                      </a:solidFill>
+                      <a:prstDash val="solid"/>
+                      <a:round/>
+                      <a:headEnd type="none" w="med" len="med"/>
+                      <a:tailEnd type="none" w="med" len="med"/>
+                    </a:lnB>
                     <a:noFill/>
                   </a:tcPr>
                 </a:tc>
@@ -11376,6 +14249,50 @@
                     </a:p>
                   </a:txBody>
                   <a:tcPr marL="36576" marR="36576" marT="9144" marB="9144" anchor="ctr">
+                    <a:lnL w="3175" cap="flat" cmpd="sng" algn="ctr">
+                      <a:solidFill>
+                        <a:schemeClr val="bg1">
+                          <a:lumMod val="50000"/>
+                        </a:schemeClr>
+                      </a:solidFill>
+                      <a:prstDash val="solid"/>
+                      <a:round/>
+                      <a:headEnd type="none" w="med" len="med"/>
+                      <a:tailEnd type="none" w="med" len="med"/>
+                    </a:lnL>
+                    <a:lnR w="3175" cap="flat" cmpd="sng" algn="ctr">
+                      <a:solidFill>
+                        <a:schemeClr val="bg1">
+                          <a:lumMod val="50000"/>
+                        </a:schemeClr>
+                      </a:solidFill>
+                      <a:prstDash val="solid"/>
+                      <a:round/>
+                      <a:headEnd type="none" w="med" len="med"/>
+                      <a:tailEnd type="none" w="med" len="med"/>
+                    </a:lnR>
+                    <a:lnT w="3175" cap="flat" cmpd="sng" algn="ctr">
+                      <a:solidFill>
+                        <a:schemeClr val="bg1">
+                          <a:lumMod val="50000"/>
+                        </a:schemeClr>
+                      </a:solidFill>
+                      <a:prstDash val="solid"/>
+                      <a:round/>
+                      <a:headEnd type="none" w="med" len="med"/>
+                      <a:tailEnd type="none" w="med" len="med"/>
+                    </a:lnT>
+                    <a:lnB w="3175" cap="flat" cmpd="sng" algn="ctr">
+                      <a:solidFill>
+                        <a:schemeClr val="bg1">
+                          <a:lumMod val="50000"/>
+                        </a:schemeClr>
+                      </a:solidFill>
+                      <a:prstDash val="solid"/>
+                      <a:round/>
+                      <a:headEnd type="none" w="med" len="med"/>
+                      <a:tailEnd type="none" w="med" len="med"/>
+                    </a:lnB>
                     <a:noFill/>
                   </a:tcPr>
                 </a:tc>
@@ -11409,6 +14326,50 @@
                     </a:p>
                   </a:txBody>
                   <a:tcPr marL="36576" marR="36576" marT="9144" marB="9144" anchor="ctr">
+                    <a:lnL w="3175" cap="flat" cmpd="sng" algn="ctr">
+                      <a:solidFill>
+                        <a:schemeClr val="bg1">
+                          <a:lumMod val="50000"/>
+                        </a:schemeClr>
+                      </a:solidFill>
+                      <a:prstDash val="solid"/>
+                      <a:round/>
+                      <a:headEnd type="none" w="med" len="med"/>
+                      <a:tailEnd type="none" w="med" len="med"/>
+                    </a:lnL>
+                    <a:lnR w="3175" cap="flat" cmpd="sng" algn="ctr">
+                      <a:solidFill>
+                        <a:schemeClr val="bg1">
+                          <a:lumMod val="50000"/>
+                        </a:schemeClr>
+                      </a:solidFill>
+                      <a:prstDash val="solid"/>
+                      <a:round/>
+                      <a:headEnd type="none" w="med" len="med"/>
+                      <a:tailEnd type="none" w="med" len="med"/>
+                    </a:lnR>
+                    <a:lnT w="3175" cap="flat" cmpd="sng" algn="ctr">
+                      <a:solidFill>
+                        <a:schemeClr val="bg1">
+                          <a:lumMod val="50000"/>
+                        </a:schemeClr>
+                      </a:solidFill>
+                      <a:prstDash val="solid"/>
+                      <a:round/>
+                      <a:headEnd type="none" w="med" len="med"/>
+                      <a:tailEnd type="none" w="med" len="med"/>
+                    </a:lnT>
+                    <a:lnB w="3175" cap="flat" cmpd="sng" algn="ctr">
+                      <a:solidFill>
+                        <a:schemeClr val="bg1">
+                          <a:lumMod val="50000"/>
+                        </a:schemeClr>
+                      </a:solidFill>
+                      <a:prstDash val="solid"/>
+                      <a:round/>
+                      <a:headEnd type="none" w="med" len="med"/>
+                      <a:tailEnd type="none" w="med" len="med"/>
+                    </a:lnB>
                     <a:noFill/>
                   </a:tcPr>
                 </a:tc>
@@ -11442,6 +14403,50 @@
                     </a:p>
                   </a:txBody>
                   <a:tcPr marL="36576" marR="36576" marT="9144" marB="9144" anchor="ctr">
+                    <a:lnL w="3175" cap="flat" cmpd="sng" algn="ctr">
+                      <a:solidFill>
+                        <a:schemeClr val="bg1">
+                          <a:lumMod val="50000"/>
+                        </a:schemeClr>
+                      </a:solidFill>
+                      <a:prstDash val="solid"/>
+                      <a:round/>
+                      <a:headEnd type="none" w="med" len="med"/>
+                      <a:tailEnd type="none" w="med" len="med"/>
+                    </a:lnL>
+                    <a:lnR w="3175" cap="flat" cmpd="sng" algn="ctr">
+                      <a:solidFill>
+                        <a:schemeClr val="bg1">
+                          <a:lumMod val="50000"/>
+                        </a:schemeClr>
+                      </a:solidFill>
+                      <a:prstDash val="solid"/>
+                      <a:round/>
+                      <a:headEnd type="none" w="med" len="med"/>
+                      <a:tailEnd type="none" w="med" len="med"/>
+                    </a:lnR>
+                    <a:lnT w="3175" cap="flat" cmpd="sng" algn="ctr">
+                      <a:solidFill>
+                        <a:schemeClr val="bg1">
+                          <a:lumMod val="50000"/>
+                        </a:schemeClr>
+                      </a:solidFill>
+                      <a:prstDash val="solid"/>
+                      <a:round/>
+                      <a:headEnd type="none" w="med" len="med"/>
+                      <a:tailEnd type="none" w="med" len="med"/>
+                    </a:lnT>
+                    <a:lnB w="3175" cap="flat" cmpd="sng" algn="ctr">
+                      <a:solidFill>
+                        <a:schemeClr val="bg1">
+                          <a:lumMod val="50000"/>
+                        </a:schemeClr>
+                      </a:solidFill>
+                      <a:prstDash val="solid"/>
+                      <a:round/>
+                      <a:headEnd type="none" w="med" len="med"/>
+                      <a:tailEnd type="none" w="med" len="med"/>
+                    </a:lnB>
                     <a:noFill/>
                   </a:tcPr>
                 </a:tc>
@@ -11482,6 +14487,50 @@
                     </a:p>
                   </a:txBody>
                   <a:tcPr marL="36576" marR="36576" marT="9144" marB="9144" anchor="ctr">
+                    <a:lnL w="3175" cap="flat" cmpd="sng" algn="ctr">
+                      <a:solidFill>
+                        <a:schemeClr val="bg1">
+                          <a:lumMod val="50000"/>
+                        </a:schemeClr>
+                      </a:solidFill>
+                      <a:prstDash val="solid"/>
+                      <a:round/>
+                      <a:headEnd type="none" w="med" len="med"/>
+                      <a:tailEnd type="none" w="med" len="med"/>
+                    </a:lnL>
+                    <a:lnR w="3175" cap="flat" cmpd="sng" algn="ctr">
+                      <a:solidFill>
+                        <a:schemeClr val="bg1">
+                          <a:lumMod val="50000"/>
+                        </a:schemeClr>
+                      </a:solidFill>
+                      <a:prstDash val="solid"/>
+                      <a:round/>
+                      <a:headEnd type="none" w="med" len="med"/>
+                      <a:tailEnd type="none" w="med" len="med"/>
+                    </a:lnR>
+                    <a:lnT w="3175" cap="flat" cmpd="sng" algn="ctr">
+                      <a:solidFill>
+                        <a:schemeClr val="bg1">
+                          <a:lumMod val="50000"/>
+                        </a:schemeClr>
+                      </a:solidFill>
+                      <a:prstDash val="solid"/>
+                      <a:round/>
+                      <a:headEnd type="none" w="med" len="med"/>
+                      <a:tailEnd type="none" w="med" len="med"/>
+                    </a:lnT>
+                    <a:lnB w="3175" cap="flat" cmpd="sng" algn="ctr">
+                      <a:solidFill>
+                        <a:schemeClr val="bg1">
+                          <a:lumMod val="50000"/>
+                        </a:schemeClr>
+                      </a:solidFill>
+                      <a:prstDash val="solid"/>
+                      <a:round/>
+                      <a:headEnd type="none" w="med" len="med"/>
+                      <a:tailEnd type="none" w="med" len="med"/>
+                    </a:lnB>
                     <a:noFill/>
                   </a:tcPr>
                 </a:tc>
@@ -11515,6 +14564,50 @@
                     </a:p>
                   </a:txBody>
                   <a:tcPr marL="36576" marR="36576" marT="9144" marB="9144" anchor="ctr">
+                    <a:lnL w="3175" cap="flat" cmpd="sng" algn="ctr">
+                      <a:solidFill>
+                        <a:schemeClr val="bg1">
+                          <a:lumMod val="50000"/>
+                        </a:schemeClr>
+                      </a:solidFill>
+                      <a:prstDash val="solid"/>
+                      <a:round/>
+                      <a:headEnd type="none" w="med" len="med"/>
+                      <a:tailEnd type="none" w="med" len="med"/>
+                    </a:lnL>
+                    <a:lnR w="3175" cap="flat" cmpd="sng" algn="ctr">
+                      <a:solidFill>
+                        <a:schemeClr val="bg1">
+                          <a:lumMod val="50000"/>
+                        </a:schemeClr>
+                      </a:solidFill>
+                      <a:prstDash val="solid"/>
+                      <a:round/>
+                      <a:headEnd type="none" w="med" len="med"/>
+                      <a:tailEnd type="none" w="med" len="med"/>
+                    </a:lnR>
+                    <a:lnT w="3175" cap="flat" cmpd="sng" algn="ctr">
+                      <a:solidFill>
+                        <a:schemeClr val="bg1">
+                          <a:lumMod val="50000"/>
+                        </a:schemeClr>
+                      </a:solidFill>
+                      <a:prstDash val="solid"/>
+                      <a:round/>
+                      <a:headEnd type="none" w="med" len="med"/>
+                      <a:tailEnd type="none" w="med" len="med"/>
+                    </a:lnT>
+                    <a:lnB w="3175" cap="flat" cmpd="sng" algn="ctr">
+                      <a:solidFill>
+                        <a:schemeClr val="bg1">
+                          <a:lumMod val="50000"/>
+                        </a:schemeClr>
+                      </a:solidFill>
+                      <a:prstDash val="solid"/>
+                      <a:round/>
+                      <a:headEnd type="none" w="med" len="med"/>
+                      <a:tailEnd type="none" w="med" len="med"/>
+                    </a:lnB>
                     <a:noFill/>
                   </a:tcPr>
                 </a:tc>
@@ -11548,6 +14641,50 @@
                     </a:p>
                   </a:txBody>
                   <a:tcPr marL="36576" marR="36576" marT="9144" marB="9144" anchor="ctr">
+                    <a:lnL w="3175" cap="flat" cmpd="sng" algn="ctr">
+                      <a:solidFill>
+                        <a:schemeClr val="bg1">
+                          <a:lumMod val="50000"/>
+                        </a:schemeClr>
+                      </a:solidFill>
+                      <a:prstDash val="solid"/>
+                      <a:round/>
+                      <a:headEnd type="none" w="med" len="med"/>
+                      <a:tailEnd type="none" w="med" len="med"/>
+                    </a:lnL>
+                    <a:lnR w="3175" cap="flat" cmpd="sng" algn="ctr">
+                      <a:solidFill>
+                        <a:schemeClr val="bg1">
+                          <a:lumMod val="50000"/>
+                        </a:schemeClr>
+                      </a:solidFill>
+                      <a:prstDash val="solid"/>
+                      <a:round/>
+                      <a:headEnd type="none" w="med" len="med"/>
+                      <a:tailEnd type="none" w="med" len="med"/>
+                    </a:lnR>
+                    <a:lnT w="3175" cap="flat" cmpd="sng" algn="ctr">
+                      <a:solidFill>
+                        <a:schemeClr val="bg1">
+                          <a:lumMod val="50000"/>
+                        </a:schemeClr>
+                      </a:solidFill>
+                      <a:prstDash val="solid"/>
+                      <a:round/>
+                      <a:headEnd type="none" w="med" len="med"/>
+                      <a:tailEnd type="none" w="med" len="med"/>
+                    </a:lnT>
+                    <a:lnB w="3175" cap="flat" cmpd="sng" algn="ctr">
+                      <a:solidFill>
+                        <a:schemeClr val="bg1">
+                          <a:lumMod val="50000"/>
+                        </a:schemeClr>
+                      </a:solidFill>
+                      <a:prstDash val="solid"/>
+                      <a:round/>
+                      <a:headEnd type="none" w="med" len="med"/>
+                      <a:tailEnd type="none" w="med" len="med"/>
+                    </a:lnB>
                     <a:noFill/>
                   </a:tcPr>
                 </a:tc>
@@ -11568,7 +14705,7 @@
                         </a:spcAft>
                       </a:pPr>
                       <a:r>
-                        <a:rPr sz="874" b="1">
+                        <a:rPr sz="874" b="1" dirty="0" err="1">
                           <a:solidFill>
                             <a:srgbClr val="DC2626"/>
                           </a:solidFill>
@@ -11578,9 +14715,61 @@
                         </a:rPr>
                         <a:t>미구현</a:t>
                       </a:r>
+                      <a:endParaRPr sz="874" b="1" dirty="0">
+                        <a:solidFill>
+                          <a:srgbClr val="DC2626"/>
+                        </a:solidFill>
+                        <a:latin typeface="Malgun Gothic"/>
+                        <a:ea typeface="Malgun Gothic"/>
+                        <a:cs typeface="Malgun Gothic"/>
+                      </a:endParaRPr>
                     </a:p>
                   </a:txBody>
                   <a:tcPr marL="36576" marR="36576" marT="9144" marB="9144" anchor="ctr">
+                    <a:lnL w="3175" cap="flat" cmpd="sng" algn="ctr">
+                      <a:solidFill>
+                        <a:schemeClr val="bg1">
+                          <a:lumMod val="50000"/>
+                        </a:schemeClr>
+                      </a:solidFill>
+                      <a:prstDash val="solid"/>
+                      <a:round/>
+                      <a:headEnd type="none" w="med" len="med"/>
+                      <a:tailEnd type="none" w="med" len="med"/>
+                    </a:lnL>
+                    <a:lnR w="3175" cap="flat" cmpd="sng" algn="ctr">
+                      <a:solidFill>
+                        <a:schemeClr val="bg1">
+                          <a:lumMod val="50000"/>
+                        </a:schemeClr>
+                      </a:solidFill>
+                      <a:prstDash val="solid"/>
+                      <a:round/>
+                      <a:headEnd type="none" w="med" len="med"/>
+                      <a:tailEnd type="none" w="med" len="med"/>
+                    </a:lnR>
+                    <a:lnT w="3175" cap="flat" cmpd="sng" algn="ctr">
+                      <a:solidFill>
+                        <a:schemeClr val="bg1">
+                          <a:lumMod val="50000"/>
+                        </a:schemeClr>
+                      </a:solidFill>
+                      <a:prstDash val="solid"/>
+                      <a:round/>
+                      <a:headEnd type="none" w="med" len="med"/>
+                      <a:tailEnd type="none" w="med" len="med"/>
+                    </a:lnT>
+                    <a:lnB w="3175" cap="flat" cmpd="sng" algn="ctr">
+                      <a:solidFill>
+                        <a:schemeClr val="bg1">
+                          <a:lumMod val="50000"/>
+                        </a:schemeClr>
+                      </a:solidFill>
+                      <a:prstDash val="solid"/>
+                      <a:round/>
+                      <a:headEnd type="none" w="med" len="med"/>
+                      <a:tailEnd type="none" w="med" len="med"/>
+                    </a:lnB>
                     <a:noFill/>
                   </a:tcPr>
                 </a:tc>
@@ -11621,49 +14810,6 @@
       </p:grpSpPr>
       <p:sp>
         <p:nvSpPr>
-          <p:cNvPr id="2" name="Rectangle 1"/>
-          <p:cNvSpPr/>
-          <p:nvPr/>
-        </p:nvSpPr>
-        <p:spPr>
-          <a:xfrm>
-            <a:off x="0" y="0"/>
-            <a:ext cx="12191952" cy="896683"/>
-          </a:xfrm>
-          <a:prstGeom prst="rect">
-            <a:avLst/>
-          </a:prstGeom>
-          <a:noFill/>
-          <a:ln>
-            <a:noFill/>
-          </a:ln>
-          <a:effectLst/>
-        </p:spPr>
-        <p:style>
-          <a:lnRef idx="1">
-            <a:schemeClr val="accent1"/>
-          </a:lnRef>
-          <a:fillRef idx="3">
-            <a:schemeClr val="accent1"/>
-          </a:fillRef>
-          <a:effectRef idx="2">
-            <a:schemeClr val="accent1"/>
-          </a:effectRef>
-          <a:fontRef idx="minor">
-            <a:schemeClr val="lt1"/>
-          </a:fontRef>
-        </p:style>
-        <p:txBody>
-          <a:bodyPr rtlCol="0" anchor="ctr"/>
-          <a:lstStyle/>
-          <a:p>
-            <a:pPr algn="ctr"/>
-            <a:endParaRPr/>
-          </a:p>
-        </p:txBody>
-      </p:sp>
-      <p:sp>
-        <p:nvSpPr>
           <p:cNvPr id="3" name="Rectangle 2"/>
           <p:cNvSpPr/>
           <p:nvPr/>
@@ -11845,7 +14991,7 @@
           </a:bodyPr>
           <a:lstStyle/>
           <a:p>
-            <a:pPr algn="r">
+            <a:pPr algn="ctr">
               <a:lnSpc>
                 <a:spcPts val="939"/>
               </a:lnSpc>
@@ -15041,49 +18187,6 @@
       </p:grpSpPr>
       <p:sp>
         <p:nvSpPr>
-          <p:cNvPr id="2" name="Rectangle 1"/>
-          <p:cNvSpPr/>
-          <p:nvPr/>
-        </p:nvSpPr>
-        <p:spPr>
-          <a:xfrm>
-            <a:off x="0" y="0"/>
-            <a:ext cx="12191952" cy="896683"/>
-          </a:xfrm>
-          <a:prstGeom prst="rect">
-            <a:avLst/>
-          </a:prstGeom>
-          <a:noFill/>
-          <a:ln>
-            <a:noFill/>
-          </a:ln>
-          <a:effectLst/>
-        </p:spPr>
-        <p:style>
-          <a:lnRef idx="1">
-            <a:schemeClr val="accent1"/>
-          </a:lnRef>
-          <a:fillRef idx="3">
-            <a:schemeClr val="accent1"/>
-          </a:fillRef>
-          <a:effectRef idx="2">
-            <a:schemeClr val="accent1"/>
-          </a:effectRef>
-          <a:fontRef idx="minor">
-            <a:schemeClr val="lt1"/>
-          </a:fontRef>
-        </p:style>
-        <p:txBody>
-          <a:bodyPr rtlCol="0" anchor="ctr"/>
-          <a:lstStyle/>
-          <a:p>
-            <a:pPr algn="ctr"/>
-            <a:endParaRPr/>
-          </a:p>
-        </p:txBody>
-      </p:sp>
-      <p:sp>
-        <p:nvSpPr>
           <p:cNvPr id="3" name="Rectangle 2"/>
           <p:cNvSpPr/>
           <p:nvPr/>
@@ -15265,7 +18368,7 @@
           </a:bodyPr>
           <a:lstStyle/>
           <a:p>
-            <a:pPr algn="r">
+            <a:pPr algn="ctr">
               <a:lnSpc>
                 <a:spcPts val="939"/>
               </a:lnSpc>
@@ -15760,7 +18863,7 @@
           </a:bodyPr>
           <a:lstStyle/>
           <a:p>
-            <a:pPr algn="l">
+            <a:pPr algn="ctr">
               <a:lnSpc>
                 <a:spcPts val="842"/>
               </a:lnSpc>
@@ -15972,7 +19075,7 @@
           </a:bodyPr>
           <a:lstStyle/>
           <a:p>
-            <a:pPr algn="l">
+            <a:pPr algn="ctr">
               <a:lnSpc>
                 <a:spcPts val="842"/>
               </a:lnSpc>
@@ -16184,7 +19287,7 @@
           </a:bodyPr>
           <a:lstStyle/>
           <a:p>
-            <a:pPr algn="l">
+            <a:pPr algn="ctr">
               <a:lnSpc>
                 <a:spcPts val="842"/>
               </a:lnSpc>
@@ -17377,49 +20480,6 @@
       </p:grpSpPr>
       <p:sp>
         <p:nvSpPr>
-          <p:cNvPr id="2" name="Rectangle 1"/>
-          <p:cNvSpPr/>
-          <p:nvPr/>
-        </p:nvSpPr>
-        <p:spPr>
-          <a:xfrm>
-            <a:off x="0" y="0"/>
-            <a:ext cx="12191952" cy="896683"/>
-          </a:xfrm>
-          <a:prstGeom prst="rect">
-            <a:avLst/>
-          </a:prstGeom>
-          <a:noFill/>
-          <a:ln>
-            <a:noFill/>
-          </a:ln>
-          <a:effectLst/>
-        </p:spPr>
-        <p:style>
-          <a:lnRef idx="1">
-            <a:schemeClr val="accent1"/>
-          </a:lnRef>
-          <a:fillRef idx="3">
-            <a:schemeClr val="accent1"/>
-          </a:fillRef>
-          <a:effectRef idx="2">
-            <a:schemeClr val="accent1"/>
-          </a:effectRef>
-          <a:fontRef idx="minor">
-            <a:schemeClr val="lt1"/>
-          </a:fontRef>
-        </p:style>
-        <p:txBody>
-          <a:bodyPr rtlCol="0" anchor="ctr"/>
-          <a:lstStyle/>
-          <a:p>
-            <a:pPr algn="ctr"/>
-            <a:endParaRPr/>
-          </a:p>
-        </p:txBody>
-      </p:sp>
-      <p:sp>
-        <p:nvSpPr>
           <p:cNvPr id="3" name="Rectangle 2"/>
           <p:cNvSpPr/>
           <p:nvPr/>
@@ -17601,7 +20661,7 @@
           </a:bodyPr>
           <a:lstStyle/>
           <a:p>
-            <a:pPr algn="r">
+            <a:pPr algn="ctr">
               <a:lnSpc>
                 <a:spcPts val="939"/>
               </a:lnSpc>
@@ -19083,49 +22143,6 @@
       </p:grpSpPr>
       <p:sp>
         <p:nvSpPr>
-          <p:cNvPr id="2" name="Rectangle 1"/>
-          <p:cNvSpPr/>
-          <p:nvPr/>
-        </p:nvSpPr>
-        <p:spPr>
-          <a:xfrm>
-            <a:off x="0" y="0"/>
-            <a:ext cx="12191952" cy="903970"/>
-          </a:xfrm>
-          <a:prstGeom prst="rect">
-            <a:avLst/>
-          </a:prstGeom>
-          <a:noFill/>
-          <a:ln>
-            <a:noFill/>
-          </a:ln>
-          <a:effectLst/>
-        </p:spPr>
-        <p:style>
-          <a:lnRef idx="1">
-            <a:schemeClr val="accent1"/>
-          </a:lnRef>
-          <a:fillRef idx="3">
-            <a:schemeClr val="accent1"/>
-          </a:fillRef>
-          <a:effectRef idx="2">
-            <a:schemeClr val="accent1"/>
-          </a:effectRef>
-          <a:fontRef idx="minor">
-            <a:schemeClr val="lt1"/>
-          </a:fontRef>
-        </p:style>
-        <p:txBody>
-          <a:bodyPr rtlCol="0" anchor="ctr"/>
-          <a:lstStyle/>
-          <a:p>
-            <a:pPr algn="ctr"/>
-            <a:endParaRPr/>
-          </a:p>
-        </p:txBody>
-      </p:sp>
-      <p:sp>
-        <p:nvSpPr>
           <p:cNvPr id="3" name="Rectangle 2"/>
           <p:cNvSpPr/>
           <p:nvPr/>
@@ -19307,7 +22324,7 @@
           </a:bodyPr>
           <a:lstStyle/>
           <a:p>
-            <a:pPr algn="r">
+            <a:pPr algn="ctr">
               <a:lnSpc>
                 <a:spcPts val="939"/>
               </a:lnSpc>
@@ -21472,49 +24489,6 @@
       </p:grpSpPr>
       <p:sp>
         <p:nvSpPr>
-          <p:cNvPr id="2" name="Rectangle 1"/>
-          <p:cNvSpPr/>
-          <p:nvPr/>
-        </p:nvSpPr>
-        <p:spPr>
-          <a:xfrm>
-            <a:off x="0" y="0"/>
-            <a:ext cx="12191952" cy="903970"/>
-          </a:xfrm>
-          <a:prstGeom prst="rect">
-            <a:avLst/>
-          </a:prstGeom>
-          <a:noFill/>
-          <a:ln>
-            <a:noFill/>
-          </a:ln>
-          <a:effectLst/>
-        </p:spPr>
-        <p:style>
-          <a:lnRef idx="1">
-            <a:schemeClr val="accent1"/>
-          </a:lnRef>
-          <a:fillRef idx="3">
-            <a:schemeClr val="accent1"/>
-          </a:fillRef>
-          <a:effectRef idx="2">
-            <a:schemeClr val="accent1"/>
-          </a:effectRef>
-          <a:fontRef idx="minor">
-            <a:schemeClr val="lt1"/>
-          </a:fontRef>
-        </p:style>
-        <p:txBody>
-          <a:bodyPr rtlCol="0" anchor="ctr"/>
-          <a:lstStyle/>
-          <a:p>
-            <a:pPr algn="ctr"/>
-            <a:endParaRPr/>
-          </a:p>
-        </p:txBody>
-      </p:sp>
-      <p:sp>
-        <p:nvSpPr>
           <p:cNvPr id="3" name="Rectangle 2"/>
           <p:cNvSpPr/>
           <p:nvPr/>
@@ -21696,7 +24670,7 @@
           </a:bodyPr>
           <a:lstStyle/>
           <a:p>
-            <a:pPr algn="r">
+            <a:pPr algn="ctr">
               <a:lnSpc>
                 <a:spcPts val="939"/>
               </a:lnSpc>
@@ -22076,7 +25050,7 @@
           </a:bodyPr>
           <a:lstStyle/>
           <a:p>
-            <a:pPr algn="l">
+            <a:pPr algn="ctr">
               <a:lnSpc>
                 <a:spcPts val="745"/>
               </a:lnSpc>
@@ -22250,7 +25224,7 @@
           </a:bodyPr>
           <a:lstStyle/>
           <a:p>
-            <a:pPr algn="l">
+            <a:pPr algn="ctr">
               <a:lnSpc>
                 <a:spcPts val="745"/>
               </a:lnSpc>
@@ -22460,7 +25434,7 @@
           </a:bodyPr>
           <a:lstStyle/>
           <a:p>
-            <a:pPr algn="l">
+            <a:pPr algn="ctr">
               <a:lnSpc>
                 <a:spcPts val="745"/>
               </a:lnSpc>
@@ -22623,7 +25597,7 @@
           </a:bodyPr>
           <a:lstStyle/>
           <a:p>
-            <a:pPr algn="l">
+            <a:pPr algn="ctr">
               <a:lnSpc>
                 <a:spcPts val="745"/>
               </a:lnSpc>
@@ -23027,7 +26001,7 @@
           </a:bodyPr>
           <a:lstStyle/>
           <a:p>
-            <a:pPr algn="l">
+            <a:pPr algn="ctr">
               <a:lnSpc>
                 <a:spcPts val="745"/>
               </a:lnSpc>
@@ -23190,7 +26164,7 @@
           </a:bodyPr>
           <a:lstStyle/>
           <a:p>
-            <a:pPr algn="l">
+            <a:pPr algn="ctr">
               <a:lnSpc>
                 <a:spcPts val="745"/>
               </a:lnSpc>
@@ -23364,7 +26338,7 @@
           </a:bodyPr>
           <a:lstStyle/>
           <a:p>
-            <a:pPr algn="l">
+            <a:pPr algn="ctr">
               <a:lnSpc>
                 <a:spcPts val="745"/>
               </a:lnSpc>
@@ -24962,49 +27936,6 @@
       </p:grpSpPr>
       <p:sp>
         <p:nvSpPr>
-          <p:cNvPr id="2" name="Rectangle 1"/>
-          <p:cNvSpPr/>
-          <p:nvPr/>
-        </p:nvSpPr>
-        <p:spPr>
-          <a:xfrm>
-            <a:off x="0" y="0"/>
-            <a:ext cx="12191952" cy="896683"/>
-          </a:xfrm>
-          <a:prstGeom prst="rect">
-            <a:avLst/>
-          </a:prstGeom>
-          <a:noFill/>
-          <a:ln>
-            <a:noFill/>
-          </a:ln>
-          <a:effectLst/>
-        </p:spPr>
-        <p:style>
-          <a:lnRef idx="1">
-            <a:schemeClr val="accent1"/>
-          </a:lnRef>
-          <a:fillRef idx="3">
-            <a:schemeClr val="accent1"/>
-          </a:fillRef>
-          <a:effectRef idx="2">
-            <a:schemeClr val="accent1"/>
-          </a:effectRef>
-          <a:fontRef idx="minor">
-            <a:schemeClr val="lt1"/>
-          </a:fontRef>
-        </p:style>
-        <p:txBody>
-          <a:bodyPr rtlCol="0" anchor="ctr"/>
-          <a:lstStyle/>
-          <a:p>
-            <a:pPr algn="ctr"/>
-            <a:endParaRPr/>
-          </a:p>
-        </p:txBody>
-      </p:sp>
-      <p:sp>
-        <p:nvSpPr>
           <p:cNvPr id="3" name="Rectangle 2"/>
           <p:cNvSpPr/>
           <p:nvPr/>
@@ -25186,7 +28117,7 @@
           </a:bodyPr>
           <a:lstStyle/>
           <a:p>
-            <a:pPr algn="r">
+            <a:pPr algn="ctr">
               <a:lnSpc>
                 <a:spcPts val="939"/>
               </a:lnSpc>
@@ -25360,7 +28291,7 @@
           </a:bodyPr>
           <a:lstStyle/>
           <a:p>
-            <a:pPr algn="l">
+            <a:pPr algn="ctr">
               <a:lnSpc>
                 <a:spcPts val="907"/>
               </a:lnSpc>
@@ -25429,7 +28360,7 @@
           </a:bodyPr>
           <a:lstStyle/>
           <a:p>
-            <a:pPr algn="l">
+            <a:pPr algn="ctr">
               <a:lnSpc>
                 <a:spcPts val="907"/>
               </a:lnSpc>
@@ -28898,49 +31829,6 @@
       </p:grpSpPr>
       <p:sp>
         <p:nvSpPr>
-          <p:cNvPr id="2" name="Rectangle 1"/>
-          <p:cNvSpPr/>
-          <p:nvPr/>
-        </p:nvSpPr>
-        <p:spPr>
-          <a:xfrm>
-            <a:off x="0" y="0"/>
-            <a:ext cx="12191952" cy="896683"/>
-          </a:xfrm>
-          <a:prstGeom prst="rect">
-            <a:avLst/>
-          </a:prstGeom>
-          <a:noFill/>
-          <a:ln>
-            <a:noFill/>
-          </a:ln>
-          <a:effectLst/>
-        </p:spPr>
-        <p:style>
-          <a:lnRef idx="1">
-            <a:schemeClr val="accent1"/>
-          </a:lnRef>
-          <a:fillRef idx="3">
-            <a:schemeClr val="accent1"/>
-          </a:fillRef>
-          <a:effectRef idx="2">
-            <a:schemeClr val="accent1"/>
-          </a:effectRef>
-          <a:fontRef idx="minor">
-            <a:schemeClr val="lt1"/>
-          </a:fontRef>
-        </p:style>
-        <p:txBody>
-          <a:bodyPr rtlCol="0" anchor="ctr"/>
-          <a:lstStyle/>
-          <a:p>
-            <a:pPr algn="ctr"/>
-            <a:endParaRPr/>
-          </a:p>
-        </p:txBody>
-      </p:sp>
-      <p:sp>
-        <p:nvSpPr>
           <p:cNvPr id="3" name="Rectangle 2"/>
           <p:cNvSpPr/>
           <p:nvPr/>
@@ -29122,7 +32010,7 @@
           </a:bodyPr>
           <a:lstStyle/>
           <a:p>
-            <a:pPr algn="r">
+            <a:pPr algn="ctr">
               <a:lnSpc>
                 <a:spcPts val="939"/>
               </a:lnSpc>
@@ -29296,7 +32184,7 @@
           </a:bodyPr>
           <a:lstStyle/>
           <a:p>
-            <a:pPr algn="l">
+            <a:pPr algn="ctr">
               <a:lnSpc>
                 <a:spcPts val="907"/>
               </a:lnSpc>
@@ -29365,7 +32253,7 @@
           </a:bodyPr>
           <a:lstStyle/>
           <a:p>
-            <a:pPr algn="l">
+            <a:pPr algn="ctr">
               <a:lnSpc>
                 <a:spcPts val="907"/>
               </a:lnSpc>
@@ -29686,7 +32574,7 @@
           </a:bodyPr>
           <a:lstStyle/>
           <a:p>
-            <a:pPr algn="l">
+            <a:pPr algn="ctr">
               <a:lnSpc>
                 <a:spcPts val="745"/>
               </a:lnSpc>
@@ -29860,7 +32748,7 @@
           </a:bodyPr>
           <a:lstStyle/>
           <a:p>
-            <a:pPr algn="l">
+            <a:pPr algn="ctr">
               <a:lnSpc>
                 <a:spcPts val="745"/>
               </a:lnSpc>
@@ -30092,7 +32980,7 @@
           </a:bodyPr>
           <a:lstStyle/>
           <a:p>
-            <a:pPr algn="l">
+            <a:pPr algn="ctr">
               <a:lnSpc>
                 <a:spcPts val="745"/>
               </a:lnSpc>
@@ -30324,7 +33212,7 @@
           </a:bodyPr>
           <a:lstStyle/>
           <a:p>
-            <a:pPr algn="l">
+            <a:pPr algn="ctr">
               <a:lnSpc>
                 <a:spcPts val="745"/>
               </a:lnSpc>
@@ -30578,7 +33466,7 @@
           </a:bodyPr>
           <a:lstStyle/>
           <a:p>
-            <a:pPr algn="l">
+            <a:pPr algn="ctr">
               <a:lnSpc>
                 <a:spcPts val="745"/>
               </a:lnSpc>
@@ -31508,49 +34396,6 @@
       </p:grpSpPr>
       <p:sp>
         <p:nvSpPr>
-          <p:cNvPr id="2" name="Rectangle 1"/>
-          <p:cNvSpPr/>
-          <p:nvPr/>
-        </p:nvSpPr>
-        <p:spPr>
-          <a:xfrm>
-            <a:off x="0" y="0"/>
-            <a:ext cx="12191952" cy="896683"/>
-          </a:xfrm>
-          <a:prstGeom prst="rect">
-            <a:avLst/>
-          </a:prstGeom>
-          <a:noFill/>
-          <a:ln>
-            <a:noFill/>
-          </a:ln>
-          <a:effectLst/>
-        </p:spPr>
-        <p:style>
-          <a:lnRef idx="1">
-            <a:schemeClr val="accent1"/>
-          </a:lnRef>
-          <a:fillRef idx="3">
-            <a:schemeClr val="accent1"/>
-          </a:fillRef>
-          <a:effectRef idx="2">
-            <a:schemeClr val="accent1"/>
-          </a:effectRef>
-          <a:fontRef idx="minor">
-            <a:schemeClr val="lt1"/>
-          </a:fontRef>
-        </p:style>
-        <p:txBody>
-          <a:bodyPr rtlCol="0" anchor="ctr"/>
-          <a:lstStyle/>
-          <a:p>
-            <a:pPr algn="ctr"/>
-            <a:endParaRPr/>
-          </a:p>
-        </p:txBody>
-      </p:sp>
-      <p:sp>
-        <p:nvSpPr>
           <p:cNvPr id="3" name="Rectangle 2"/>
           <p:cNvSpPr/>
           <p:nvPr/>
@@ -31732,7 +34577,7 @@
           </a:bodyPr>
           <a:lstStyle/>
           <a:p>
-            <a:pPr algn="r">
+            <a:pPr algn="ctr">
               <a:lnSpc>
                 <a:spcPts val="939"/>
               </a:lnSpc>
@@ -32959,49 +35804,6 @@
       </p:grpSpPr>
       <p:sp>
         <p:nvSpPr>
-          <p:cNvPr id="2" name="Rectangle 1"/>
-          <p:cNvSpPr/>
-          <p:nvPr/>
-        </p:nvSpPr>
-        <p:spPr>
-          <a:xfrm>
-            <a:off x="0" y="0"/>
-            <a:ext cx="12191952" cy="896683"/>
-          </a:xfrm>
-          <a:prstGeom prst="rect">
-            <a:avLst/>
-          </a:prstGeom>
-          <a:noFill/>
-          <a:ln>
-            <a:noFill/>
-          </a:ln>
-          <a:effectLst/>
-        </p:spPr>
-        <p:style>
-          <a:lnRef idx="1">
-            <a:schemeClr val="accent1"/>
-          </a:lnRef>
-          <a:fillRef idx="3">
-            <a:schemeClr val="accent1"/>
-          </a:fillRef>
-          <a:effectRef idx="2">
-            <a:schemeClr val="accent1"/>
-          </a:effectRef>
-          <a:fontRef idx="minor">
-            <a:schemeClr val="lt1"/>
-          </a:fontRef>
-        </p:style>
-        <p:txBody>
-          <a:bodyPr rtlCol="0" anchor="ctr"/>
-          <a:lstStyle/>
-          <a:p>
-            <a:pPr algn="ctr"/>
-            <a:endParaRPr/>
-          </a:p>
-        </p:txBody>
-      </p:sp>
-      <p:sp>
-        <p:nvSpPr>
           <p:cNvPr id="3" name="Rectangle 2"/>
           <p:cNvSpPr/>
           <p:nvPr/>
@@ -33183,7 +35985,7 @@
           </a:bodyPr>
           <a:lstStyle/>
           <a:p>
-            <a:pPr algn="r">
+            <a:pPr algn="ctr">
               <a:lnSpc>
                 <a:spcPts val="939"/>
               </a:lnSpc>
@@ -33357,7 +36159,7 @@
           </a:bodyPr>
           <a:lstStyle/>
           <a:p>
-            <a:pPr algn="l">
+            <a:pPr algn="ctr">
               <a:lnSpc>
                 <a:spcPts val="907"/>
               </a:lnSpc>
@@ -33426,7 +36228,7 @@
           </a:bodyPr>
           <a:lstStyle/>
           <a:p>
-            <a:pPr algn="l">
+            <a:pPr algn="ctr">
               <a:lnSpc>
                 <a:spcPts val="907"/>
               </a:lnSpc>
@@ -33495,7 +36297,7 @@
           </a:bodyPr>
           <a:lstStyle/>
           <a:p>
-            <a:pPr algn="l">
+            <a:pPr algn="ctr">
               <a:lnSpc>
                 <a:spcPts val="907"/>
               </a:lnSpc>
@@ -33838,7 +36640,7 @@
           </a:bodyPr>
           <a:lstStyle/>
           <a:p>
-            <a:pPr algn="l">
+            <a:pPr algn="ctr">
               <a:lnSpc>
                 <a:spcPts val="745"/>
               </a:lnSpc>
@@ -34045,7 +36847,7 @@
           </a:bodyPr>
           <a:lstStyle/>
           <a:p>
-            <a:pPr algn="l">
+            <a:pPr algn="ctr">
               <a:lnSpc>
                 <a:spcPts val="745"/>
               </a:lnSpc>
@@ -34277,7 +37079,7 @@
           </a:bodyPr>
           <a:lstStyle/>
           <a:p>
-            <a:pPr algn="l">
+            <a:pPr algn="ctr">
               <a:lnSpc>
                 <a:spcPts val="745"/>
               </a:lnSpc>
@@ -34520,7 +37322,7 @@
           </a:bodyPr>
           <a:lstStyle/>
           <a:p>
-            <a:pPr algn="l">
+            <a:pPr algn="ctr">
               <a:lnSpc>
                 <a:spcPts val="745"/>
               </a:lnSpc>
@@ -34752,7 +37554,7 @@
           </a:bodyPr>
           <a:lstStyle/>
           <a:p>
-            <a:pPr algn="l">
+            <a:pPr algn="ctr">
               <a:lnSpc>
                 <a:spcPts val="745"/>
               </a:lnSpc>
@@ -35660,49 +38462,6 @@
       </p:grpSpPr>
       <p:sp>
         <p:nvSpPr>
-          <p:cNvPr id="2" name="Rectangle 1"/>
-          <p:cNvSpPr/>
-          <p:nvPr/>
-        </p:nvSpPr>
-        <p:spPr>
-          <a:xfrm>
-            <a:off x="0" y="0"/>
-            <a:ext cx="12191952" cy="896683"/>
-          </a:xfrm>
-          <a:prstGeom prst="rect">
-            <a:avLst/>
-          </a:prstGeom>
-          <a:noFill/>
-          <a:ln>
-            <a:noFill/>
-          </a:ln>
-          <a:effectLst/>
-        </p:spPr>
-        <p:style>
-          <a:lnRef idx="1">
-            <a:schemeClr val="accent1"/>
-          </a:lnRef>
-          <a:fillRef idx="3">
-            <a:schemeClr val="accent1"/>
-          </a:fillRef>
-          <a:effectRef idx="2">
-            <a:schemeClr val="accent1"/>
-          </a:effectRef>
-          <a:fontRef idx="minor">
-            <a:schemeClr val="lt1"/>
-          </a:fontRef>
-        </p:style>
-        <p:txBody>
-          <a:bodyPr rtlCol="0" anchor="ctr"/>
-          <a:lstStyle/>
-          <a:p>
-            <a:pPr algn="ctr"/>
-            <a:endParaRPr/>
-          </a:p>
-        </p:txBody>
-      </p:sp>
-      <p:sp>
-        <p:nvSpPr>
           <p:cNvPr id="3" name="Rectangle 2"/>
           <p:cNvSpPr/>
           <p:nvPr/>
@@ -35884,7 +38643,7 @@
           </a:bodyPr>
           <a:lstStyle/>
           <a:p>
-            <a:pPr algn="r">
+            <a:pPr algn="ctr">
               <a:lnSpc>
                 <a:spcPts val="939"/>
               </a:lnSpc>
@@ -36058,7 +38817,7 @@
           </a:bodyPr>
           <a:lstStyle/>
           <a:p>
-            <a:pPr algn="l">
+            <a:pPr algn="ctr">
               <a:lnSpc>
                 <a:spcPts val="907"/>
               </a:lnSpc>
@@ -36127,7 +38886,7 @@
           </a:bodyPr>
           <a:lstStyle/>
           <a:p>
-            <a:pPr algn="l">
+            <a:pPr algn="ctr">
               <a:lnSpc>
                 <a:spcPts val="907"/>
               </a:lnSpc>
@@ -36196,7 +38955,7 @@
           </a:bodyPr>
           <a:lstStyle/>
           <a:p>
-            <a:pPr algn="l">
+            <a:pPr algn="ctr">
               <a:lnSpc>
                 <a:spcPts val="907"/>
               </a:lnSpc>
@@ -36561,7 +39320,7 @@
           </a:bodyPr>
           <a:lstStyle/>
           <a:p>
-            <a:pPr algn="l">
+            <a:pPr algn="ctr">
               <a:lnSpc>
                 <a:spcPts val="745"/>
               </a:lnSpc>
@@ -36768,7 +39527,7 @@
           </a:bodyPr>
           <a:lstStyle/>
           <a:p>
-            <a:pPr algn="l">
+            <a:pPr algn="ctr">
               <a:lnSpc>
                 <a:spcPts val="745"/>
               </a:lnSpc>
@@ -36953,7 +39712,7 @@
           </a:bodyPr>
           <a:lstStyle/>
           <a:p>
-            <a:pPr algn="l">
+            <a:pPr algn="ctr">
               <a:lnSpc>
                 <a:spcPts val="745"/>
               </a:lnSpc>
@@ -37138,7 +39897,7 @@
           </a:bodyPr>
           <a:lstStyle/>
           <a:p>
-            <a:pPr algn="l">
+            <a:pPr algn="ctr">
               <a:lnSpc>
                 <a:spcPts val="745"/>
               </a:lnSpc>
@@ -37359,7 +40118,7 @@
           </a:bodyPr>
           <a:lstStyle/>
           <a:p>
-            <a:pPr algn="l">
+            <a:pPr algn="ctr">
               <a:lnSpc>
                 <a:spcPts val="745"/>
               </a:lnSpc>
@@ -38187,49 +40946,6 @@
       </p:grpSpPr>
       <p:sp>
         <p:nvSpPr>
-          <p:cNvPr id="2" name="Rectangle 1"/>
-          <p:cNvSpPr/>
-          <p:nvPr/>
-        </p:nvSpPr>
-        <p:spPr>
-          <a:xfrm>
-            <a:off x="0" y="0"/>
-            <a:ext cx="12191952" cy="896683"/>
-          </a:xfrm>
-          <a:prstGeom prst="rect">
-            <a:avLst/>
-          </a:prstGeom>
-          <a:noFill/>
-          <a:ln>
-            <a:noFill/>
-          </a:ln>
-          <a:effectLst/>
-        </p:spPr>
-        <p:style>
-          <a:lnRef idx="1">
-            <a:schemeClr val="accent1"/>
-          </a:lnRef>
-          <a:fillRef idx="3">
-            <a:schemeClr val="accent1"/>
-          </a:fillRef>
-          <a:effectRef idx="2">
-            <a:schemeClr val="accent1"/>
-          </a:effectRef>
-          <a:fontRef idx="minor">
-            <a:schemeClr val="lt1"/>
-          </a:fontRef>
-        </p:style>
-        <p:txBody>
-          <a:bodyPr rtlCol="0" anchor="ctr"/>
-          <a:lstStyle/>
-          <a:p>
-            <a:pPr algn="ctr"/>
-            <a:endParaRPr/>
-          </a:p>
-        </p:txBody>
-      </p:sp>
-      <p:sp>
-        <p:nvSpPr>
           <p:cNvPr id="3" name="Rectangle 2"/>
           <p:cNvSpPr/>
           <p:nvPr/>
@@ -38411,7 +41127,7 @@
           </a:bodyPr>
           <a:lstStyle/>
           <a:p>
-            <a:pPr algn="r">
+            <a:pPr algn="ctr">
               <a:lnSpc>
                 <a:spcPts val="939"/>
               </a:lnSpc>
@@ -38585,7 +41301,7 @@
           </a:bodyPr>
           <a:lstStyle/>
           <a:p>
-            <a:pPr algn="l">
+            <a:pPr algn="ctr">
               <a:lnSpc>
                 <a:spcPts val="907"/>
               </a:lnSpc>
@@ -38654,7 +41370,7 @@
           </a:bodyPr>
           <a:lstStyle/>
           <a:p>
-            <a:pPr algn="l">
+            <a:pPr algn="ctr">
               <a:lnSpc>
                 <a:spcPts val="907"/>
               </a:lnSpc>
@@ -38723,7 +41439,7 @@
           </a:bodyPr>
           <a:lstStyle/>
           <a:p>
-            <a:pPr algn="l">
+            <a:pPr algn="ctr">
               <a:lnSpc>
                 <a:spcPts val="907"/>
               </a:lnSpc>
@@ -38792,7 +41508,7 @@
           </a:bodyPr>
           <a:lstStyle/>
           <a:p>
-            <a:pPr algn="l">
+            <a:pPr algn="ctr">
               <a:lnSpc>
                 <a:spcPts val="907"/>
               </a:lnSpc>
@@ -39113,7 +41829,7 @@
           </a:bodyPr>
           <a:lstStyle/>
           <a:p>
-            <a:pPr algn="l">
+            <a:pPr algn="ctr">
               <a:lnSpc>
                 <a:spcPts val="745"/>
               </a:lnSpc>
@@ -39345,7 +42061,7 @@
           </a:bodyPr>
           <a:lstStyle/>
           <a:p>
-            <a:pPr algn="l">
+            <a:pPr algn="ctr">
               <a:lnSpc>
                 <a:spcPts val="745"/>
               </a:lnSpc>
@@ -39552,7 +42268,7 @@
           </a:bodyPr>
           <a:lstStyle/>
           <a:p>
-            <a:pPr algn="l">
+            <a:pPr algn="ctr">
               <a:lnSpc>
                 <a:spcPts val="745"/>
               </a:lnSpc>
@@ -39748,7 +42464,7 @@
           </a:bodyPr>
           <a:lstStyle/>
           <a:p>
-            <a:pPr algn="l">
+            <a:pPr algn="ctr">
               <a:lnSpc>
                 <a:spcPts val="745"/>
               </a:lnSpc>
@@ -39922,7 +42638,7 @@
           </a:bodyPr>
           <a:lstStyle/>
           <a:p>
-            <a:pPr algn="l">
+            <a:pPr algn="ctr">
               <a:lnSpc>
                 <a:spcPts val="745"/>
               </a:lnSpc>
@@ -40739,49 +43455,6 @@
       </p:grpSpPr>
       <p:sp>
         <p:nvSpPr>
-          <p:cNvPr id="2" name="Rectangle 1"/>
-          <p:cNvSpPr/>
-          <p:nvPr/>
-        </p:nvSpPr>
-        <p:spPr>
-          <a:xfrm>
-            <a:off x="0" y="0"/>
-            <a:ext cx="12191952" cy="896683"/>
-          </a:xfrm>
-          <a:prstGeom prst="rect">
-            <a:avLst/>
-          </a:prstGeom>
-          <a:noFill/>
-          <a:ln>
-            <a:noFill/>
-          </a:ln>
-          <a:effectLst/>
-        </p:spPr>
-        <p:style>
-          <a:lnRef idx="1">
-            <a:schemeClr val="accent1"/>
-          </a:lnRef>
-          <a:fillRef idx="3">
-            <a:schemeClr val="accent1"/>
-          </a:fillRef>
-          <a:effectRef idx="2">
-            <a:schemeClr val="accent1"/>
-          </a:effectRef>
-          <a:fontRef idx="minor">
-            <a:schemeClr val="lt1"/>
-          </a:fontRef>
-        </p:style>
-        <p:txBody>
-          <a:bodyPr rtlCol="0" anchor="ctr"/>
-          <a:lstStyle/>
-          <a:p>
-            <a:pPr algn="ctr"/>
-            <a:endParaRPr/>
-          </a:p>
-        </p:txBody>
-      </p:sp>
-      <p:sp>
-        <p:nvSpPr>
           <p:cNvPr id="3" name="Rectangle 2"/>
           <p:cNvSpPr/>
           <p:nvPr/>
@@ -43594,49 +46267,6 @@
       </p:grpSpPr>
       <p:sp>
         <p:nvSpPr>
-          <p:cNvPr id="2" name="Rectangle 1"/>
-          <p:cNvSpPr/>
-          <p:nvPr/>
-        </p:nvSpPr>
-        <p:spPr>
-          <a:xfrm>
-            <a:off x="0" y="0"/>
-            <a:ext cx="12191952" cy="896683"/>
-          </a:xfrm>
-          <a:prstGeom prst="rect">
-            <a:avLst/>
-          </a:prstGeom>
-          <a:noFill/>
-          <a:ln>
-            <a:noFill/>
-          </a:ln>
-          <a:effectLst/>
-        </p:spPr>
-        <p:style>
-          <a:lnRef idx="1">
-            <a:schemeClr val="accent1"/>
-          </a:lnRef>
-          <a:fillRef idx="3">
-            <a:schemeClr val="accent1"/>
-          </a:fillRef>
-          <a:effectRef idx="2">
-            <a:schemeClr val="accent1"/>
-          </a:effectRef>
-          <a:fontRef idx="minor">
-            <a:schemeClr val="lt1"/>
-          </a:fontRef>
-        </p:style>
-        <p:txBody>
-          <a:bodyPr rtlCol="0" anchor="ctr"/>
-          <a:lstStyle/>
-          <a:p>
-            <a:pPr algn="ctr"/>
-            <a:endParaRPr/>
-          </a:p>
-        </p:txBody>
-      </p:sp>
-      <p:sp>
-        <p:nvSpPr>
           <p:cNvPr id="3" name="Rectangle 2"/>
           <p:cNvSpPr/>
           <p:nvPr/>
@@ -43818,7 +46448,7 @@
           </a:bodyPr>
           <a:lstStyle/>
           <a:p>
-            <a:pPr algn="r">
+            <a:pPr algn="ctr">
               <a:lnSpc>
                 <a:spcPts val="939"/>
               </a:lnSpc>
@@ -43956,7 +46586,7 @@
           </a:bodyPr>
           <a:lstStyle/>
           <a:p>
-            <a:pPr algn="l">
+            <a:pPr algn="ctr">
               <a:lnSpc>
                 <a:spcPts val="1004"/>
               </a:lnSpc>
@@ -44023,7 +46653,7 @@
           </a:bodyPr>
           <a:lstStyle/>
           <a:p>
-            <a:pPr algn="l">
+            <a:pPr algn="ctr">
               <a:lnSpc>
                 <a:spcPts val="1004"/>
               </a:lnSpc>
@@ -44090,7 +46720,7 @@
           </a:bodyPr>
           <a:lstStyle/>
           <a:p>
-            <a:pPr algn="l">
+            <a:pPr algn="ctr">
               <a:lnSpc>
                 <a:spcPts val="1004"/>
               </a:lnSpc>
@@ -44157,7 +46787,7 @@
           </a:bodyPr>
           <a:lstStyle/>
           <a:p>
-            <a:pPr algn="l">
+            <a:pPr algn="ctr">
               <a:lnSpc>
                 <a:spcPts val="1004"/>
               </a:lnSpc>
@@ -44224,7 +46854,7 @@
           </a:bodyPr>
           <a:lstStyle/>
           <a:p>
-            <a:pPr algn="l">
+            <a:pPr algn="ctr">
               <a:lnSpc>
                 <a:spcPts val="1004"/>
               </a:lnSpc>
@@ -44291,7 +46921,7 @@
           </a:bodyPr>
           <a:lstStyle/>
           <a:p>
-            <a:pPr algn="l">
+            <a:pPr algn="ctr">
               <a:lnSpc>
                 <a:spcPts val="1004"/>
               </a:lnSpc>
@@ -44358,7 +46988,7 @@
           </a:bodyPr>
           <a:lstStyle/>
           <a:p>
-            <a:pPr algn="l">
+            <a:pPr algn="ctr">
               <a:lnSpc>
                 <a:spcPts val="1004"/>
               </a:lnSpc>
@@ -44425,7 +47055,7 @@
           </a:bodyPr>
           <a:lstStyle/>
           <a:p>
-            <a:pPr algn="l">
+            <a:pPr algn="ctr">
               <a:lnSpc>
                 <a:spcPts val="1004"/>
               </a:lnSpc>
@@ -44492,7 +47122,7 @@
           </a:bodyPr>
           <a:lstStyle/>
           <a:p>
-            <a:pPr algn="l">
+            <a:pPr algn="ctr">
               <a:lnSpc>
                 <a:spcPts val="1374"/>
               </a:lnSpc>
@@ -44653,7 +47283,7 @@
           </a:bodyPr>
           <a:lstStyle/>
           <a:p>
-            <a:pPr algn="l">
+            <a:pPr algn="ctr">
               <a:lnSpc>
                 <a:spcPts val="1374"/>
               </a:lnSpc>
@@ -44814,7 +47444,7 @@
           </a:bodyPr>
           <a:lstStyle/>
           <a:p>
-            <a:pPr algn="l">
+            <a:pPr algn="ctr">
               <a:lnSpc>
                 <a:spcPts val="1374"/>
               </a:lnSpc>
@@ -44975,7 +47605,7 @@
           </a:bodyPr>
           <a:lstStyle/>
           <a:p>
-            <a:pPr algn="l">
+            <a:pPr algn="ctr">
               <a:lnSpc>
                 <a:spcPts val="1374"/>
               </a:lnSpc>
@@ -45136,7 +47766,7 @@
           </a:bodyPr>
           <a:lstStyle/>
           <a:p>
-            <a:pPr algn="l">
+            <a:pPr algn="ctr">
               <a:lnSpc>
                 <a:spcPts val="1374"/>
               </a:lnSpc>
@@ -45297,7 +47927,7 @@
           </a:bodyPr>
           <a:lstStyle/>
           <a:p>
-            <a:pPr algn="l">
+            <a:pPr algn="ctr">
               <a:lnSpc>
                 <a:spcPts val="1374"/>
               </a:lnSpc>
@@ -45458,7 +48088,7 @@
           </a:bodyPr>
           <a:lstStyle/>
           <a:p>
-            <a:pPr algn="l">
+            <a:pPr algn="ctr">
               <a:lnSpc>
                 <a:spcPts val="1374"/>
               </a:lnSpc>
@@ -45619,7 +48249,7 @@
           </a:bodyPr>
           <a:lstStyle/>
           <a:p>
-            <a:pPr algn="l">
+            <a:pPr algn="ctr">
               <a:lnSpc>
                 <a:spcPts val="1374"/>
               </a:lnSpc>
@@ -45765,49 +48395,6 @@
       </p:grpSpPr>
       <p:sp>
         <p:nvSpPr>
-          <p:cNvPr id="2" name="Rectangle 1"/>
-          <p:cNvSpPr/>
-          <p:nvPr/>
-        </p:nvSpPr>
-        <p:spPr>
-          <a:xfrm>
-            <a:off x="0" y="0"/>
-            <a:ext cx="12191952" cy="896683"/>
-          </a:xfrm>
-          <a:prstGeom prst="rect">
-            <a:avLst/>
-          </a:prstGeom>
-          <a:noFill/>
-          <a:ln>
-            <a:noFill/>
-          </a:ln>
-          <a:effectLst/>
-        </p:spPr>
-        <p:style>
-          <a:lnRef idx="1">
-            <a:schemeClr val="accent1"/>
-          </a:lnRef>
-          <a:fillRef idx="3">
-            <a:schemeClr val="accent1"/>
-          </a:fillRef>
-          <a:effectRef idx="2">
-            <a:schemeClr val="accent1"/>
-          </a:effectRef>
-          <a:fontRef idx="minor">
-            <a:schemeClr val="lt1"/>
-          </a:fontRef>
-        </p:style>
-        <p:txBody>
-          <a:bodyPr rtlCol="0" anchor="ctr"/>
-          <a:lstStyle/>
-          <a:p>
-            <a:pPr algn="ctr"/>
-            <a:endParaRPr/>
-          </a:p>
-        </p:txBody>
-      </p:sp>
-      <p:sp>
-        <p:nvSpPr>
           <p:cNvPr id="3" name="Rectangle 2"/>
           <p:cNvSpPr/>
           <p:nvPr/>
@@ -45989,7 +48576,7 @@
           </a:bodyPr>
           <a:lstStyle/>
           <a:p>
-            <a:pPr algn="r">
+            <a:pPr algn="ctr">
               <a:lnSpc>
                 <a:spcPts val="939"/>
               </a:lnSpc>
@@ -47779,7 +50366,7 @@
           </a:bodyPr>
           <a:lstStyle/>
           <a:p>
-            <a:pPr algn="l">
+            <a:pPr algn="ctr">
               <a:lnSpc>
                 <a:spcPts val="971"/>
               </a:lnSpc>
@@ -47953,7 +50540,7 @@
           </a:bodyPr>
           <a:lstStyle/>
           <a:p>
-            <a:pPr algn="l">
+            <a:pPr algn="ctr">
               <a:lnSpc>
                 <a:spcPts val="971"/>
               </a:lnSpc>
@@ -48127,7 +50714,7 @@
           </a:bodyPr>
           <a:lstStyle/>
           <a:p>
-            <a:pPr algn="l">
+            <a:pPr algn="ctr">
               <a:lnSpc>
                 <a:spcPts val="971"/>
               </a:lnSpc>
@@ -48301,7 +50888,7 @@
           </a:bodyPr>
           <a:lstStyle/>
           <a:p>
-            <a:pPr algn="l">
+            <a:pPr algn="ctr">
               <a:lnSpc>
                 <a:spcPts val="971"/>
               </a:lnSpc>
@@ -48475,7 +51062,7 @@
           </a:bodyPr>
           <a:lstStyle/>
           <a:p>
-            <a:pPr algn="l">
+            <a:pPr algn="ctr">
               <a:lnSpc>
                 <a:spcPts val="971"/>
               </a:lnSpc>
@@ -49070,49 +51657,6 @@
       </p:grpSpPr>
       <p:sp>
         <p:nvSpPr>
-          <p:cNvPr id="2" name="Rectangle 1"/>
-          <p:cNvSpPr/>
-          <p:nvPr/>
-        </p:nvSpPr>
-        <p:spPr>
-          <a:xfrm>
-            <a:off x="0" y="0"/>
-            <a:ext cx="12191952" cy="896683"/>
-          </a:xfrm>
-          <a:prstGeom prst="rect">
-            <a:avLst/>
-          </a:prstGeom>
-          <a:noFill/>
-          <a:ln>
-            <a:noFill/>
-          </a:ln>
-          <a:effectLst/>
-        </p:spPr>
-        <p:style>
-          <a:lnRef idx="1">
-            <a:schemeClr val="accent1"/>
-          </a:lnRef>
-          <a:fillRef idx="3">
-            <a:schemeClr val="accent1"/>
-          </a:fillRef>
-          <a:effectRef idx="2">
-            <a:schemeClr val="accent1"/>
-          </a:effectRef>
-          <a:fontRef idx="minor">
-            <a:schemeClr val="lt1"/>
-          </a:fontRef>
-        </p:style>
-        <p:txBody>
-          <a:bodyPr rtlCol="0" anchor="ctr"/>
-          <a:lstStyle/>
-          <a:p>
-            <a:pPr algn="ctr"/>
-            <a:endParaRPr/>
-          </a:p>
-        </p:txBody>
-      </p:sp>
-      <p:sp>
-        <p:nvSpPr>
           <p:cNvPr id="3" name="Rectangle 2"/>
           <p:cNvSpPr/>
           <p:nvPr/>
@@ -49294,7 +51838,7 @@
           </a:bodyPr>
           <a:lstStyle/>
           <a:p>
-            <a:pPr algn="r">
+            <a:pPr algn="ctr">
               <a:lnSpc>
                 <a:spcPts val="939"/>
               </a:lnSpc>
@@ -51394,49 +53938,6 @@
       </p:grpSpPr>
       <p:sp>
         <p:nvSpPr>
-          <p:cNvPr id="2" name="Rectangle 1"/>
-          <p:cNvSpPr/>
-          <p:nvPr/>
-        </p:nvSpPr>
-        <p:spPr>
-          <a:xfrm>
-            <a:off x="0" y="0"/>
-            <a:ext cx="12191952" cy="896683"/>
-          </a:xfrm>
-          <a:prstGeom prst="rect">
-            <a:avLst/>
-          </a:prstGeom>
-          <a:noFill/>
-          <a:ln>
-            <a:noFill/>
-          </a:ln>
-          <a:effectLst/>
-        </p:spPr>
-        <p:style>
-          <a:lnRef idx="1">
-            <a:schemeClr val="accent1"/>
-          </a:lnRef>
-          <a:fillRef idx="3">
-            <a:schemeClr val="accent1"/>
-          </a:fillRef>
-          <a:effectRef idx="2">
-            <a:schemeClr val="accent1"/>
-          </a:effectRef>
-          <a:fontRef idx="minor">
-            <a:schemeClr val="lt1"/>
-          </a:fontRef>
-        </p:style>
-        <p:txBody>
-          <a:bodyPr rtlCol="0" anchor="ctr"/>
-          <a:lstStyle/>
-          <a:p>
-            <a:pPr algn="ctr"/>
-            <a:endParaRPr/>
-          </a:p>
-        </p:txBody>
-      </p:sp>
-      <p:sp>
-        <p:nvSpPr>
           <p:cNvPr id="3" name="Rectangle 2"/>
           <p:cNvSpPr/>
           <p:nvPr/>
@@ -51618,7 +54119,7 @@
           </a:bodyPr>
           <a:lstStyle/>
           <a:p>
-            <a:pPr algn="r">
+            <a:pPr algn="ctr">
               <a:lnSpc>
                 <a:spcPts val="939"/>
               </a:lnSpc>
@@ -53926,49 +56427,6 @@
       </p:grpSpPr>
       <p:sp>
         <p:nvSpPr>
-          <p:cNvPr id="2" name="Rectangle 1"/>
-          <p:cNvSpPr/>
-          <p:nvPr/>
-        </p:nvSpPr>
-        <p:spPr>
-          <a:xfrm>
-            <a:off x="0" y="0"/>
-            <a:ext cx="12191952" cy="896683"/>
-          </a:xfrm>
-          <a:prstGeom prst="rect">
-            <a:avLst/>
-          </a:prstGeom>
-          <a:noFill/>
-          <a:ln>
-            <a:noFill/>
-          </a:ln>
-          <a:effectLst/>
-        </p:spPr>
-        <p:style>
-          <a:lnRef idx="1">
-            <a:schemeClr val="accent1"/>
-          </a:lnRef>
-          <a:fillRef idx="3">
-            <a:schemeClr val="accent1"/>
-          </a:fillRef>
-          <a:effectRef idx="2">
-            <a:schemeClr val="accent1"/>
-          </a:effectRef>
-          <a:fontRef idx="minor">
-            <a:schemeClr val="lt1"/>
-          </a:fontRef>
-        </p:style>
-        <p:txBody>
-          <a:bodyPr rtlCol="0" anchor="ctr"/>
-          <a:lstStyle/>
-          <a:p>
-            <a:pPr algn="ctr"/>
-            <a:endParaRPr/>
-          </a:p>
-        </p:txBody>
-      </p:sp>
-      <p:sp>
-        <p:nvSpPr>
           <p:cNvPr id="3" name="Rectangle 2"/>
           <p:cNvSpPr/>
           <p:nvPr/>
@@ -54150,7 +56608,7 @@
           </a:bodyPr>
           <a:lstStyle/>
           <a:p>
-            <a:pPr algn="r">
+            <a:pPr algn="ctr">
               <a:lnSpc>
                 <a:spcPts val="939"/>
               </a:lnSpc>
@@ -54288,7 +56746,7 @@
           </a:bodyPr>
           <a:lstStyle/>
           <a:p>
-            <a:pPr algn="l">
+            <a:pPr algn="ctr">
               <a:lnSpc>
                 <a:spcPts val="1004"/>
               </a:lnSpc>
@@ -54355,7 +56813,7 @@
           </a:bodyPr>
           <a:lstStyle/>
           <a:p>
-            <a:pPr algn="l">
+            <a:pPr algn="ctr">
               <a:lnSpc>
                 <a:spcPts val="1004"/>
               </a:lnSpc>
@@ -54422,7 +56880,7 @@
           </a:bodyPr>
           <a:lstStyle/>
           <a:p>
-            <a:pPr algn="l">
+            <a:pPr algn="ctr">
               <a:lnSpc>
                 <a:spcPts val="1004"/>
               </a:lnSpc>
@@ -54489,7 +56947,7 @@
           </a:bodyPr>
           <a:lstStyle/>
           <a:p>
-            <a:pPr algn="l">
+            <a:pPr algn="ctr">
               <a:lnSpc>
                 <a:spcPts val="1004"/>
               </a:lnSpc>
@@ -54556,7 +57014,7 @@
           </a:bodyPr>
           <a:lstStyle/>
           <a:p>
-            <a:pPr algn="l">
+            <a:pPr algn="ctr">
               <a:lnSpc>
                 <a:spcPts val="1004"/>
               </a:lnSpc>
@@ -54623,7 +57081,7 @@
           </a:bodyPr>
           <a:lstStyle/>
           <a:p>
-            <a:pPr algn="l">
+            <a:pPr algn="ctr">
               <a:lnSpc>
                 <a:spcPts val="1004"/>
               </a:lnSpc>
@@ -54690,7 +57148,7 @@
           </a:bodyPr>
           <a:lstStyle/>
           <a:p>
-            <a:pPr algn="l">
+            <a:pPr algn="ctr">
               <a:lnSpc>
                 <a:spcPts val="1004"/>
               </a:lnSpc>
@@ -54757,7 +57215,7 @@
           </a:bodyPr>
           <a:lstStyle/>
           <a:p>
-            <a:pPr algn="l">
+            <a:pPr algn="ctr">
               <a:lnSpc>
                 <a:spcPts val="1004"/>
               </a:lnSpc>
@@ -54824,7 +57282,7 @@
           </a:bodyPr>
           <a:lstStyle/>
           <a:p>
-            <a:pPr algn="l">
+            <a:pPr algn="ctr">
               <a:lnSpc>
                 <a:spcPts val="1004"/>
               </a:lnSpc>
@@ -54891,7 +57349,7 @@
           </a:bodyPr>
           <a:lstStyle/>
           <a:p>
-            <a:pPr algn="l">
+            <a:pPr algn="ctr">
               <a:lnSpc>
                 <a:spcPts val="1004"/>
               </a:lnSpc>
@@ -54958,7 +57416,7 @@
           </a:bodyPr>
           <a:lstStyle/>
           <a:p>
-            <a:pPr algn="l">
+            <a:pPr algn="ctr">
               <a:lnSpc>
                 <a:spcPts val="1157"/>
               </a:lnSpc>
@@ -55119,7 +57577,7 @@
           </a:bodyPr>
           <a:lstStyle/>
           <a:p>
-            <a:pPr algn="l">
+            <a:pPr algn="ctr">
               <a:lnSpc>
                 <a:spcPts val="1157"/>
               </a:lnSpc>
@@ -55280,7 +57738,7 @@
           </a:bodyPr>
           <a:lstStyle/>
           <a:p>
-            <a:pPr algn="l">
+            <a:pPr algn="ctr">
               <a:lnSpc>
                 <a:spcPts val="1157"/>
               </a:lnSpc>
@@ -55441,7 +57899,7 @@
           </a:bodyPr>
           <a:lstStyle/>
           <a:p>
-            <a:pPr algn="l">
+            <a:pPr algn="ctr">
               <a:lnSpc>
                 <a:spcPts val="1157"/>
               </a:lnSpc>
@@ -55602,7 +58060,7 @@
           </a:bodyPr>
           <a:lstStyle/>
           <a:p>
-            <a:pPr algn="l">
+            <a:pPr algn="ctr">
               <a:lnSpc>
                 <a:spcPts val="1157"/>
               </a:lnSpc>
@@ -55763,7 +58221,7 @@
           </a:bodyPr>
           <a:lstStyle/>
           <a:p>
-            <a:pPr algn="l">
+            <a:pPr algn="ctr">
               <a:lnSpc>
                 <a:spcPts val="1157"/>
               </a:lnSpc>
@@ -55924,7 +58382,7 @@
           </a:bodyPr>
           <a:lstStyle/>
           <a:p>
-            <a:pPr algn="l">
+            <a:pPr algn="ctr">
               <a:lnSpc>
                 <a:spcPts val="1157"/>
               </a:lnSpc>
@@ -56085,7 +58543,7 @@
           </a:bodyPr>
           <a:lstStyle/>
           <a:p>
-            <a:pPr algn="l">
+            <a:pPr algn="ctr">
               <a:lnSpc>
                 <a:spcPts val="1157"/>
               </a:lnSpc>
@@ -56246,7 +58704,7 @@
           </a:bodyPr>
           <a:lstStyle/>
           <a:p>
-            <a:pPr algn="l">
+            <a:pPr algn="ctr">
               <a:lnSpc>
                 <a:spcPts val="1157"/>
               </a:lnSpc>
@@ -56407,7 +58865,7 @@
           </a:bodyPr>
           <a:lstStyle/>
           <a:p>
-            <a:pPr algn="l">
+            <a:pPr algn="ctr">
               <a:lnSpc>
                 <a:spcPts val="1157"/>
               </a:lnSpc>
@@ -56553,49 +59011,6 @@
       </p:grpSpPr>
       <p:sp>
         <p:nvSpPr>
-          <p:cNvPr id="2" name="Rectangle 1"/>
-          <p:cNvSpPr/>
-          <p:nvPr/>
-        </p:nvSpPr>
-        <p:spPr>
-          <a:xfrm>
-            <a:off x="0" y="0"/>
-            <a:ext cx="12191952" cy="896683"/>
-          </a:xfrm>
-          <a:prstGeom prst="rect">
-            <a:avLst/>
-          </a:prstGeom>
-          <a:noFill/>
-          <a:ln>
-            <a:noFill/>
-          </a:ln>
-          <a:effectLst/>
-        </p:spPr>
-        <p:style>
-          <a:lnRef idx="1">
-            <a:schemeClr val="accent1"/>
-          </a:lnRef>
-          <a:fillRef idx="3">
-            <a:schemeClr val="accent1"/>
-          </a:fillRef>
-          <a:effectRef idx="2">
-            <a:schemeClr val="accent1"/>
-          </a:effectRef>
-          <a:fontRef idx="minor">
-            <a:schemeClr val="lt1"/>
-          </a:fontRef>
-        </p:style>
-        <p:txBody>
-          <a:bodyPr rtlCol="0" anchor="ctr"/>
-          <a:lstStyle/>
-          <a:p>
-            <a:pPr algn="ctr"/>
-            <a:endParaRPr/>
-          </a:p>
-        </p:txBody>
-      </p:sp>
-      <p:sp>
-        <p:nvSpPr>
           <p:cNvPr id="3" name="Rectangle 2"/>
           <p:cNvSpPr/>
           <p:nvPr/>
@@ -56777,7 +59192,7 @@
           </a:bodyPr>
           <a:lstStyle/>
           <a:p>
-            <a:pPr algn="r">
+            <a:pPr algn="ctr">
               <a:lnSpc>
                 <a:spcPts val="939"/>
               </a:lnSpc>
@@ -56915,7 +59330,7 @@
           </a:bodyPr>
           <a:lstStyle/>
           <a:p>
-            <a:pPr algn="l">
+            <a:pPr algn="ctr">
               <a:lnSpc>
                 <a:spcPts val="1004"/>
               </a:lnSpc>
@@ -56982,7 +59397,7 @@
           </a:bodyPr>
           <a:lstStyle/>
           <a:p>
-            <a:pPr algn="l">
+            <a:pPr algn="ctr">
               <a:lnSpc>
                 <a:spcPts val="1004"/>
               </a:lnSpc>
@@ -57167,7 +59582,7 @@
           </a:bodyPr>
           <a:lstStyle/>
           <a:p>
-            <a:pPr algn="l">
+            <a:pPr algn="ctr">
               <a:lnSpc>
                 <a:spcPts val="1004"/>
               </a:lnSpc>
@@ -57234,7 +59649,7 @@
           </a:bodyPr>
           <a:lstStyle/>
           <a:p>
-            <a:pPr algn="l">
+            <a:pPr algn="ctr">
               <a:lnSpc>
                 <a:spcPts val="1004"/>
               </a:lnSpc>
@@ -57348,7 +59763,7 @@
           </a:bodyPr>
           <a:lstStyle/>
           <a:p>
-            <a:pPr algn="l">
+            <a:pPr algn="ctr">
               <a:lnSpc>
                 <a:spcPts val="1157"/>
               </a:lnSpc>
@@ -57509,7 +59924,7 @@
           </a:bodyPr>
           <a:lstStyle/>
           <a:p>
-            <a:pPr algn="l">
+            <a:pPr algn="ctr">
               <a:lnSpc>
                 <a:spcPts val="1157"/>
               </a:lnSpc>
@@ -57670,7 +60085,7 @@
           </a:bodyPr>
           <a:lstStyle/>
           <a:p>
-            <a:pPr algn="l">
+            <a:pPr algn="ctr">
               <a:lnSpc>
                 <a:spcPts val="1157"/>
               </a:lnSpc>
@@ -57831,7 +60246,7 @@
           </a:bodyPr>
           <a:lstStyle/>
           <a:p>
-            <a:pPr algn="l">
+            <a:pPr algn="ctr">
               <a:lnSpc>
                 <a:spcPts val="1157"/>
               </a:lnSpc>
@@ -57992,7 +60407,7 @@
           </a:bodyPr>
           <a:lstStyle/>
           <a:p>
-            <a:pPr algn="l">
+            <a:pPr algn="ctr">
               <a:lnSpc>
                 <a:spcPts val="1157"/>
               </a:lnSpc>
@@ -58153,7 +60568,7 @@
           </a:bodyPr>
           <a:lstStyle/>
           <a:p>
-            <a:pPr algn="l">
+            <a:pPr algn="ctr">
               <a:lnSpc>
                 <a:spcPts val="1157"/>
               </a:lnSpc>
